--- a/lecons/F2/11_F2_M1_L05_Man_in_the_Hot_Desert_Milieu.pptx
+++ b/lecons/F2/11_F2_M1_L05_Man_in_the_Hot_Desert_Milieu.pptx
@@ -56,9 +56,19 @@
     <p:sldId id="304" r:id="rId50"/>
     <p:sldId id="305" r:id="rId51"/>
     <p:sldId id="306" r:id="rId52"/>
+    <p:sldId id="307" r:id="rId53"/>
+    <p:sldId id="308" r:id="rId54"/>
+    <p:sldId id="309" r:id="rId55"/>
+    <p:sldId id="310" r:id="rId56"/>
+    <p:sldId id="311" r:id="rId57"/>
+    <p:sldId id="312" r:id="rId58"/>
+    <p:sldId id="313" r:id="rId59"/>
+    <p:sldId id="314" r:id="rId60"/>
+    <p:sldId id="315" r:id="rId61"/>
+    <p:sldId id="316" r:id="rId62"/>
   </p:sldIdLst>
   <p:notesMasterIdLst>
-    <p:notesMasterId r:id="rId53"/>
+    <p:notesMasterId r:id="rId63"/>
   </p:notesMasterIdLst>
   <p:sldSz cx="12192000" cy="6858000"/>
   <p:notesSz cx="6858000" cy="12192000"/>
@@ -640,7 +650,7 @@
           <a:p>
             <a:r>
               <a:rPr lang="en-US" dirty="0"/>
-              <a:t>Listen carefully to this situation from real life. A Tuareg family moves with its camels across the Sahara from one well to another. At an oasis, farmers grow dates under palm trees with water from a well. Think about it, because I am going to ask you some questions.</a:t>
+              <a:t>Listen carefully to this situation from real life. A Tuareg family moves with its camels across the Sahara from one well to another. At an oasis, farmers grow dates under palm trees with water from a well. A pupil asks: "How can people live and farm in a place with almost no rain?" Think about it, because I am going to ask you some questions.</a:t>
             </a:r>
             <a:endParaRPr lang="en-US" dirty="0"/>
           </a:p>
@@ -816,7 +826,7 @@
           <a:p>
             <a:r>
               <a:rPr lang="en-US" dirty="0"/>
-              <a:t>Good. People must find water to live in the desert.</a:t>
+              <a:t>Good. The pupil does not know how people survive and farm in the desert.</a:t>
             </a:r>
             <a:endParaRPr lang="en-US" dirty="0"/>
           </a:p>
@@ -1432,7 +1442,7 @@
           <a:p>
             <a:r>
               <a:rPr lang="en-US" dirty="0"/>
-              <a:t>Activity 1. Look carefully at this diagram: hot deserts of the world. Observe every detail before I ask the question.</a:t>
+              <a:t>Activity 1. Look carefully at this diagram: dry regions of the world. Observe every detail before I ask the question.</a:t>
             </a:r>
             <a:endParaRPr lang="en-US" dirty="0"/>
           </a:p>
@@ -1608,7 +1618,7 @@
           <a:p>
             <a:r>
               <a:rPr lang="en-US" dirty="0"/>
-              <a:t>Here is the question for Activity 1: Name three hot deserts. Take one minute to think and write your answer in your rough notebook.</a:t>
+              <a:t>Here is the question for Activity 1: Which is the largest hot desert of the world? Take one minute to think and write your answer in your rough notebook.</a:t>
             </a:r>
             <a:endParaRPr lang="en-US" dirty="0"/>
           </a:p>
@@ -1696,7 +1706,7 @@
           <a:p>
             <a:r>
               <a:rPr lang="en-US" dirty="0"/>
-              <a:t>Let us check the answer together. The Sahara, the Kalahari and the Arabian Desert.</a:t>
+              <a:t>Let us check the answer together. The Sahara, north of Cameroon.</a:t>
             </a:r>
             <a:endParaRPr lang="en-US" dirty="0"/>
           </a:p>
@@ -1872,7 +1882,7 @@
           <a:p>
             <a:r>
               <a:rPr lang="en-US" dirty="0"/>
-              <a:t>Here is the question for Activity 2: Describe the climate of hot deserts. Take one minute to think and write your answer in your rough notebook.</a:t>
+              <a:t>Here is the question for Activity 2: Why are there no trees here? Take one minute to think and write your answer in your rough notebook.</a:t>
             </a:r>
             <a:endParaRPr lang="en-US" dirty="0"/>
           </a:p>
@@ -1960,7 +1970,7 @@
           <a:p>
             <a:r>
               <a:rPr lang="en-US" dirty="0"/>
-              <a:t>Let us check the answer together. Less than 250 mm of rain, very hot days and cold nights.</a:t>
+              <a:t>Let us check the answer together. There is very little rain (less than 250 mm a year) and it is very hot.</a:t>
             </a:r>
             <a:endParaRPr lang="en-US" dirty="0"/>
           </a:p>
@@ -2048,7 +2058,7 @@
           <a:p>
             <a:r>
               <a:rPr lang="en-US" dirty="0"/>
-              <a:t>Activity 3. Look carefully at this picture: an oasis. Observe every detail before I ask the question.</a:t>
+              <a:t>Activity 3. Look carefully at this picture: a green place in the desert. Observe every detail before I ask the question.</a:t>
             </a:r>
             <a:endParaRPr lang="en-US" dirty="0"/>
           </a:p>
@@ -2136,7 +2146,7 @@
           <a:p>
             <a:r>
               <a:rPr lang="en-US" dirty="0"/>
-              <a:t>Here is the question for Activity 3: Name three resources of hot deserts. Take one minute to think and write your answer in your rough notebook.</a:t>
+              <a:t>Here is the question for Activity 3: Why can people farm at this place? Take one minute to think and write your answer in your rough notebook.</a:t>
             </a:r>
             <a:endParaRPr lang="en-US" dirty="0"/>
           </a:p>
@@ -2224,7 +2234,7 @@
           <a:p>
             <a:r>
               <a:rPr lang="en-US" dirty="0"/>
-              <a:t>Let us check the answer together. Water at oases, oil and minerals, and sunshine (also dates).</a:t>
+              <a:t>Let us check the answer together. There is water from a spring or a well: it is an oasis.</a:t>
             </a:r>
             <a:endParaRPr lang="en-US" dirty="0"/>
           </a:p>
@@ -2400,7 +2410,7 @@
           <a:p>
             <a:r>
               <a:rPr lang="en-US" dirty="0"/>
-              <a:t>Here is the question for Activity 4: How do nomads use the desert? Take one minute to think and write your answer in your rough notebook.</a:t>
+              <a:t>Here is the question for Activity 4: Why is the camel useful in the desert? Take one minute to think and write your answer in your rough notebook.</a:t>
             </a:r>
             <a:endParaRPr lang="en-US" dirty="0"/>
           </a:p>
@@ -2488,7 +2498,7 @@
           <a:p>
             <a:r>
               <a:rPr lang="en-US" dirty="0"/>
-              <a:t>Our topic is Man in his Environment, and the sub-topic is Exploitation of Resources in the Natural Environment. The key notions we shall use today are: oasis, irrigation, pastoral nomadism, hot desert. At the end, you should be able to do this: learners are able to describe how people live in hot deserts and solve their problems.</a:t>
+              <a:t>Our topic is Man in his Environment, and the sub-topic is Exploitation of Resources in the Natural Environment. The key notions we shall use today are: oasis, irrigation, pastoral nomadism. At the end, you should be able to do this: learners are able to describe how people live in hot deserts and solve their problems.</a:t>
             </a:r>
             <a:endParaRPr lang="en-US" dirty="0"/>
           </a:p>
@@ -2576,7 +2586,7 @@
           <a:p>
             <a:r>
               <a:rPr lang="en-US" dirty="0"/>
-              <a:t>Let us check the answer together. They move with camels, goats and sheep from well to well to find water and pasture.</a:t>
+              <a:t>Let us check the answer together. It can walk for days without water and carries people and goods.</a:t>
             </a:r>
             <a:endParaRPr lang="en-US" dirty="0"/>
           </a:p>
@@ -2664,7 +2674,7 @@
           <a:p>
             <a:r>
               <a:rPr lang="en-US" dirty="0"/>
-              <a:t>Activity 5. Look carefully at this picture: people at a desert well. Observe every detail before I ask the question.</a:t>
+              <a:t>Activity 5. Look carefully at this picture: a sandstorm. Observe every detail before I ask the question.</a:t>
             </a:r>
             <a:endParaRPr lang="en-US" dirty="0"/>
           </a:p>
@@ -2752,7 +2762,7 @@
           <a:p>
             <a:r>
               <a:rPr lang="en-US" dirty="0"/>
-              <a:t>Here is the question for Activity 5: Give two problems and two solutions. Take one minute to think and write your answer in your rough notebook.</a:t>
+              <a:t>Here is the question for Activity 5: What problems do sandstorms cause? Take one minute to think and write your answer in your rough notebook.</a:t>
             </a:r>
             <a:endParaRPr lang="en-US" dirty="0"/>
           </a:p>
@@ -2840,7 +2850,7 @@
           <a:p>
             <a:r>
               <a:rPr lang="en-US" dirty="0"/>
-              <a:t>Let us check the answer together. Problems: lack of water, sandstorms. Solutions: wells and irrigation, tree planting.</a:t>
+              <a:t>Let us check the answer together. They bury wells and fields and make breathing difficult.</a:t>
             </a:r>
             <a:endParaRPr lang="en-US" dirty="0"/>
           </a:p>
@@ -3016,7 +3026,7 @@
           <a:p>
             <a:r>
               <a:rPr lang="en-US" dirty="0"/>
-              <a:t>Let us copy Location and Climate. Hot deserts are presented as follows. On this slide we have Location and Climate. Write each point on a new line, with the key term first, and explain it in your own words when we revise.</a:t>
+              <a:t>Let us copy the definitions. The key terms of this lesson are defined as follows. On this slide we have Hot desert and Oasis. Write each point on a new line, with the key term first, and explain it in your own words when we revise. When you finish, we go to the next slide.</a:t>
             </a:r>
             <a:endParaRPr lang="en-US" dirty="0"/>
           </a:p>
@@ -3104,7 +3114,7 @@
           <a:p>
             <a:r>
               <a:rPr lang="en-US" dirty="0"/>
-              <a:t>Now draw this illustration in your notebook: hot deserts of the world. Give it a title and label it clearly.</a:t>
+              <a:t>We continue with the definitions. On this slide we have Irrigation. Write each point on a new line, with the key term first, and explain it in your own words when we revise.</a:t>
             </a:r>
             <a:endParaRPr lang="en-US" dirty="0"/>
           </a:p>
@@ -3192,7 +3202,7 @@
           <a:p>
             <a:r>
               <a:rPr lang="en-US" dirty="0"/>
-              <a:t>Let us copy Resources and Traditional Exploitation. People use the desert in the following ways. On this slide we have Pastoral nomadism and Oasis farming. Write each point on a new line, with the key term first, and explain it in your own words when we revise. When you finish, we go to the next slide.</a:t>
+              <a:t>Let us copy Brief Presentation of Hot Deserts. Hot deserts are presented as follows. Copy the point on Location on the left, then draw the diagram on the right: hot deserts of the world. Give it a title and label it clearly.</a:t>
             </a:r>
             <a:endParaRPr lang="en-US" dirty="0"/>
           </a:p>
@@ -3280,7 +3290,7 @@
           <a:p>
             <a:r>
               <a:rPr lang="en-US" dirty="0"/>
-              <a:t>We continue with Resources and Traditional Exploitation. On this slide we have Other resources. Write each point on a new line, with the key term first, and explain it in your own words when we revise.</a:t>
+              <a:t>Copy the point on Climate on the left, then draw the diagram on the right: a sandy desert. Give it a title and label it clearly.</a:t>
             </a:r>
             <a:endParaRPr lang="en-US" dirty="0"/>
           </a:p>
@@ -3368,7 +3378,7 @@
           <a:p>
             <a:r>
               <a:rPr lang="en-US" dirty="0"/>
-              <a:t>Let us copy Problems and Solutions. People face the following problems and solutions. On this slide we have Problems and Solutions. Write each point on a new line, with the key term first, and explain it in your own words when we revise.</a:t>
+              <a:t>We continue with Brief Presentation of Hot Deserts. On this slide we have Resources. Write each point on a new line, with the key term first, and explain it in your own words when we revise.</a:t>
             </a:r>
             <a:endParaRPr lang="en-US" dirty="0"/>
           </a:p>
@@ -3544,7 +3554,7 @@
           <a:p>
             <a:r>
               <a:rPr lang="en-US" dirty="0"/>
-              <a:t>Now let us check what you have understood. Question 1: Give two resources of hot deserts. Answer in your exercise book.</a:t>
+              <a:t>Let us copy Traditional Methods of Exploitation. People use the desert in the following traditional ways. Copy the point on Pastoral nomadism on the left, then draw the diagram on the right: camels. Give it a title and label it clearly.</a:t>
             </a:r>
             <a:endParaRPr lang="en-US" dirty="0"/>
           </a:p>
@@ -3632,7 +3642,7 @@
           <a:p>
             <a:r>
               <a:rPr lang="en-US" dirty="0"/>
-              <a:t>The expected answer is: water at oases and oil. If you got it right, well done.</a:t>
+              <a:t>Copy the point on Oasis farming on the left, then draw the diagram on the right: an oasis. Give it a title and label it clearly.</a:t>
             </a:r>
             <a:endParaRPr lang="en-US" dirty="0"/>
           </a:p>
@@ -3720,7 +3730,7 @@
           <a:p>
             <a:r>
               <a:rPr lang="en-US" dirty="0"/>
-              <a:t>Now let us check what you have understood. Question 2: Give two problems of the desert. Answer in your exercise book.</a:t>
+              <a:t>Copy the point on Traditional irrigation on the left, then draw the diagram on the right: a shaduf. Give it a title and label it clearly.</a:t>
             </a:r>
             <a:endParaRPr lang="en-US" dirty="0"/>
           </a:p>
@@ -3808,7 +3818,7 @@
           <a:p>
             <a:r>
               <a:rPr lang="en-US" dirty="0"/>
-              <a:t>The expected answer is: lack of water and sandstorms. If you got it right, well done.</a:t>
+              <a:t>We continue with Traditional Methods of Exploitation. On this slide we have Trade. Write each point on a new line, with the key term first, and explain it in your own words when we revise.</a:t>
             </a:r>
             <a:endParaRPr lang="en-US" dirty="0"/>
           </a:p>
@@ -3896,7 +3906,7 @@
           <a:p>
             <a:r>
               <a:rPr lang="en-US" dirty="0"/>
-              <a:t>For those who need more practice, fill in the blanks in your exercise book. The answers are: number 1, oasis; number 2, camel; number 3, irrigation.</a:t>
+              <a:t>Let us copy Problems Faced. People face the following problems. Copy the point on Lack of water on the left, then draw the diagram on the right: a desert well. Give it a title and label it clearly.</a:t>
             </a:r>
             <a:endParaRPr lang="en-US" dirty="0"/>
           </a:p>
@@ -3984,7 +3994,7 @@
           <a:p>
             <a:r>
               <a:rPr lang="en-US" dirty="0"/>
-              <a:t>For your homework: Write three ways people in the Far North of Cameroon save water. We shall correct it at the beginning of our next lesson.</a:t>
+              <a:t>We continue with Problems Faced. On this slide we have Heat and cold, Sandstorms and Poor soils. Write each point on a new line, with the key term first, and explain it in your own words when we revise.</a:t>
             </a:r>
             <a:endParaRPr lang="en-US" dirty="0"/>
           </a:p>
@@ -4072,7 +4082,7 @@
           <a:p>
             <a:r>
               <a:rPr lang="en-US" dirty="0"/>
-              <a:t>Our next lesson will be on Further Study 4: Water Scarcity. Thank you for your attention, and see you next time.</a:t>
+              <a:t>Let us copy Proposed Solutions. The following solutions help people. On this slide we have Deep wells and boreholes. Write each point on a new line, with the key term first, and explain it in your own words when we revise.</a:t>
             </a:r>
             <a:endParaRPr lang="en-US" dirty="0"/>
           </a:p>
@@ -4160,7 +4170,7 @@
           <a:p>
             <a:r>
               <a:rPr lang="en-US" dirty="0"/>
-              <a:t>Let us play the bilingual game. I say a word in English, and you give me the French word. Then we do the reverse.</a:t>
+              <a:t>Copy the point on Modern irrigation on the left, then draw the diagram on the right: modern irrigation. Give it a title and label it clearly.</a:t>
             </a:r>
             <a:endParaRPr lang="en-US" dirty="0"/>
           </a:p>
@@ -4248,7 +4258,7 @@
           <a:p>
             <a:r>
               <a:rPr lang="en-US" dirty="0"/>
-              <a:t>I record this information in the official logbook of the class after the lesson.</a:t>
+              <a:t>We continue with Proposed Solutions. On this slide we have Tree planting and Solar energy. Write each point on a new line, with the key term first, and explain it in your own words when we revise.</a:t>
             </a:r>
             <a:endParaRPr lang="en-US" dirty="0"/>
           </a:p>
@@ -4336,7 +4346,7 @@
           <a:p>
             <a:r>
               <a:rPr lang="en-US" dirty="0"/>
-              <a:t>I complete the second page of the logbook: the matter taught, the evaluation, the homework and the attendance.</a:t>
+              <a:t>Now let us check what you have understood. Question 1: Give two resources of hot deserts. Answer in your exercise book.</a:t>
             </a:r>
             <a:endParaRPr lang="en-US" dirty="0"/>
           </a:p>
@@ -4512,7 +4522,7 @@
           <a:p>
             <a:r>
               <a:rPr lang="en-US" dirty="0"/>
-              <a:t>This slide is for me, the teacher: it gives the timing of the lesson and what to do if the projector is not available.</a:t>
+              <a:t>The expected answer is: water at oases and oil. If you got it right, well done.</a:t>
             </a:r>
             <a:endParaRPr lang="en-US" dirty="0"/>
           </a:p>
@@ -4600,7 +4610,7 @@
           <a:p>
             <a:r>
               <a:rPr lang="en-US" dirty="0"/>
-              <a:t>These are the references and picture credits used to prepare this lesson.</a:t>
+              <a:t>Now let us check what you have understood. Question 2: Give two problems of the desert. Answer in your exercise book.</a:t>
             </a:r>
             <a:endParaRPr lang="en-US" dirty="0"/>
           </a:p>
@@ -4624,6 +4634,710 @@
             <a:fld id="{F7021451-1387-4CA6-816F-3879F97B5CBC}" type="slidenum">
               <a:rPr lang="en-US"/>
               <a:t>51</a:t>
+            </a:fld>
+            <a:endParaRPr lang="en-US"/>
+          </a:p>
+        </p:txBody>
+      </p:sp>
+    </p:spTree>
+    <p:extLst>
+      <p:ext uri="{BB962C8B-B14F-4D97-AF65-F5344CB8AC3E}">
+        <p14:creationId xmlns:p14="http://schemas.microsoft.com/office/powerpoint/2010/main" val="1024086991"/>
+      </p:ext>
+    </p:extLst>
+  </p:cSld>
+  <p:clrMapOvr>
+    <a:masterClrMapping/>
+  </p:clrMapOvr>
+</p:notes>
+</file>
+
+<file path=ppt/notesSlides/notesSlide52.xml><?xml version="1.0" encoding="utf-8"?>
+<p:notes xmlns:a="http://schemas.openxmlformats.org/drawingml/2006/main" xmlns:r="http://schemas.openxmlformats.org/officeDocument/2006/relationships" xmlns:p="http://schemas.openxmlformats.org/presentationml/2006/main">
+  <p:cSld>
+    <p:spTree>
+      <p:nvGrpSpPr>
+        <p:cNvPr id="1" name=""/>
+        <p:cNvGrpSpPr/>
+        <p:nvPr/>
+      </p:nvGrpSpPr>
+      <p:grpSpPr>
+        <a:xfrm>
+          <a:off x="0" y="0"/>
+          <a:ext cx="0" cy="0"/>
+          <a:chOff x="0" y="0"/>
+          <a:chExt cx="0" cy="0"/>
+        </a:xfrm>
+      </p:grpSpPr>
+      <p:sp>
+        <p:nvSpPr>
+          <p:cNvPr id="2" name="Slide Image Placeholder 1"/>
+          <p:cNvSpPr>
+            <a:spLocks noGrp="1" noRot="1" noChangeAspect="1"/>
+          </p:cNvSpPr>
+          <p:nvPr>
+            <p:ph type="sldImg"/>
+          </p:nvPr>
+        </p:nvSpPr>
+        <p:spPr/>
+      </p:sp>
+      <p:sp>
+        <p:nvSpPr>
+          <p:cNvPr id="3" name="Notes Placeholder 2"/>
+          <p:cNvSpPr>
+            <a:spLocks noGrp="1"/>
+          </p:cNvSpPr>
+          <p:nvPr>
+            <p:ph type="body" idx="1"/>
+          </p:nvPr>
+        </p:nvSpPr>
+        <p:spPr/>
+        <p:txBody>
+          <a:bodyPr/>
+          <a:lstStyle/>
+          <a:p>
+            <a:r>
+              <a:rPr lang="en-US" dirty="0"/>
+              <a:t>The expected answer is: lack of water and sandstorms. If you got it right, well done.</a:t>
+            </a:r>
+            <a:endParaRPr lang="en-US" dirty="0"/>
+          </a:p>
+        </p:txBody>
+      </p:sp>
+      <p:sp>
+        <p:nvSpPr>
+          <p:cNvPr id="4" name="Slide Number Placeholder 3"/>
+          <p:cNvSpPr>
+            <a:spLocks noGrp="1"/>
+          </p:cNvSpPr>
+          <p:nvPr>
+            <p:ph type="sldNum" sz="quarter" idx="10"/>
+          </p:nvPr>
+        </p:nvSpPr>
+        <p:spPr/>
+        <p:txBody>
+          <a:bodyPr/>
+          <a:lstStyle/>
+          <a:p>
+            <a:fld id="{F7021451-1387-4CA6-816F-3879F97B5CBC}" type="slidenum">
+              <a:rPr lang="en-US"/>
+              <a:t>52</a:t>
+            </a:fld>
+            <a:endParaRPr lang="en-US"/>
+          </a:p>
+        </p:txBody>
+      </p:sp>
+    </p:spTree>
+    <p:extLst>
+      <p:ext uri="{BB962C8B-B14F-4D97-AF65-F5344CB8AC3E}">
+        <p14:creationId xmlns:p14="http://schemas.microsoft.com/office/powerpoint/2010/main" val="1024086991"/>
+      </p:ext>
+    </p:extLst>
+  </p:cSld>
+  <p:clrMapOvr>
+    <a:masterClrMapping/>
+  </p:clrMapOvr>
+</p:notes>
+</file>
+
+<file path=ppt/notesSlides/notesSlide53.xml><?xml version="1.0" encoding="utf-8"?>
+<p:notes xmlns:a="http://schemas.openxmlformats.org/drawingml/2006/main" xmlns:r="http://schemas.openxmlformats.org/officeDocument/2006/relationships" xmlns:p="http://schemas.openxmlformats.org/presentationml/2006/main">
+  <p:cSld>
+    <p:spTree>
+      <p:nvGrpSpPr>
+        <p:cNvPr id="1" name=""/>
+        <p:cNvGrpSpPr/>
+        <p:nvPr/>
+      </p:nvGrpSpPr>
+      <p:grpSpPr>
+        <a:xfrm>
+          <a:off x="0" y="0"/>
+          <a:ext cx="0" cy="0"/>
+          <a:chOff x="0" y="0"/>
+          <a:chExt cx="0" cy="0"/>
+        </a:xfrm>
+      </p:grpSpPr>
+      <p:sp>
+        <p:nvSpPr>
+          <p:cNvPr id="2" name="Slide Image Placeholder 1"/>
+          <p:cNvSpPr>
+            <a:spLocks noGrp="1" noRot="1" noChangeAspect="1"/>
+          </p:cNvSpPr>
+          <p:nvPr>
+            <p:ph type="sldImg"/>
+          </p:nvPr>
+        </p:nvSpPr>
+        <p:spPr/>
+      </p:sp>
+      <p:sp>
+        <p:nvSpPr>
+          <p:cNvPr id="3" name="Notes Placeholder 2"/>
+          <p:cNvSpPr>
+            <a:spLocks noGrp="1"/>
+          </p:cNvSpPr>
+          <p:nvPr>
+            <p:ph type="body" idx="1"/>
+          </p:nvPr>
+        </p:nvSpPr>
+        <p:spPr/>
+        <p:txBody>
+          <a:bodyPr/>
+          <a:lstStyle/>
+          <a:p>
+            <a:r>
+              <a:rPr lang="en-US" dirty="0"/>
+              <a:t>For those who need more practice, fill in the blanks in your exercise book. The answers are: number 1, oasis; number 2, camel; number 3, irrigation.</a:t>
+            </a:r>
+            <a:endParaRPr lang="en-US" dirty="0"/>
+          </a:p>
+        </p:txBody>
+      </p:sp>
+      <p:sp>
+        <p:nvSpPr>
+          <p:cNvPr id="4" name="Slide Number Placeholder 3"/>
+          <p:cNvSpPr>
+            <a:spLocks noGrp="1"/>
+          </p:cNvSpPr>
+          <p:nvPr>
+            <p:ph type="sldNum" sz="quarter" idx="10"/>
+          </p:nvPr>
+        </p:nvSpPr>
+        <p:spPr/>
+        <p:txBody>
+          <a:bodyPr/>
+          <a:lstStyle/>
+          <a:p>
+            <a:fld id="{F7021451-1387-4CA6-816F-3879F97B5CBC}" type="slidenum">
+              <a:rPr lang="en-US"/>
+              <a:t>53</a:t>
+            </a:fld>
+            <a:endParaRPr lang="en-US"/>
+          </a:p>
+        </p:txBody>
+      </p:sp>
+    </p:spTree>
+    <p:extLst>
+      <p:ext uri="{BB962C8B-B14F-4D97-AF65-F5344CB8AC3E}">
+        <p14:creationId xmlns:p14="http://schemas.microsoft.com/office/powerpoint/2010/main" val="1024086991"/>
+      </p:ext>
+    </p:extLst>
+  </p:cSld>
+  <p:clrMapOvr>
+    <a:masterClrMapping/>
+  </p:clrMapOvr>
+</p:notes>
+</file>
+
+<file path=ppt/notesSlides/notesSlide54.xml><?xml version="1.0" encoding="utf-8"?>
+<p:notes xmlns:a="http://schemas.openxmlformats.org/drawingml/2006/main" xmlns:r="http://schemas.openxmlformats.org/officeDocument/2006/relationships" xmlns:p="http://schemas.openxmlformats.org/presentationml/2006/main">
+  <p:cSld>
+    <p:spTree>
+      <p:nvGrpSpPr>
+        <p:cNvPr id="1" name=""/>
+        <p:cNvGrpSpPr/>
+        <p:nvPr/>
+      </p:nvGrpSpPr>
+      <p:grpSpPr>
+        <a:xfrm>
+          <a:off x="0" y="0"/>
+          <a:ext cx="0" cy="0"/>
+          <a:chOff x="0" y="0"/>
+          <a:chExt cx="0" cy="0"/>
+        </a:xfrm>
+      </p:grpSpPr>
+      <p:sp>
+        <p:nvSpPr>
+          <p:cNvPr id="2" name="Slide Image Placeholder 1"/>
+          <p:cNvSpPr>
+            <a:spLocks noGrp="1" noRot="1" noChangeAspect="1"/>
+          </p:cNvSpPr>
+          <p:nvPr>
+            <p:ph type="sldImg"/>
+          </p:nvPr>
+        </p:nvSpPr>
+        <p:spPr/>
+      </p:sp>
+      <p:sp>
+        <p:nvSpPr>
+          <p:cNvPr id="3" name="Notes Placeholder 2"/>
+          <p:cNvSpPr>
+            <a:spLocks noGrp="1"/>
+          </p:cNvSpPr>
+          <p:nvPr>
+            <p:ph type="body" idx="1"/>
+          </p:nvPr>
+        </p:nvSpPr>
+        <p:spPr/>
+        <p:txBody>
+          <a:bodyPr/>
+          <a:lstStyle/>
+          <a:p>
+            <a:r>
+              <a:rPr lang="en-US" dirty="0"/>
+              <a:t>For your homework: Write three ways people in the Far North of Cameroon save water. We shall correct it at the beginning of our next lesson.</a:t>
+            </a:r>
+            <a:endParaRPr lang="en-US" dirty="0"/>
+          </a:p>
+        </p:txBody>
+      </p:sp>
+      <p:sp>
+        <p:nvSpPr>
+          <p:cNvPr id="4" name="Slide Number Placeholder 3"/>
+          <p:cNvSpPr>
+            <a:spLocks noGrp="1"/>
+          </p:cNvSpPr>
+          <p:nvPr>
+            <p:ph type="sldNum" sz="quarter" idx="10"/>
+          </p:nvPr>
+        </p:nvSpPr>
+        <p:spPr/>
+        <p:txBody>
+          <a:bodyPr/>
+          <a:lstStyle/>
+          <a:p>
+            <a:fld id="{F7021451-1387-4CA6-816F-3879F97B5CBC}" type="slidenum">
+              <a:rPr lang="en-US"/>
+              <a:t>54</a:t>
+            </a:fld>
+            <a:endParaRPr lang="en-US"/>
+          </a:p>
+        </p:txBody>
+      </p:sp>
+    </p:spTree>
+    <p:extLst>
+      <p:ext uri="{BB962C8B-B14F-4D97-AF65-F5344CB8AC3E}">
+        <p14:creationId xmlns:p14="http://schemas.microsoft.com/office/powerpoint/2010/main" val="1024086991"/>
+      </p:ext>
+    </p:extLst>
+  </p:cSld>
+  <p:clrMapOvr>
+    <a:masterClrMapping/>
+  </p:clrMapOvr>
+</p:notes>
+</file>
+
+<file path=ppt/notesSlides/notesSlide55.xml><?xml version="1.0" encoding="utf-8"?>
+<p:notes xmlns:a="http://schemas.openxmlformats.org/drawingml/2006/main" xmlns:r="http://schemas.openxmlformats.org/officeDocument/2006/relationships" xmlns:p="http://schemas.openxmlformats.org/presentationml/2006/main">
+  <p:cSld>
+    <p:spTree>
+      <p:nvGrpSpPr>
+        <p:cNvPr id="1" name=""/>
+        <p:cNvGrpSpPr/>
+        <p:nvPr/>
+      </p:nvGrpSpPr>
+      <p:grpSpPr>
+        <a:xfrm>
+          <a:off x="0" y="0"/>
+          <a:ext cx="0" cy="0"/>
+          <a:chOff x="0" y="0"/>
+          <a:chExt cx="0" cy="0"/>
+        </a:xfrm>
+      </p:grpSpPr>
+      <p:sp>
+        <p:nvSpPr>
+          <p:cNvPr id="2" name="Slide Image Placeholder 1"/>
+          <p:cNvSpPr>
+            <a:spLocks noGrp="1" noRot="1" noChangeAspect="1"/>
+          </p:cNvSpPr>
+          <p:nvPr>
+            <p:ph type="sldImg"/>
+          </p:nvPr>
+        </p:nvSpPr>
+        <p:spPr/>
+      </p:sp>
+      <p:sp>
+        <p:nvSpPr>
+          <p:cNvPr id="3" name="Notes Placeholder 2"/>
+          <p:cNvSpPr>
+            <a:spLocks noGrp="1"/>
+          </p:cNvSpPr>
+          <p:nvPr>
+            <p:ph type="body" idx="1"/>
+          </p:nvPr>
+        </p:nvSpPr>
+        <p:spPr/>
+        <p:txBody>
+          <a:bodyPr/>
+          <a:lstStyle/>
+          <a:p>
+            <a:r>
+              <a:rPr lang="en-US" dirty="0"/>
+              <a:t>Our next lesson will be on Further Study 4: Water Scarcity. Thank you for your attention, and see you next time.</a:t>
+            </a:r>
+            <a:endParaRPr lang="en-US" dirty="0"/>
+          </a:p>
+        </p:txBody>
+      </p:sp>
+      <p:sp>
+        <p:nvSpPr>
+          <p:cNvPr id="4" name="Slide Number Placeholder 3"/>
+          <p:cNvSpPr>
+            <a:spLocks noGrp="1"/>
+          </p:cNvSpPr>
+          <p:nvPr>
+            <p:ph type="sldNum" sz="quarter" idx="10"/>
+          </p:nvPr>
+        </p:nvSpPr>
+        <p:spPr/>
+        <p:txBody>
+          <a:bodyPr/>
+          <a:lstStyle/>
+          <a:p>
+            <a:fld id="{F7021451-1387-4CA6-816F-3879F97B5CBC}" type="slidenum">
+              <a:rPr lang="en-US"/>
+              <a:t>55</a:t>
+            </a:fld>
+            <a:endParaRPr lang="en-US"/>
+          </a:p>
+        </p:txBody>
+      </p:sp>
+    </p:spTree>
+    <p:extLst>
+      <p:ext uri="{BB962C8B-B14F-4D97-AF65-F5344CB8AC3E}">
+        <p14:creationId xmlns:p14="http://schemas.microsoft.com/office/powerpoint/2010/main" val="1024086991"/>
+      </p:ext>
+    </p:extLst>
+  </p:cSld>
+  <p:clrMapOvr>
+    <a:masterClrMapping/>
+  </p:clrMapOvr>
+</p:notes>
+</file>
+
+<file path=ppt/notesSlides/notesSlide56.xml><?xml version="1.0" encoding="utf-8"?>
+<p:notes xmlns:a="http://schemas.openxmlformats.org/drawingml/2006/main" xmlns:r="http://schemas.openxmlformats.org/officeDocument/2006/relationships" xmlns:p="http://schemas.openxmlformats.org/presentationml/2006/main">
+  <p:cSld>
+    <p:spTree>
+      <p:nvGrpSpPr>
+        <p:cNvPr id="1" name=""/>
+        <p:cNvGrpSpPr/>
+        <p:nvPr/>
+      </p:nvGrpSpPr>
+      <p:grpSpPr>
+        <a:xfrm>
+          <a:off x="0" y="0"/>
+          <a:ext cx="0" cy="0"/>
+          <a:chOff x="0" y="0"/>
+          <a:chExt cx="0" cy="0"/>
+        </a:xfrm>
+      </p:grpSpPr>
+      <p:sp>
+        <p:nvSpPr>
+          <p:cNvPr id="2" name="Slide Image Placeholder 1"/>
+          <p:cNvSpPr>
+            <a:spLocks noGrp="1" noRot="1" noChangeAspect="1"/>
+          </p:cNvSpPr>
+          <p:nvPr>
+            <p:ph type="sldImg"/>
+          </p:nvPr>
+        </p:nvSpPr>
+        <p:spPr/>
+      </p:sp>
+      <p:sp>
+        <p:nvSpPr>
+          <p:cNvPr id="3" name="Notes Placeholder 2"/>
+          <p:cNvSpPr>
+            <a:spLocks noGrp="1"/>
+          </p:cNvSpPr>
+          <p:nvPr>
+            <p:ph type="body" idx="1"/>
+          </p:nvPr>
+        </p:nvSpPr>
+        <p:spPr/>
+        <p:txBody>
+          <a:bodyPr/>
+          <a:lstStyle/>
+          <a:p>
+            <a:r>
+              <a:rPr lang="en-US" dirty="0"/>
+              <a:t>Let us play the bilingual game. I say a word in English, and you give me the French word. Then we do the reverse.</a:t>
+            </a:r>
+            <a:endParaRPr lang="en-US" dirty="0"/>
+          </a:p>
+        </p:txBody>
+      </p:sp>
+      <p:sp>
+        <p:nvSpPr>
+          <p:cNvPr id="4" name="Slide Number Placeholder 3"/>
+          <p:cNvSpPr>
+            <a:spLocks noGrp="1"/>
+          </p:cNvSpPr>
+          <p:nvPr>
+            <p:ph type="sldNum" sz="quarter" idx="10"/>
+          </p:nvPr>
+        </p:nvSpPr>
+        <p:spPr/>
+        <p:txBody>
+          <a:bodyPr/>
+          <a:lstStyle/>
+          <a:p>
+            <a:fld id="{F7021451-1387-4CA6-816F-3879F97B5CBC}" type="slidenum">
+              <a:rPr lang="en-US"/>
+              <a:t>56</a:t>
+            </a:fld>
+            <a:endParaRPr lang="en-US"/>
+          </a:p>
+        </p:txBody>
+      </p:sp>
+    </p:spTree>
+    <p:extLst>
+      <p:ext uri="{BB962C8B-B14F-4D97-AF65-F5344CB8AC3E}">
+        <p14:creationId xmlns:p14="http://schemas.microsoft.com/office/powerpoint/2010/main" val="1024086991"/>
+      </p:ext>
+    </p:extLst>
+  </p:cSld>
+  <p:clrMapOvr>
+    <a:masterClrMapping/>
+  </p:clrMapOvr>
+</p:notes>
+</file>
+
+<file path=ppt/notesSlides/notesSlide57.xml><?xml version="1.0" encoding="utf-8"?>
+<p:notes xmlns:a="http://schemas.openxmlformats.org/drawingml/2006/main" xmlns:r="http://schemas.openxmlformats.org/officeDocument/2006/relationships" xmlns:p="http://schemas.openxmlformats.org/presentationml/2006/main">
+  <p:cSld>
+    <p:spTree>
+      <p:nvGrpSpPr>
+        <p:cNvPr id="1" name=""/>
+        <p:cNvGrpSpPr/>
+        <p:nvPr/>
+      </p:nvGrpSpPr>
+      <p:grpSpPr>
+        <a:xfrm>
+          <a:off x="0" y="0"/>
+          <a:ext cx="0" cy="0"/>
+          <a:chOff x="0" y="0"/>
+          <a:chExt cx="0" cy="0"/>
+        </a:xfrm>
+      </p:grpSpPr>
+      <p:sp>
+        <p:nvSpPr>
+          <p:cNvPr id="2" name="Slide Image Placeholder 1"/>
+          <p:cNvSpPr>
+            <a:spLocks noGrp="1" noRot="1" noChangeAspect="1"/>
+          </p:cNvSpPr>
+          <p:nvPr>
+            <p:ph type="sldImg"/>
+          </p:nvPr>
+        </p:nvSpPr>
+        <p:spPr/>
+      </p:sp>
+      <p:sp>
+        <p:nvSpPr>
+          <p:cNvPr id="3" name="Notes Placeholder 2"/>
+          <p:cNvSpPr>
+            <a:spLocks noGrp="1"/>
+          </p:cNvSpPr>
+          <p:nvPr>
+            <p:ph type="body" idx="1"/>
+          </p:nvPr>
+        </p:nvSpPr>
+        <p:spPr/>
+        <p:txBody>
+          <a:bodyPr/>
+          <a:lstStyle/>
+          <a:p>
+            <a:r>
+              <a:rPr lang="en-US" dirty="0"/>
+              <a:t>I record this information in the official logbook of the class after the lesson.</a:t>
+            </a:r>
+            <a:endParaRPr lang="en-US" dirty="0"/>
+          </a:p>
+        </p:txBody>
+      </p:sp>
+      <p:sp>
+        <p:nvSpPr>
+          <p:cNvPr id="4" name="Slide Number Placeholder 3"/>
+          <p:cNvSpPr>
+            <a:spLocks noGrp="1"/>
+          </p:cNvSpPr>
+          <p:nvPr>
+            <p:ph type="sldNum" sz="quarter" idx="10"/>
+          </p:nvPr>
+        </p:nvSpPr>
+        <p:spPr/>
+        <p:txBody>
+          <a:bodyPr/>
+          <a:lstStyle/>
+          <a:p>
+            <a:fld id="{F7021451-1387-4CA6-816F-3879F97B5CBC}" type="slidenum">
+              <a:rPr lang="en-US"/>
+              <a:t>57</a:t>
+            </a:fld>
+            <a:endParaRPr lang="en-US"/>
+          </a:p>
+        </p:txBody>
+      </p:sp>
+    </p:spTree>
+    <p:extLst>
+      <p:ext uri="{BB962C8B-B14F-4D97-AF65-F5344CB8AC3E}">
+        <p14:creationId xmlns:p14="http://schemas.microsoft.com/office/powerpoint/2010/main" val="1024086991"/>
+      </p:ext>
+    </p:extLst>
+  </p:cSld>
+  <p:clrMapOvr>
+    <a:masterClrMapping/>
+  </p:clrMapOvr>
+</p:notes>
+</file>
+
+<file path=ppt/notesSlides/notesSlide58.xml><?xml version="1.0" encoding="utf-8"?>
+<p:notes xmlns:a="http://schemas.openxmlformats.org/drawingml/2006/main" xmlns:r="http://schemas.openxmlformats.org/officeDocument/2006/relationships" xmlns:p="http://schemas.openxmlformats.org/presentationml/2006/main">
+  <p:cSld>
+    <p:spTree>
+      <p:nvGrpSpPr>
+        <p:cNvPr id="1" name=""/>
+        <p:cNvGrpSpPr/>
+        <p:nvPr/>
+      </p:nvGrpSpPr>
+      <p:grpSpPr>
+        <a:xfrm>
+          <a:off x="0" y="0"/>
+          <a:ext cx="0" cy="0"/>
+          <a:chOff x="0" y="0"/>
+          <a:chExt cx="0" cy="0"/>
+        </a:xfrm>
+      </p:grpSpPr>
+      <p:sp>
+        <p:nvSpPr>
+          <p:cNvPr id="2" name="Slide Image Placeholder 1"/>
+          <p:cNvSpPr>
+            <a:spLocks noGrp="1" noRot="1" noChangeAspect="1"/>
+          </p:cNvSpPr>
+          <p:nvPr>
+            <p:ph type="sldImg"/>
+          </p:nvPr>
+        </p:nvSpPr>
+        <p:spPr/>
+      </p:sp>
+      <p:sp>
+        <p:nvSpPr>
+          <p:cNvPr id="3" name="Notes Placeholder 2"/>
+          <p:cNvSpPr>
+            <a:spLocks noGrp="1"/>
+          </p:cNvSpPr>
+          <p:nvPr>
+            <p:ph type="body" idx="1"/>
+          </p:nvPr>
+        </p:nvSpPr>
+        <p:spPr/>
+        <p:txBody>
+          <a:bodyPr/>
+          <a:lstStyle/>
+          <a:p>
+            <a:r>
+              <a:rPr lang="en-US" dirty="0"/>
+              <a:t>I complete the second page of the logbook: the matter taught, the evaluation, the homework and the attendance.</a:t>
+            </a:r>
+            <a:endParaRPr lang="en-US" dirty="0"/>
+          </a:p>
+        </p:txBody>
+      </p:sp>
+      <p:sp>
+        <p:nvSpPr>
+          <p:cNvPr id="4" name="Slide Number Placeholder 3"/>
+          <p:cNvSpPr>
+            <a:spLocks noGrp="1"/>
+          </p:cNvSpPr>
+          <p:nvPr>
+            <p:ph type="sldNum" sz="quarter" idx="10"/>
+          </p:nvPr>
+        </p:nvSpPr>
+        <p:spPr/>
+        <p:txBody>
+          <a:bodyPr/>
+          <a:lstStyle/>
+          <a:p>
+            <a:fld id="{F7021451-1387-4CA6-816F-3879F97B5CBC}" type="slidenum">
+              <a:rPr lang="en-US"/>
+              <a:t>58</a:t>
+            </a:fld>
+            <a:endParaRPr lang="en-US"/>
+          </a:p>
+        </p:txBody>
+      </p:sp>
+    </p:spTree>
+    <p:extLst>
+      <p:ext uri="{BB962C8B-B14F-4D97-AF65-F5344CB8AC3E}">
+        <p14:creationId xmlns:p14="http://schemas.microsoft.com/office/powerpoint/2010/main" val="1024086991"/>
+      </p:ext>
+    </p:extLst>
+  </p:cSld>
+  <p:clrMapOvr>
+    <a:masterClrMapping/>
+  </p:clrMapOvr>
+</p:notes>
+</file>
+
+<file path=ppt/notesSlides/notesSlide59.xml><?xml version="1.0" encoding="utf-8"?>
+<p:notes xmlns:a="http://schemas.openxmlformats.org/drawingml/2006/main" xmlns:r="http://schemas.openxmlformats.org/officeDocument/2006/relationships" xmlns:p="http://schemas.openxmlformats.org/presentationml/2006/main">
+  <p:cSld>
+    <p:spTree>
+      <p:nvGrpSpPr>
+        <p:cNvPr id="1" name=""/>
+        <p:cNvGrpSpPr/>
+        <p:nvPr/>
+      </p:nvGrpSpPr>
+      <p:grpSpPr>
+        <a:xfrm>
+          <a:off x="0" y="0"/>
+          <a:ext cx="0" cy="0"/>
+          <a:chOff x="0" y="0"/>
+          <a:chExt cx="0" cy="0"/>
+        </a:xfrm>
+      </p:grpSpPr>
+      <p:sp>
+        <p:nvSpPr>
+          <p:cNvPr id="2" name="Slide Image Placeholder 1"/>
+          <p:cNvSpPr>
+            <a:spLocks noGrp="1" noRot="1" noChangeAspect="1"/>
+          </p:cNvSpPr>
+          <p:nvPr>
+            <p:ph type="sldImg"/>
+          </p:nvPr>
+        </p:nvSpPr>
+        <p:spPr/>
+      </p:sp>
+      <p:sp>
+        <p:nvSpPr>
+          <p:cNvPr id="3" name="Notes Placeholder 2"/>
+          <p:cNvSpPr>
+            <a:spLocks noGrp="1"/>
+          </p:cNvSpPr>
+          <p:nvPr>
+            <p:ph type="body" idx="1"/>
+          </p:nvPr>
+        </p:nvSpPr>
+        <p:spPr/>
+        <p:txBody>
+          <a:bodyPr/>
+          <a:lstStyle/>
+          <a:p>
+            <a:r>
+              <a:rPr lang="en-US" dirty="0"/>
+              <a:t>This slide is for me, the teacher: it gives the timing of the lesson and what to do if the projector is not available.</a:t>
+            </a:r>
+            <a:endParaRPr lang="en-US" dirty="0"/>
+          </a:p>
+        </p:txBody>
+      </p:sp>
+      <p:sp>
+        <p:nvSpPr>
+          <p:cNvPr id="4" name="Slide Number Placeholder 3"/>
+          <p:cNvSpPr>
+            <a:spLocks noGrp="1"/>
+          </p:cNvSpPr>
+          <p:nvPr>
+            <p:ph type="sldNum" sz="quarter" idx="10"/>
+          </p:nvPr>
+        </p:nvSpPr>
+        <p:spPr/>
+        <p:txBody>
+          <a:bodyPr/>
+          <a:lstStyle/>
+          <a:p>
+            <a:fld id="{F7021451-1387-4CA6-816F-3879F97B5CBC}" type="slidenum">
+              <a:rPr lang="en-US"/>
+              <a:t>59</a:t>
             </a:fld>
             <a:endParaRPr lang="en-US"/>
           </a:p>
@@ -4730,6 +5444,182 @@
 </p:notes>
 </file>
 
+<file path=ppt/notesSlides/notesSlide60.xml><?xml version="1.0" encoding="utf-8"?>
+<p:notes xmlns:a="http://schemas.openxmlformats.org/drawingml/2006/main" xmlns:r="http://schemas.openxmlformats.org/officeDocument/2006/relationships" xmlns:p="http://schemas.openxmlformats.org/presentationml/2006/main">
+  <p:cSld>
+    <p:spTree>
+      <p:nvGrpSpPr>
+        <p:cNvPr id="1" name=""/>
+        <p:cNvGrpSpPr/>
+        <p:nvPr/>
+      </p:nvGrpSpPr>
+      <p:grpSpPr>
+        <a:xfrm>
+          <a:off x="0" y="0"/>
+          <a:ext cx="0" cy="0"/>
+          <a:chOff x="0" y="0"/>
+          <a:chExt cx="0" cy="0"/>
+        </a:xfrm>
+      </p:grpSpPr>
+      <p:sp>
+        <p:nvSpPr>
+          <p:cNvPr id="2" name="Slide Image Placeholder 1"/>
+          <p:cNvSpPr>
+            <a:spLocks noGrp="1" noRot="1" noChangeAspect="1"/>
+          </p:cNvSpPr>
+          <p:nvPr>
+            <p:ph type="sldImg"/>
+          </p:nvPr>
+        </p:nvSpPr>
+        <p:spPr/>
+      </p:sp>
+      <p:sp>
+        <p:nvSpPr>
+          <p:cNvPr id="3" name="Notes Placeholder 2"/>
+          <p:cNvSpPr>
+            <a:spLocks noGrp="1"/>
+          </p:cNvSpPr>
+          <p:nvPr>
+            <p:ph type="body" idx="1"/>
+          </p:nvPr>
+        </p:nvSpPr>
+        <p:spPr/>
+        <p:txBody>
+          <a:bodyPr/>
+          <a:lstStyle/>
+          <a:p>
+            <a:r>
+              <a:rPr lang="en-US" dirty="0"/>
+              <a:t>Take your time to copy this part; we will continue together.</a:t>
+            </a:r>
+            <a:endParaRPr lang="en-US" dirty="0"/>
+          </a:p>
+        </p:txBody>
+      </p:sp>
+      <p:sp>
+        <p:nvSpPr>
+          <p:cNvPr id="4" name="Slide Number Placeholder 3"/>
+          <p:cNvSpPr>
+            <a:spLocks noGrp="1"/>
+          </p:cNvSpPr>
+          <p:nvPr>
+            <p:ph type="sldNum" sz="quarter" idx="10"/>
+          </p:nvPr>
+        </p:nvSpPr>
+        <p:spPr/>
+        <p:txBody>
+          <a:bodyPr/>
+          <a:lstStyle/>
+          <a:p>
+            <a:fld id="{F7021451-1387-4CA6-816F-3879F97B5CBC}" type="slidenum">
+              <a:rPr lang="en-US"/>
+              <a:t>60</a:t>
+            </a:fld>
+            <a:endParaRPr lang="en-US"/>
+          </a:p>
+        </p:txBody>
+      </p:sp>
+    </p:spTree>
+    <p:extLst>
+      <p:ext uri="{BB962C8B-B14F-4D97-AF65-F5344CB8AC3E}">
+        <p14:creationId xmlns:p14="http://schemas.microsoft.com/office/powerpoint/2010/main" val="1024086991"/>
+      </p:ext>
+    </p:extLst>
+  </p:cSld>
+  <p:clrMapOvr>
+    <a:masterClrMapping/>
+  </p:clrMapOvr>
+</p:notes>
+</file>
+
+<file path=ppt/notesSlides/notesSlide61.xml><?xml version="1.0" encoding="utf-8"?>
+<p:notes xmlns:a="http://schemas.openxmlformats.org/drawingml/2006/main" xmlns:r="http://schemas.openxmlformats.org/officeDocument/2006/relationships" xmlns:p="http://schemas.openxmlformats.org/presentationml/2006/main">
+  <p:cSld>
+    <p:spTree>
+      <p:nvGrpSpPr>
+        <p:cNvPr id="1" name=""/>
+        <p:cNvGrpSpPr/>
+        <p:nvPr/>
+      </p:nvGrpSpPr>
+      <p:grpSpPr>
+        <a:xfrm>
+          <a:off x="0" y="0"/>
+          <a:ext cx="0" cy="0"/>
+          <a:chOff x="0" y="0"/>
+          <a:chExt cx="0" cy="0"/>
+        </a:xfrm>
+      </p:grpSpPr>
+      <p:sp>
+        <p:nvSpPr>
+          <p:cNvPr id="2" name="Slide Image Placeholder 1"/>
+          <p:cNvSpPr>
+            <a:spLocks noGrp="1" noRot="1" noChangeAspect="1"/>
+          </p:cNvSpPr>
+          <p:nvPr>
+            <p:ph type="sldImg"/>
+          </p:nvPr>
+        </p:nvSpPr>
+        <p:spPr/>
+      </p:sp>
+      <p:sp>
+        <p:nvSpPr>
+          <p:cNvPr id="3" name="Notes Placeholder 2"/>
+          <p:cNvSpPr>
+            <a:spLocks noGrp="1"/>
+          </p:cNvSpPr>
+          <p:nvPr>
+            <p:ph type="body" idx="1"/>
+          </p:nvPr>
+        </p:nvSpPr>
+        <p:spPr/>
+        <p:txBody>
+          <a:bodyPr/>
+          <a:lstStyle/>
+          <a:p>
+            <a:r>
+              <a:rPr lang="en-US" dirty="0"/>
+              <a:t>These are the references and picture credits used to prepare this lesson.</a:t>
+            </a:r>
+            <a:endParaRPr lang="en-US" dirty="0"/>
+          </a:p>
+        </p:txBody>
+      </p:sp>
+      <p:sp>
+        <p:nvSpPr>
+          <p:cNvPr id="4" name="Slide Number Placeholder 3"/>
+          <p:cNvSpPr>
+            <a:spLocks noGrp="1"/>
+          </p:cNvSpPr>
+          <p:nvPr>
+            <p:ph type="sldNum" sz="quarter" idx="10"/>
+          </p:nvPr>
+        </p:nvSpPr>
+        <p:spPr/>
+        <p:txBody>
+          <a:bodyPr/>
+          <a:lstStyle/>
+          <a:p>
+            <a:fld id="{F7021451-1387-4CA6-816F-3879F97B5CBC}" type="slidenum">
+              <a:rPr lang="en-US"/>
+              <a:t>61</a:t>
+            </a:fld>
+            <a:endParaRPr lang="en-US"/>
+          </a:p>
+        </p:txBody>
+      </p:sp>
+    </p:spTree>
+    <p:extLst>
+      <p:ext uri="{BB962C8B-B14F-4D97-AF65-F5344CB8AC3E}">
+        <p14:creationId xmlns:p14="http://schemas.microsoft.com/office/powerpoint/2010/main" val="1024086991"/>
+      </p:ext>
+    </p:extLst>
+  </p:cSld>
+  <p:clrMapOvr>
+    <a:masterClrMapping/>
+  </p:clrMapOvr>
+</p:notes>
+</file>
+
 <file path=ppt/notesSlides/notesSlide7.xml><?xml version="1.0" encoding="utf-8"?>
 <p:notes xmlns:a="http://schemas.openxmlformats.org/drawingml/2006/main" xmlns:r="http://schemas.openxmlformats.org/officeDocument/2006/relationships" xmlns:p="http://schemas.openxmlformats.org/presentationml/2006/main">
   <p:cSld>
@@ -4864,7 +5754,7 @@
           <a:p>
             <a:r>
               <a:rPr lang="en-US" dirty="0"/>
-              <a:t>By the end of this lesson, you should be able to do three things. Number 1: locate the hot deserts and describe their climate. Number 2: describe their resources and traditional methods of exploitation. Number 3: explain the problems faced and propose solutions.</a:t>
+              <a:t>By the end of this lesson, you should be able to do three things. Number 1: locate the hot deserts and describe their climate and resources. Number 2: describe the traditional methods of exploitation. Number 3: explain the problems faced and propose solutions.</a:t>
             </a:r>
             <a:endParaRPr lang="en-US" dirty="0"/>
           </a:p>
@@ -6332,7 +7222,7 @@
         <p:spPr>
           <a:xfrm>
             <a:off x="0" y="658368"/>
-            <a:ext cx="5120640" cy="5833872"/>
+            <a:ext cx="2468880" cy="5833872"/>
           </a:xfrm>
           <a:prstGeom prst="rect">
             <a:avLst/>
@@ -6347,8 +7237,8 @@
         </p:nvSpPr>
         <p:spPr>
           <a:xfrm>
-            <a:off x="5349240" y="1005840"/>
-            <a:ext cx="6522415" cy="731520"/>
+            <a:off x="2697480" y="1005840"/>
+            <a:ext cx="9174175" cy="731520"/>
           </a:xfrm>
           <a:prstGeom prst="rect">
             <a:avLst/>
@@ -6388,8 +7278,8 @@
         </p:nvSpPr>
         <p:spPr>
           <a:xfrm>
-            <a:off x="5349240" y="1783080"/>
-            <a:ext cx="6522415" cy="4663440"/>
+            <a:off x="2697480" y="1783080"/>
+            <a:ext cx="9174175" cy="4663440"/>
           </a:xfrm>
           <a:prstGeom prst="rect">
             <a:avLst/>
@@ -6416,7 +7306,7 @@
                 <a:ea typeface="Times New Roman" pitchFamily="34" charset="-122"/>
                 <a:cs typeface="Times New Roman" pitchFamily="34" charset="-120"/>
               </a:rPr>
-              <a:t>A Tuareg family moves with its camels across the Sahara from one well to another. At an oasis, farmers grow dates under palm trees with water from a well.</a:t>
+              <a:t>A Tuareg family moves with its camels across the Sahara from one well to another. At an oasis, farmers grow dates under palm trees with water from a well. A pupil asks: "How can people live and farm in a place with almost no rain?"</a:t>
             </a:r>
             <a:endParaRPr lang="en-US" sz="4000" dirty="0"/>
           </a:p>
@@ -6854,7 +7744,7 @@
                 <a:ea typeface="Times New Roman" pitchFamily="34" charset="-122"/>
                 <a:cs typeface="Times New Roman" pitchFamily="34" charset="-120"/>
               </a:rPr>
-              <a:t>People must find water to live in the desert.</a:t>
+              <a:t>The pupil does not know how people survive and farm in the desert.</a:t>
             </a:r>
             <a:endParaRPr lang="en-US" sz="4000" dirty="0"/>
           </a:p>
@@ -8382,7 +9272,7 @@
                 <a:ea typeface="Times New Roman" pitchFamily="34" charset="-122"/>
                 <a:cs typeface="Times New Roman" pitchFamily="34" charset="-120"/>
               </a:rPr>
-              <a:t>Hot deserts of the world.</a:t>
+              <a:t>Dry regions of the world.</a:t>
             </a:r>
             <a:endParaRPr lang="en-US" sz="1800" dirty="0"/>
           </a:p>
@@ -9196,7 +10086,7 @@
                 <a:ea typeface="Times New Roman" pitchFamily="34" charset="-122"/>
                 <a:cs typeface="Times New Roman" pitchFamily="34" charset="-120"/>
               </a:rPr>
-              <a:t>Name three hot deserts.</a:t>
+              <a:t>Which is the largest hot desert of the world?</a:t>
             </a:r>
             <a:endParaRPr lang="en-US" sz="4000" dirty="0"/>
           </a:p>
@@ -9415,7 +10305,7 @@
                 <a:ea typeface="Times New Roman" pitchFamily="34" charset="-122"/>
                 <a:cs typeface="Times New Roman" pitchFamily="34" charset="-120"/>
               </a:rPr>
-              <a:t>The Sahara, the Kalahari and the Arabian Desert.</a:t>
+              <a:t>The Sahara, north of Cameroon.</a:t>
             </a:r>
             <a:endParaRPr lang="en-US" sz="4000" dirty="0"/>
           </a:p>
@@ -9848,7 +10738,7 @@
                 <a:ea typeface="Times New Roman" pitchFamily="34" charset="-122"/>
                 <a:cs typeface="Times New Roman" pitchFamily="34" charset="-120"/>
               </a:rPr>
-              <a:t>Describe the climate of hot deserts.</a:t>
+              <a:t>Why are there no trees here?</a:t>
             </a:r>
             <a:endParaRPr lang="en-US" sz="4000" dirty="0"/>
           </a:p>
@@ -10067,7 +10957,7 @@
                 <a:ea typeface="Times New Roman" pitchFamily="34" charset="-122"/>
                 <a:cs typeface="Times New Roman" pitchFamily="34" charset="-120"/>
               </a:rPr>
-              <a:t>Less than 250 mm of rain, very hot days and cold nights.</a:t>
+              <a:t>There is very little rain (less than 250 mm a year) and it is very hot.</a:t>
             </a:r>
             <a:endParaRPr lang="en-US" sz="4000" dirty="0"/>
           </a:p>
@@ -10179,7 +11069,7 @@
                 <a:ea typeface="Calibri" pitchFamily="34" charset="-122"/>
                 <a:cs typeface="Calibri" pitchFamily="34" charset="-120"/>
               </a:rPr>
-              <a:t>2. RESOURCES</a:t>
+              <a:t>2. OASIS FARMING</a:t>
             </a:r>
             <a:endParaRPr lang="en-US" sz="1400" dirty="0"/>
           </a:p>
@@ -10281,7 +11171,7 @@
                 <a:ea typeface="Times New Roman" pitchFamily="34" charset="-122"/>
                 <a:cs typeface="Times New Roman" pitchFamily="34" charset="-120"/>
               </a:rPr>
-              <a:t>An oasis.</a:t>
+              <a:t>A green place in the desert.</a:t>
             </a:r>
             <a:endParaRPr lang="en-US" sz="1800" dirty="0"/>
           </a:p>
@@ -10393,7 +11283,7 @@
                 <a:ea typeface="Calibri" pitchFamily="34" charset="-122"/>
                 <a:cs typeface="Calibri" pitchFamily="34" charset="-120"/>
               </a:rPr>
-              <a:t>2. RESOURCES</a:t>
+              <a:t>2. OASIS FARMING</a:t>
             </a:r>
             <a:endParaRPr lang="en-US" sz="1400" dirty="0"/>
           </a:p>
@@ -10500,7 +11390,7 @@
                 <a:ea typeface="Times New Roman" pitchFamily="34" charset="-122"/>
                 <a:cs typeface="Times New Roman" pitchFamily="34" charset="-120"/>
               </a:rPr>
-              <a:t>Name three resources of hot deserts.</a:t>
+              <a:t>Why can people farm at this place?</a:t>
             </a:r>
             <a:endParaRPr lang="en-US" sz="4000" dirty="0"/>
           </a:p>
@@ -10612,7 +11502,7 @@
                 <a:ea typeface="Calibri" pitchFamily="34" charset="-122"/>
                 <a:cs typeface="Calibri" pitchFamily="34" charset="-120"/>
               </a:rPr>
-              <a:t>2. RESOURCES</a:t>
+              <a:t>2. OASIS FARMING</a:t>
             </a:r>
             <a:endParaRPr lang="en-US" sz="1400" dirty="0"/>
           </a:p>
@@ -10719,7 +11609,7 @@
                 <a:ea typeface="Times New Roman" pitchFamily="34" charset="-122"/>
                 <a:cs typeface="Times New Roman" pitchFamily="34" charset="-120"/>
               </a:rPr>
-              <a:t>Water at oases, oil and minerals, and sunshine (also dates).</a:t>
+              <a:t>There is water from a spring or a well: it is an oasis.</a:t>
             </a:r>
             <a:endParaRPr lang="en-US" sz="4000" dirty="0"/>
           </a:p>
@@ -10831,7 +11721,7 @@
                 <a:ea typeface="Calibri" pitchFamily="34" charset="-122"/>
                 <a:cs typeface="Calibri" pitchFamily="34" charset="-120"/>
               </a:rPr>
-              <a:t>3. TRADITIONAL EXPLOITATION</a:t>
+              <a:t>2. PASTORAL NOMADISM</a:t>
             </a:r>
             <a:endParaRPr lang="en-US" sz="1400" dirty="0"/>
           </a:p>
@@ -11045,7 +11935,7 @@
                 <a:ea typeface="Calibri" pitchFamily="34" charset="-122"/>
                 <a:cs typeface="Calibri" pitchFamily="34" charset="-120"/>
               </a:rPr>
-              <a:t>3. TRADITIONAL EXPLOITATION</a:t>
+              <a:t>2. PASTORAL NOMADISM</a:t>
             </a:r>
             <a:endParaRPr lang="en-US" sz="1400" dirty="0"/>
           </a:p>
@@ -11152,7 +12042,7 @@
                 <a:ea typeface="Times New Roman" pitchFamily="34" charset="-122"/>
                 <a:cs typeface="Times New Roman" pitchFamily="34" charset="-120"/>
               </a:rPr>
-              <a:t>How do nomads use the desert?</a:t>
+              <a:t>Why is the camel useful in the desert?</a:t>
             </a:r>
             <a:endParaRPr lang="en-US" sz="4000" dirty="0"/>
           </a:p>
@@ -11835,7 +12725,7 @@
                           <a:ea typeface="Calibri" pitchFamily="34" charset="-122"/>
                           <a:cs typeface="Calibri" pitchFamily="34" charset="-120"/>
                         </a:rPr>
-                        <a:t>Oasis, irrigation, pastoral nomadism, hot desert.</a:t>
+                        <a:t>Oasis, irrigation, pastoral nomadism.</a:t>
                       </a:r>
                       <a:endParaRPr lang="en-US" sz="1700" dirty="0">
                         <a:latin typeface="Calibri" charset="0"/>
@@ -11973,7 +12863,7 @@
                           <a:ea typeface="Calibri" pitchFamily="34" charset="-122"/>
                           <a:cs typeface="Calibri" pitchFamily="34" charset="-120"/>
                         </a:rPr>
-                        <a:t>Location; climatic characteristics; resources; traditional methods of exploitation; problems faced; proposed solutions.</a:t>
+                        <a:t>Location; brief presentation of the climatic characteristics and resources; traditional methods of exploitation of resources; problems faced; proposed solutions.</a:t>
                       </a:r>
                       <a:endParaRPr lang="en-US" sz="1700" dirty="0">
                         <a:latin typeface="Calibri" charset="0"/>
@@ -12273,7 +13163,7 @@
                 <a:ea typeface="Calibri" pitchFamily="34" charset="-122"/>
                 <a:cs typeface="Calibri" pitchFamily="34" charset="-120"/>
               </a:rPr>
-              <a:t>3. TRADITIONAL EXPLOITATION</a:t>
+              <a:t>2. PASTORAL NOMADISM</a:t>
             </a:r>
             <a:endParaRPr lang="en-US" sz="1400" dirty="0"/>
           </a:p>
@@ -12380,7 +13270,7 @@
                 <a:ea typeface="Times New Roman" pitchFamily="34" charset="-122"/>
                 <a:cs typeface="Times New Roman" pitchFamily="34" charset="-120"/>
               </a:rPr>
-              <a:t>They move with camels, goats and sheep from well to well to find water and pasture.</a:t>
+              <a:t>It can walk for days without water and carries people and goods.</a:t>
             </a:r>
             <a:endParaRPr lang="en-US" sz="4000" dirty="0"/>
           </a:p>
@@ -12492,7 +13382,7 @@
                 <a:ea typeface="Calibri" pitchFamily="34" charset="-122"/>
                 <a:cs typeface="Calibri" pitchFamily="34" charset="-120"/>
               </a:rPr>
-              <a:t>4. PROBLEMS AND SOLUTIONS</a:t>
+              <a:t>3. PROBLEMS</a:t>
             </a:r>
             <a:endParaRPr lang="en-US" sz="1400" dirty="0"/>
           </a:p>
@@ -12539,7 +13429,7 @@
       </p:sp>
       <p:pic>
         <p:nvPicPr>
-          <p:cNvPr id="4" name="Image 0" descr="/home/claude/f4/img/v2/f2t_desert_well.jpg">    </p:cNvPr>
+          <p:cNvPr id="4" name="Image 0" descr="/home/claude/f4/img/v2/f2t_sandstorm.jpg">    </p:cNvPr>
           <p:cNvPicPr>
             <a:picLocks noChangeAspect="1"/>
           </p:cNvPicPr>
@@ -12553,8 +13443,8 @@
         </p:blipFill>
         <p:spPr>
           <a:xfrm>
-            <a:off x="2246610" y="1783080"/>
-            <a:ext cx="7698475" cy="4270248"/>
+            <a:off x="1252761" y="1783080"/>
+            <a:ext cx="9686172" cy="4270248"/>
           </a:xfrm>
           <a:prstGeom prst="rect">
             <a:avLst/>
@@ -12594,7 +13484,7 @@
                 <a:ea typeface="Times New Roman" pitchFamily="34" charset="-122"/>
                 <a:cs typeface="Times New Roman" pitchFamily="34" charset="-120"/>
               </a:rPr>
-              <a:t>People at a desert well.</a:t>
+              <a:t>A sandstorm.</a:t>
             </a:r>
             <a:endParaRPr lang="en-US" sz="1800" dirty="0"/>
           </a:p>
@@ -12706,7 +13596,7 @@
                 <a:ea typeface="Calibri" pitchFamily="34" charset="-122"/>
                 <a:cs typeface="Calibri" pitchFamily="34" charset="-120"/>
               </a:rPr>
-              <a:t>4. PROBLEMS AND SOLUTIONS</a:t>
+              <a:t>3. PROBLEMS</a:t>
             </a:r>
             <a:endParaRPr lang="en-US" sz="1400" dirty="0"/>
           </a:p>
@@ -12813,7 +13703,7 @@
                 <a:ea typeface="Times New Roman" pitchFamily="34" charset="-122"/>
                 <a:cs typeface="Times New Roman" pitchFamily="34" charset="-120"/>
               </a:rPr>
-              <a:t>Give two problems and two solutions.</a:t>
+              <a:t>What problems do sandstorms cause?</a:t>
             </a:r>
             <a:endParaRPr lang="en-US" sz="4000" dirty="0"/>
           </a:p>
@@ -12925,7 +13815,7 @@
                 <a:ea typeface="Calibri" pitchFamily="34" charset="-122"/>
                 <a:cs typeface="Calibri" pitchFamily="34" charset="-120"/>
               </a:rPr>
-              <a:t>4. PROBLEMS AND SOLUTIONS</a:t>
+              <a:t>3. PROBLEMS</a:t>
             </a:r>
             <a:endParaRPr lang="en-US" sz="1400" dirty="0"/>
           </a:p>
@@ -13032,7 +13922,7 @@
                 <a:ea typeface="Times New Roman" pitchFamily="34" charset="-122"/>
                 <a:cs typeface="Times New Roman" pitchFamily="34" charset="-120"/>
               </a:rPr>
-              <a:t>Problems: lack of water, sandstorms. Solutions: wells and irrigation, tree planting.</a:t>
+              <a:t>They bury wells and fields and make breathing difficult.</a:t>
             </a:r>
             <a:endParaRPr lang="en-US" sz="4000" dirty="0"/>
           </a:p>
@@ -13468,7 +14358,7 @@
                 <a:ea typeface="Times New Roman" pitchFamily="34" charset="-122"/>
                 <a:cs typeface="Times New Roman" pitchFamily="34" charset="-120"/>
               </a:rPr>
-              <a:t>1. Location and Climate</a:t>
+              <a:t>DEFINITIONS</a:t>
             </a:r>
             <a:endParaRPr lang="en-US" sz="3600" dirty="0"/>
           </a:p>
@@ -13510,7 +14400,7 @@
                 <a:ea typeface="Times New Roman" pitchFamily="34" charset="-122"/>
                 <a:cs typeface="Times New Roman" pitchFamily="34" charset="-120"/>
               </a:rPr>
-              <a:t>Hot deserts are presented as follows:</a:t>
+              <a:t>The key terms of this lesson are defined as follows:</a:t>
             </a:r>
             <a:endParaRPr lang="en-US" sz="4000" dirty="0"/>
           </a:p>
@@ -13530,7 +14420,7 @@
                 <a:ea typeface="Times New Roman" pitchFamily="34" charset="-122"/>
                 <a:cs typeface="Times New Roman" pitchFamily="34" charset="-120"/>
               </a:rPr>
-              <a:t>Location: </a:t>
+              <a:t>Hot desert: </a:t>
             </a:r>
             <a:pPr algn="l" indent="0" marL="0">
               <a:spcAft>
@@ -13547,7 +14437,7 @@
                 <a:ea typeface="Times New Roman" pitchFamily="34" charset="-122"/>
                 <a:cs typeface="Times New Roman" pitchFamily="34" charset="-120"/>
               </a:rPr>
-              <a:t>Hot deserts lie near the tropics, like the Sahara, the Kalahari and the Arabian Desert.</a:t>
+              <a:t>It is a very dry and hot area that receives less than 250 mm of rain a year.</a:t>
             </a:r>
             <a:endParaRPr lang="en-US" sz="4000" dirty="0"/>
           </a:p>
@@ -13567,7 +14457,7 @@
                 <a:ea typeface="Times New Roman" pitchFamily="34" charset="-122"/>
                 <a:cs typeface="Times New Roman" pitchFamily="34" charset="-120"/>
               </a:rPr>
-              <a:t>Climate: </a:t>
+              <a:t>Oasis: </a:t>
             </a:r>
             <a:pPr algn="l" indent="0" marL="0">
               <a:spcAft>
@@ -13584,7 +14474,7 @@
                 <a:ea typeface="Times New Roman" pitchFamily="34" charset="-122"/>
                 <a:cs typeface="Times New Roman" pitchFamily="34" charset="-120"/>
               </a:rPr>
-              <a:t>They receive less than 250 mm of rain, with very hot days and cold nights.</a:t>
+              <a:t>It is a green place in the desert with water from a spring or a well.</a:t>
             </a:r>
             <a:endParaRPr lang="en-US" sz="4000" dirty="0"/>
           </a:p>
@@ -13702,48 +14592,9 @@
           </a:p>
         </p:txBody>
       </p:sp>
-      <p:sp>
-        <p:nvSpPr>
-          <p:cNvPr id="3" name="Text 1"/>
-          <p:cNvSpPr/>
-          <p:nvPr/>
-        </p:nvSpPr>
-        <p:spPr>
-          <a:xfrm>
-            <a:off x="457200" y="1005840"/>
-            <a:ext cx="11277295" cy="731520"/>
-          </a:xfrm>
-          <a:prstGeom prst="rect">
-            <a:avLst/>
-          </a:prstGeom>
-          <a:noFill/>
-          <a:ln/>
-        </p:spPr>
-        <p:txBody>
-          <a:bodyPr wrap="square" lIns="0" tIns="0" rIns="0" bIns="0" rtlCol="0" anchor="ctr"/>
-          <a:lstStyle/>
-          <a:p>
-            <a:pPr algn="ctr" indent="0" marL="0">
-              <a:buNone/>
-            </a:pPr>
-            <a:r>
-              <a:rPr lang="en-US" sz="3600" b="1" dirty="0">
-                <a:solidFill>
-                  <a:srgbClr val="990011"/>
-                </a:solidFill>
-                <a:latin typeface="Times New Roman" pitchFamily="34" charset="0"/>
-                <a:ea typeface="Times New Roman" pitchFamily="34" charset="-122"/>
-                <a:cs typeface="Times New Roman" pitchFamily="34" charset="-120"/>
-              </a:rPr>
-              <a:t>1. Location and Climate</a:t>
-            </a:r>
-            <a:endParaRPr lang="en-US" sz="3600" dirty="0"/>
-          </a:p>
-        </p:txBody>
-      </p:sp>
       <p:pic>
         <p:nvPicPr>
-          <p:cNvPr id="4" name="Image 0" descr="/home/claude/f4/img/v2/deserts_world_big.png">    </p:cNvPr>
+          <p:cNvPr id="3" name="Image 0" descr="/home/claude/f4/img/minesec_sheet.png">    </p:cNvPr>
           <p:cNvPicPr>
             <a:picLocks noChangeAspect="1"/>
           </p:cNvPicPr>
@@ -13757,8 +14608,8 @@
         </p:blipFill>
         <p:spPr>
           <a:xfrm>
-            <a:off x="1215564" y="1783080"/>
-            <a:ext cx="9760567" cy="4270248"/>
+            <a:off x="0" y="658368"/>
+            <a:ext cx="5120640" cy="5833872"/>
           </a:xfrm>
           <a:prstGeom prst="rect">
             <a:avLst/>
@@ -13767,14 +14618,14 @@
       </p:pic>
       <p:sp>
         <p:nvSpPr>
-          <p:cNvPr id="5" name="Text 2"/>
+          <p:cNvPr id="4" name="Text 1"/>
           <p:cNvSpPr/>
           <p:nvPr/>
         </p:nvSpPr>
         <p:spPr>
           <a:xfrm>
-            <a:off x="457200" y="6089904"/>
-            <a:ext cx="11277295" cy="347472"/>
+            <a:off x="5349240" y="1005840"/>
+            <a:ext cx="6522415" cy="731520"/>
           </a:xfrm>
           <a:prstGeom prst="rect">
             <a:avLst/>
@@ -13783,24 +14634,85 @@
           <a:ln/>
         </p:spPr>
         <p:txBody>
-          <a:bodyPr wrap="square" lIns="0" tIns="0" rIns="0" bIns="0" rtlCol="0" anchor="ctr"/>
+          <a:bodyPr wrap="square" lIns="0" tIns="0" rIns="0" bIns="0" rtlCol="0" anchor="ctr">
+            <a:normAutofit/>
+          </a:bodyPr>
           <a:lstStyle/>
           <a:p>
             <a:pPr algn="ctr" indent="0" marL="0">
               <a:buNone/>
             </a:pPr>
             <a:r>
-              <a:rPr lang="en-US" sz="1800" i="1" dirty="0">
-                <a:solidFill>
-                  <a:srgbClr val="555555"/>
+              <a:rPr lang="en-US" sz="3600" b="1" dirty="0">
+                <a:solidFill>
+                  <a:srgbClr val="990011"/>
                 </a:solidFill>
                 <a:latin typeface="Times New Roman" pitchFamily="34" charset="0"/>
                 <a:ea typeface="Times New Roman" pitchFamily="34" charset="-122"/>
                 <a:cs typeface="Times New Roman" pitchFamily="34" charset="-120"/>
               </a:rPr>
-              <a:t>Illustration: hot deserts of the world</a:t>
-            </a:r>
-            <a:endParaRPr lang="en-US" sz="1800" dirty="0"/>
+              <a:t>DEFINITIONS (continued)</a:t>
+            </a:r>
+            <a:endParaRPr lang="en-US" sz="3600" dirty="0"/>
+          </a:p>
+        </p:txBody>
+      </p:sp>
+      <p:sp>
+        <p:nvSpPr>
+          <p:cNvPr id="5" name="Text 2"/>
+          <p:cNvSpPr/>
+          <p:nvPr/>
+        </p:nvSpPr>
+        <p:spPr>
+          <a:xfrm>
+            <a:off x="5349240" y="1783080"/>
+            <a:ext cx="6522415" cy="4663440"/>
+          </a:xfrm>
+          <a:prstGeom prst="rect">
+            <a:avLst/>
+          </a:prstGeom>
+          <a:noFill/>
+          <a:ln/>
+        </p:spPr>
+        <p:txBody>
+          <a:bodyPr wrap="square" lIns="0" tIns="0" rIns="0" bIns="0" rtlCol="0" anchor="t"/>
+          <a:lstStyle/>
+          <a:p>
+            <a:pPr algn="l" indent="0" marL="0">
+              <a:spcAft>
+                <a:spcPts val="800"/>
+              </a:spcAft>
+              <a:buNone/>
+            </a:pPr>
+            <a:r>
+              <a:rPr lang="en-US" sz="4000" b="1" dirty="0">
+                <a:solidFill>
+                  <a:srgbClr val="111111"/>
+                </a:solidFill>
+                <a:latin typeface="Times New Roman" pitchFamily="34" charset="0"/>
+                <a:ea typeface="Times New Roman" pitchFamily="34" charset="-122"/>
+                <a:cs typeface="Times New Roman" pitchFamily="34" charset="-120"/>
+              </a:rPr>
+              <a:t>Irrigation: </a:t>
+            </a:r>
+            <a:pPr algn="l" indent="0" marL="0">
+              <a:spcAft>
+                <a:spcPts val="800"/>
+              </a:spcAft>
+              <a:buNone/>
+            </a:pPr>
+            <a:r>
+              <a:rPr lang="en-US" sz="4000" dirty="0">
+                <a:solidFill>
+                  <a:srgbClr val="111111"/>
+                </a:solidFill>
+                <a:latin typeface="Times New Roman" pitchFamily="34" charset="0"/>
+                <a:ea typeface="Times New Roman" pitchFamily="34" charset="-122"/>
+                <a:cs typeface="Times New Roman" pitchFamily="34" charset="-120"/>
+              </a:rPr>
+              <a:t>It is bringing water to fields to grow crops.</a:t>
+            </a:r>
+            <a:endParaRPr lang="en-US" sz="4000" dirty="0"/>
           </a:p>
         </p:txBody>
       </p:sp>
@@ -13916,9 +14828,129 @@
           </a:p>
         </p:txBody>
       </p:sp>
+      <p:sp>
+        <p:nvSpPr>
+          <p:cNvPr id="3" name="Text 1"/>
+          <p:cNvSpPr/>
+          <p:nvPr/>
+        </p:nvSpPr>
+        <p:spPr>
+          <a:xfrm>
+            <a:off x="365760" y="1005840"/>
+            <a:ext cx="11460175" cy="731520"/>
+          </a:xfrm>
+          <a:prstGeom prst="rect">
+            <a:avLst/>
+          </a:prstGeom>
+          <a:noFill/>
+          <a:ln/>
+        </p:spPr>
+        <p:txBody>
+          <a:bodyPr wrap="square" lIns="0" tIns="0" rIns="0" bIns="0" rtlCol="0" anchor="ctr">
+            <a:normAutofit/>
+          </a:bodyPr>
+          <a:lstStyle/>
+          <a:p>
+            <a:pPr algn="ctr" indent="0" marL="0">
+              <a:buNone/>
+            </a:pPr>
+            <a:r>
+              <a:rPr lang="en-US" sz="3600" b="1" dirty="0">
+                <a:solidFill>
+                  <a:srgbClr val="990011"/>
+                </a:solidFill>
+                <a:latin typeface="Times New Roman" pitchFamily="34" charset="0"/>
+                <a:ea typeface="Times New Roman" pitchFamily="34" charset="-122"/>
+                <a:cs typeface="Times New Roman" pitchFamily="34" charset="-120"/>
+              </a:rPr>
+              <a:t>1. Brief Presentation of Hot Deserts</a:t>
+            </a:r>
+            <a:endParaRPr lang="en-US" sz="3600" dirty="0"/>
+          </a:p>
+        </p:txBody>
+      </p:sp>
+      <p:sp>
+        <p:nvSpPr>
+          <p:cNvPr id="4" name="Text 2"/>
+          <p:cNvSpPr/>
+          <p:nvPr/>
+        </p:nvSpPr>
+        <p:spPr>
+          <a:xfrm>
+            <a:off x="365760" y="1783080"/>
+            <a:ext cx="4846320" cy="4617720"/>
+          </a:xfrm>
+          <a:prstGeom prst="rect">
+            <a:avLst/>
+          </a:prstGeom>
+          <a:noFill/>
+          <a:ln/>
+        </p:spPr>
+        <p:txBody>
+          <a:bodyPr wrap="square" lIns="0" tIns="0" rIns="0" bIns="0" rtlCol="0" anchor="t"/>
+          <a:lstStyle/>
+          <a:p>
+            <a:pPr algn="l" indent="0" marL="0">
+              <a:spcAft>
+                <a:spcPts val="800"/>
+              </a:spcAft>
+              <a:buNone/>
+            </a:pPr>
+            <a:r>
+              <a:rPr lang="en-US" sz="3600" i="1" dirty="0">
+                <a:solidFill>
+                  <a:srgbClr val="111111"/>
+                </a:solidFill>
+                <a:latin typeface="Times New Roman" pitchFamily="34" charset="0"/>
+                <a:ea typeface="Times New Roman" pitchFamily="34" charset="-122"/>
+                <a:cs typeface="Times New Roman" pitchFamily="34" charset="-120"/>
+              </a:rPr>
+              <a:t>Hot deserts are presented as follows:</a:t>
+            </a:r>
+            <a:endParaRPr lang="en-US" sz="3600" dirty="0"/>
+          </a:p>
+          <a:p>
+            <a:pPr algn="l" indent="0" marL="0">
+              <a:spcAft>
+                <a:spcPts val="800"/>
+              </a:spcAft>
+              <a:buNone/>
+            </a:pPr>
+            <a:r>
+              <a:rPr lang="en-US" sz="3600" b="1" dirty="0">
+                <a:solidFill>
+                  <a:srgbClr val="111111"/>
+                </a:solidFill>
+                <a:latin typeface="Times New Roman" pitchFamily="34" charset="0"/>
+                <a:ea typeface="Times New Roman" pitchFamily="34" charset="-122"/>
+                <a:cs typeface="Times New Roman" pitchFamily="34" charset="-120"/>
+              </a:rPr>
+              <a:t>Location: </a:t>
+            </a:r>
+            <a:pPr algn="l" indent="0" marL="0">
+              <a:spcAft>
+                <a:spcPts val="800"/>
+              </a:spcAft>
+              <a:buNone/>
+            </a:pPr>
+            <a:r>
+              <a:rPr lang="en-US" sz="3600" dirty="0">
+                <a:solidFill>
+                  <a:srgbClr val="111111"/>
+                </a:solidFill>
+                <a:latin typeface="Times New Roman" pitchFamily="34" charset="0"/>
+                <a:ea typeface="Times New Roman" pitchFamily="34" charset="-122"/>
+                <a:cs typeface="Times New Roman" pitchFamily="34" charset="-120"/>
+              </a:rPr>
+              <a:t>Hot deserts lie near the tropics, like the Sahara, the Kalahari and the Arabian Desert.</a:t>
+            </a:r>
+            <a:endParaRPr lang="en-US" sz="3600" dirty="0"/>
+          </a:p>
+        </p:txBody>
+      </p:sp>
       <p:pic>
         <p:nvPicPr>
-          <p:cNvPr id="3" name="Image 0" descr="/home/claude/f4/img/minesec_sheet.png">    </p:cNvPr>
+          <p:cNvPr id="5" name="Image 0" descr="/home/claude/f4/img/v2/deserts_world_big.png">    </p:cNvPr>
           <p:cNvPicPr>
             <a:picLocks noChangeAspect="1"/>
           </p:cNvPicPr>
@@ -13932,8 +14964,8 @@
         </p:blipFill>
         <p:spPr>
           <a:xfrm>
-            <a:off x="0" y="658368"/>
-            <a:ext cx="1463040" cy="5833872"/>
+            <a:off x="5349240" y="2461422"/>
+            <a:ext cx="6659575" cy="2913564"/>
           </a:xfrm>
           <a:prstGeom prst="rect">
             <a:avLst/>
@@ -13942,14 +14974,14 @@
       </p:pic>
       <p:sp>
         <p:nvSpPr>
-          <p:cNvPr id="4" name="Text 1"/>
+          <p:cNvPr id="6" name="Text 3"/>
           <p:cNvSpPr/>
           <p:nvPr/>
         </p:nvSpPr>
         <p:spPr>
           <a:xfrm>
-            <a:off x="1691640" y="1005840"/>
-            <a:ext cx="10180015" cy="731520"/>
+            <a:off x="5349240" y="6089904"/>
+            <a:ext cx="6659575" cy="347472"/>
           </a:xfrm>
           <a:prstGeom prst="rect">
             <a:avLst/>
@@ -13958,142 +14990,24 @@
           <a:ln/>
         </p:spPr>
         <p:txBody>
-          <a:bodyPr wrap="square" lIns="0" tIns="0" rIns="0" bIns="0" rtlCol="0" anchor="ctr">
-            <a:normAutofit/>
-          </a:bodyPr>
+          <a:bodyPr wrap="square" lIns="0" tIns="0" rIns="0" bIns="0" rtlCol="0" anchor="ctr"/>
           <a:lstStyle/>
           <a:p>
             <a:pPr algn="ctr" indent="0" marL="0">
               <a:buNone/>
             </a:pPr>
             <a:r>
-              <a:rPr lang="en-US" sz="3600" b="1" dirty="0">
-                <a:solidFill>
-                  <a:srgbClr val="990011"/>
+              <a:rPr lang="en-US" sz="1600" i="1" dirty="0">
+                <a:solidFill>
+                  <a:srgbClr val="555555"/>
                 </a:solidFill>
                 <a:latin typeface="Times New Roman" pitchFamily="34" charset="0"/>
                 <a:ea typeface="Times New Roman" pitchFamily="34" charset="-122"/>
                 <a:cs typeface="Times New Roman" pitchFamily="34" charset="-120"/>
               </a:rPr>
-              <a:t>2. Resources and Traditional Exploitation</a:t>
-            </a:r>
-            <a:endParaRPr lang="en-US" sz="3600" dirty="0"/>
-          </a:p>
-        </p:txBody>
-      </p:sp>
-      <p:sp>
-        <p:nvSpPr>
-          <p:cNvPr id="5" name="Text 2"/>
-          <p:cNvSpPr/>
-          <p:nvPr/>
-        </p:nvSpPr>
-        <p:spPr>
-          <a:xfrm>
-            <a:off x="1691640" y="1783080"/>
-            <a:ext cx="10180015" cy="4663440"/>
-          </a:xfrm>
-          <a:prstGeom prst="rect">
-            <a:avLst/>
-          </a:prstGeom>
-          <a:noFill/>
-          <a:ln/>
-        </p:spPr>
-        <p:txBody>
-          <a:bodyPr wrap="square" lIns="0" tIns="0" rIns="0" bIns="0" rtlCol="0" anchor="t"/>
-          <a:lstStyle/>
-          <a:p>
-            <a:pPr algn="l" indent="0" marL="0">
-              <a:spcAft>
-                <a:spcPts val="800"/>
-              </a:spcAft>
-              <a:buNone/>
-            </a:pPr>
-            <a:r>
-              <a:rPr lang="en-US" sz="4000" i="1" dirty="0">
-                <a:solidFill>
-                  <a:srgbClr val="111111"/>
-                </a:solidFill>
-                <a:latin typeface="Times New Roman" pitchFamily="34" charset="0"/>
-                <a:ea typeface="Times New Roman" pitchFamily="34" charset="-122"/>
-                <a:cs typeface="Times New Roman" pitchFamily="34" charset="-120"/>
-              </a:rPr>
-              <a:t>People use the desert in the following ways:</a:t>
-            </a:r>
-            <a:endParaRPr lang="en-US" sz="4000" dirty="0"/>
-          </a:p>
-          <a:p>
-            <a:pPr algn="l" indent="0" marL="0">
-              <a:spcAft>
-                <a:spcPts val="800"/>
-              </a:spcAft>
-              <a:buNone/>
-            </a:pPr>
-            <a:r>
-              <a:rPr lang="en-US" sz="4000" b="1" dirty="0">
-                <a:solidFill>
-                  <a:srgbClr val="111111"/>
-                </a:solidFill>
-                <a:latin typeface="Times New Roman" pitchFamily="34" charset="0"/>
-                <a:ea typeface="Times New Roman" pitchFamily="34" charset="-122"/>
-                <a:cs typeface="Times New Roman" pitchFamily="34" charset="-120"/>
-              </a:rPr>
-              <a:t>Pastoral nomadism: </a:t>
-            </a:r>
-            <a:pPr algn="l" indent="0" marL="0">
-              <a:spcAft>
-                <a:spcPts val="800"/>
-              </a:spcAft>
-              <a:buNone/>
-            </a:pPr>
-            <a:r>
-              <a:rPr lang="en-US" sz="4000" dirty="0">
-                <a:solidFill>
-                  <a:srgbClr val="111111"/>
-                </a:solidFill>
-                <a:latin typeface="Times New Roman" pitchFamily="34" charset="0"/>
-                <a:ea typeface="Times New Roman" pitchFamily="34" charset="-122"/>
-                <a:cs typeface="Times New Roman" pitchFamily="34" charset="-120"/>
-              </a:rPr>
-              <a:t>Nomads such as the Tuareg move with camels, goats and sheep.</a:t>
-            </a:r>
-            <a:endParaRPr lang="en-US" sz="4000" dirty="0"/>
-          </a:p>
-          <a:p>
-            <a:pPr algn="l" indent="0" marL="0">
-              <a:spcAft>
-                <a:spcPts val="800"/>
-              </a:spcAft>
-              <a:buNone/>
-            </a:pPr>
-            <a:r>
-              <a:rPr lang="en-US" sz="4000" b="1" dirty="0">
-                <a:solidFill>
-                  <a:srgbClr val="111111"/>
-                </a:solidFill>
-                <a:latin typeface="Times New Roman" pitchFamily="34" charset="0"/>
-                <a:ea typeface="Times New Roman" pitchFamily="34" charset="-122"/>
-                <a:cs typeface="Times New Roman" pitchFamily="34" charset="-120"/>
-              </a:rPr>
-              <a:t>Oasis farming: </a:t>
-            </a:r>
-            <a:pPr algn="l" indent="0" marL="0">
-              <a:spcAft>
-                <a:spcPts val="800"/>
-              </a:spcAft>
-              <a:buNone/>
-            </a:pPr>
-            <a:r>
-              <a:rPr lang="en-US" sz="4000" dirty="0">
-                <a:solidFill>
-                  <a:srgbClr val="111111"/>
-                </a:solidFill>
-                <a:latin typeface="Times New Roman" pitchFamily="34" charset="0"/>
-                <a:ea typeface="Times New Roman" pitchFamily="34" charset="-122"/>
-                <a:cs typeface="Times New Roman" pitchFamily="34" charset="-120"/>
-              </a:rPr>
-              <a:t>Farmers grow dates, vegetables and cereals with irrigation from wells.</a:t>
-            </a:r>
-            <a:endParaRPr lang="en-US" sz="4000" dirty="0"/>
+              <a:t>Illustration: hot deserts of the world</a:t>
+            </a:r>
+            <a:endParaRPr lang="en-US" sz="1600" dirty="0"/>
           </a:p>
         </p:txBody>
       </p:sp>
@@ -14209,9 +15123,109 @@
           </a:p>
         </p:txBody>
       </p:sp>
+      <p:sp>
+        <p:nvSpPr>
+          <p:cNvPr id="3" name="Text 1"/>
+          <p:cNvSpPr/>
+          <p:nvPr/>
+        </p:nvSpPr>
+        <p:spPr>
+          <a:xfrm>
+            <a:off x="365760" y="1005840"/>
+            <a:ext cx="11460175" cy="731520"/>
+          </a:xfrm>
+          <a:prstGeom prst="rect">
+            <a:avLst/>
+          </a:prstGeom>
+          <a:noFill/>
+          <a:ln/>
+        </p:spPr>
+        <p:txBody>
+          <a:bodyPr wrap="square" lIns="0" tIns="0" rIns="0" bIns="0" rtlCol="0" anchor="ctr">
+            <a:normAutofit/>
+          </a:bodyPr>
+          <a:lstStyle/>
+          <a:p>
+            <a:pPr algn="ctr" indent="0" marL="0">
+              <a:buNone/>
+            </a:pPr>
+            <a:r>
+              <a:rPr lang="en-US" sz="3600" b="1" dirty="0">
+                <a:solidFill>
+                  <a:srgbClr val="990011"/>
+                </a:solidFill>
+                <a:latin typeface="Times New Roman" pitchFamily="34" charset="0"/>
+                <a:ea typeface="Times New Roman" pitchFamily="34" charset="-122"/>
+                <a:cs typeface="Times New Roman" pitchFamily="34" charset="-120"/>
+              </a:rPr>
+              <a:t>1. Brief Presentation of Hot Deserts</a:t>
+            </a:r>
+            <a:endParaRPr lang="en-US" sz="3600" dirty="0"/>
+          </a:p>
+        </p:txBody>
+      </p:sp>
+      <p:sp>
+        <p:nvSpPr>
+          <p:cNvPr id="4" name="Text 2"/>
+          <p:cNvSpPr/>
+          <p:nvPr/>
+        </p:nvSpPr>
+        <p:spPr>
+          <a:xfrm>
+            <a:off x="365760" y="1783080"/>
+            <a:ext cx="4846320" cy="4617720"/>
+          </a:xfrm>
+          <a:prstGeom prst="rect">
+            <a:avLst/>
+          </a:prstGeom>
+          <a:noFill/>
+          <a:ln/>
+        </p:spPr>
+        <p:txBody>
+          <a:bodyPr wrap="square" lIns="0" tIns="0" rIns="0" bIns="0" rtlCol="0" anchor="t"/>
+          <a:lstStyle/>
+          <a:p>
+            <a:pPr algn="l" indent="0" marL="0">
+              <a:spcAft>
+                <a:spcPts val="800"/>
+              </a:spcAft>
+              <a:buNone/>
+            </a:pPr>
+            <a:r>
+              <a:rPr lang="en-US" sz="3600" b="1" dirty="0">
+                <a:solidFill>
+                  <a:srgbClr val="111111"/>
+                </a:solidFill>
+                <a:latin typeface="Times New Roman" pitchFamily="34" charset="0"/>
+                <a:ea typeface="Times New Roman" pitchFamily="34" charset="-122"/>
+                <a:cs typeface="Times New Roman" pitchFamily="34" charset="-120"/>
+              </a:rPr>
+              <a:t>Climate: </a:t>
+            </a:r>
+            <a:pPr algn="l" indent="0" marL="0">
+              <a:spcAft>
+                <a:spcPts val="800"/>
+              </a:spcAft>
+              <a:buNone/>
+            </a:pPr>
+            <a:r>
+              <a:rPr lang="en-US" sz="3600" dirty="0">
+                <a:solidFill>
+                  <a:srgbClr val="111111"/>
+                </a:solidFill>
+                <a:latin typeface="Times New Roman" pitchFamily="34" charset="0"/>
+                <a:ea typeface="Times New Roman" pitchFamily="34" charset="-122"/>
+                <a:cs typeface="Times New Roman" pitchFamily="34" charset="-120"/>
+              </a:rPr>
+              <a:t>They receive less than 250 mm of rain, with very hot days and cold nights.</a:t>
+            </a:r>
+            <a:endParaRPr lang="en-US" sz="3600" dirty="0"/>
+          </a:p>
+        </p:txBody>
+      </p:sp>
       <p:pic>
         <p:nvPicPr>
-          <p:cNvPr id="3" name="Image 0" descr="/home/claude/f4/img/minesec_sheet.png">    </p:cNvPr>
+          <p:cNvPr id="5" name="Image 0" descr="/home/claude/f4/img/v2/f2t_erg.jpg">    </p:cNvPr>
           <p:cNvPicPr>
             <a:picLocks noChangeAspect="1"/>
           </p:cNvPicPr>
@@ -14225,8 +15239,8 @@
         </p:blipFill>
         <p:spPr>
           <a:xfrm>
-            <a:off x="0" y="658368"/>
-            <a:ext cx="5120640" cy="5833872"/>
+            <a:off x="5349240" y="2071212"/>
+            <a:ext cx="6659575" cy="3693983"/>
           </a:xfrm>
           <a:prstGeom prst="rect">
             <a:avLst/>
@@ -14235,14 +15249,14 @@
       </p:pic>
       <p:sp>
         <p:nvSpPr>
-          <p:cNvPr id="4" name="Text 1"/>
+          <p:cNvPr id="6" name="Text 3"/>
           <p:cNvSpPr/>
           <p:nvPr/>
         </p:nvSpPr>
         <p:spPr>
           <a:xfrm>
-            <a:off x="5349240" y="1005840"/>
-            <a:ext cx="6522415" cy="731520"/>
+            <a:off x="5349240" y="6089904"/>
+            <a:ext cx="6659575" cy="347472"/>
           </a:xfrm>
           <a:prstGeom prst="rect">
             <a:avLst/>
@@ -14251,85 +15265,24 @@
           <a:ln/>
         </p:spPr>
         <p:txBody>
-          <a:bodyPr wrap="square" lIns="0" tIns="0" rIns="0" bIns="0" rtlCol="0" anchor="ctr">
-            <a:normAutofit/>
-          </a:bodyPr>
+          <a:bodyPr wrap="square" lIns="0" tIns="0" rIns="0" bIns="0" rtlCol="0" anchor="ctr"/>
           <a:lstStyle/>
           <a:p>
             <a:pPr algn="ctr" indent="0" marL="0">
               <a:buNone/>
             </a:pPr>
             <a:r>
-              <a:rPr lang="en-US" sz="3600" b="1" dirty="0">
-                <a:solidFill>
-                  <a:srgbClr val="990011"/>
+              <a:rPr lang="en-US" sz="1600" i="1" dirty="0">
+                <a:solidFill>
+                  <a:srgbClr val="555555"/>
                 </a:solidFill>
                 <a:latin typeface="Times New Roman" pitchFamily="34" charset="0"/>
                 <a:ea typeface="Times New Roman" pitchFamily="34" charset="-122"/>
                 <a:cs typeface="Times New Roman" pitchFamily="34" charset="-120"/>
               </a:rPr>
-              <a:t>2. Resources and Traditional Exploitation (continued)</a:t>
-            </a:r>
-            <a:endParaRPr lang="en-US" sz="3600" dirty="0"/>
-          </a:p>
-        </p:txBody>
-      </p:sp>
-      <p:sp>
-        <p:nvSpPr>
-          <p:cNvPr id="5" name="Text 2"/>
-          <p:cNvSpPr/>
-          <p:nvPr/>
-        </p:nvSpPr>
-        <p:spPr>
-          <a:xfrm>
-            <a:off x="5349240" y="1783080"/>
-            <a:ext cx="6522415" cy="4663440"/>
-          </a:xfrm>
-          <a:prstGeom prst="rect">
-            <a:avLst/>
-          </a:prstGeom>
-          <a:noFill/>
-          <a:ln/>
-        </p:spPr>
-        <p:txBody>
-          <a:bodyPr wrap="square" lIns="0" tIns="0" rIns="0" bIns="0" rtlCol="0" anchor="t"/>
-          <a:lstStyle/>
-          <a:p>
-            <a:pPr algn="l" indent="0" marL="0">
-              <a:spcAft>
-                <a:spcPts val="800"/>
-              </a:spcAft>
-              <a:buNone/>
-            </a:pPr>
-            <a:r>
-              <a:rPr lang="en-US" sz="4000" b="1" dirty="0">
-                <a:solidFill>
-                  <a:srgbClr val="111111"/>
-                </a:solidFill>
-                <a:latin typeface="Times New Roman" pitchFamily="34" charset="0"/>
-                <a:ea typeface="Times New Roman" pitchFamily="34" charset="-122"/>
-                <a:cs typeface="Times New Roman" pitchFamily="34" charset="-120"/>
-              </a:rPr>
-              <a:t>Other resources: </a:t>
-            </a:r>
-            <a:pPr algn="l" indent="0" marL="0">
-              <a:spcAft>
-                <a:spcPts val="800"/>
-              </a:spcAft>
-              <a:buNone/>
-            </a:pPr>
-            <a:r>
-              <a:rPr lang="en-US" sz="4000" dirty="0">
-                <a:solidFill>
-                  <a:srgbClr val="111111"/>
-                </a:solidFill>
-                <a:latin typeface="Times New Roman" pitchFamily="34" charset="0"/>
-                <a:ea typeface="Times New Roman" pitchFamily="34" charset="-122"/>
-                <a:cs typeface="Times New Roman" pitchFamily="34" charset="-120"/>
-              </a:rPr>
-              <a:t>Oil, gas, uranium and sunshine are exploited today.</a:t>
-            </a:r>
-            <a:endParaRPr lang="en-US" sz="4000" dirty="0"/>
+              <a:t>Illustration: a sandy desert</a:t>
+            </a:r>
+            <a:endParaRPr lang="en-US" sz="1600" dirty="0"/>
           </a:p>
         </p:txBody>
       </p:sp>
@@ -14462,7 +15415,7 @@
         <p:spPr>
           <a:xfrm>
             <a:off x="0" y="658368"/>
-            <a:ext cx="2468880" cy="5833872"/>
+            <a:ext cx="5120640" cy="5833872"/>
           </a:xfrm>
           <a:prstGeom prst="rect">
             <a:avLst/>
@@ -14477,8 +15430,8 @@
         </p:nvSpPr>
         <p:spPr>
           <a:xfrm>
-            <a:off x="2697480" y="1005840"/>
-            <a:ext cx="9174175" cy="731520"/>
+            <a:off x="5349240" y="1005840"/>
+            <a:ext cx="6522415" cy="731520"/>
           </a:xfrm>
           <a:prstGeom prst="rect">
             <a:avLst/>
@@ -14504,7 +15457,7 @@
                 <a:ea typeface="Times New Roman" pitchFamily="34" charset="-122"/>
                 <a:cs typeface="Times New Roman" pitchFamily="34" charset="-120"/>
               </a:rPr>
-              <a:t>3. Problems and Solutions</a:t>
+              <a:t>1. Brief Presentation of Hot Deserts</a:t>
             </a:r>
             <a:endParaRPr lang="en-US" sz="3600" dirty="0"/>
           </a:p>
@@ -14518,8 +15471,8 @@
         </p:nvSpPr>
         <p:spPr>
           <a:xfrm>
-            <a:off x="2697480" y="1783080"/>
-            <a:ext cx="9174175" cy="4663440"/>
+            <a:off x="5349240" y="1783080"/>
+            <a:ext cx="6522415" cy="4663440"/>
           </a:xfrm>
           <a:prstGeom prst="rect">
             <a:avLst/>
@@ -14538,7 +15491,7 @@
               <a:buNone/>
             </a:pPr>
             <a:r>
-              <a:rPr lang="en-US" sz="4000" i="1" dirty="0">
+              <a:rPr lang="en-US" sz="4000" b="1" dirty="0">
                 <a:solidFill>
                   <a:srgbClr val="111111"/>
                 </a:solidFill>
@@ -14546,11 +15499,8 @@
                 <a:ea typeface="Times New Roman" pitchFamily="34" charset="-122"/>
                 <a:cs typeface="Times New Roman" pitchFamily="34" charset="-120"/>
               </a:rPr>
-              <a:t>People face the following problems and solutions:</a:t>
-            </a:r>
-            <a:endParaRPr lang="en-US" sz="4000" dirty="0"/>
-          </a:p>
-          <a:p>
+              <a:t>Resources: </a:t>
+            </a:r>
             <a:pPr algn="l" indent="0" marL="0">
               <a:spcAft>
                 <a:spcPts val="800"/>
@@ -14558,7 +15508,7 @@
               <a:buNone/>
             </a:pPr>
             <a:r>
-              <a:rPr lang="en-US" sz="4000" b="1" dirty="0">
+              <a:rPr lang="en-US" sz="4000" dirty="0">
                 <a:solidFill>
                   <a:srgbClr val="111111"/>
                 </a:solidFill>
@@ -14566,61 +15516,7 @@
                 <a:ea typeface="Times New Roman" pitchFamily="34" charset="-122"/>
                 <a:cs typeface="Times New Roman" pitchFamily="34" charset="-120"/>
               </a:rPr>
-              <a:t>Problems: </a:t>
-            </a:r>
-            <a:pPr algn="l" indent="0" marL="0">
-              <a:spcAft>
-                <a:spcPts val="800"/>
-              </a:spcAft>
-              <a:buNone/>
-            </a:pPr>
-            <a:r>
-              <a:rPr lang="en-US" sz="4000" dirty="0">
-                <a:solidFill>
-                  <a:srgbClr val="111111"/>
-                </a:solidFill>
-                <a:latin typeface="Times New Roman" pitchFamily="34" charset="0"/>
-                <a:ea typeface="Times New Roman" pitchFamily="34" charset="-122"/>
-                <a:cs typeface="Times New Roman" pitchFamily="34" charset="-120"/>
-              </a:rPr>
-              <a:t>Lack of water, heat, sandstorms and poor soils make life hard.</a:t>
-            </a:r>
-            <a:endParaRPr lang="en-US" sz="4000" dirty="0"/>
-          </a:p>
-          <a:p>
-            <a:pPr algn="l" indent="0" marL="0">
-              <a:spcAft>
-                <a:spcPts val="800"/>
-              </a:spcAft>
-              <a:buNone/>
-            </a:pPr>
-            <a:r>
-              <a:rPr lang="en-US" sz="4000" b="1" dirty="0">
-                <a:solidFill>
-                  <a:srgbClr val="111111"/>
-                </a:solidFill>
-                <a:latin typeface="Times New Roman" pitchFamily="34" charset="0"/>
-                <a:ea typeface="Times New Roman" pitchFamily="34" charset="-122"/>
-                <a:cs typeface="Times New Roman" pitchFamily="34" charset="-120"/>
-              </a:rPr>
-              <a:t>Solutions: </a:t>
-            </a:r>
-            <a:pPr algn="l" indent="0" marL="0">
-              <a:spcAft>
-                <a:spcPts val="800"/>
-              </a:spcAft>
-              <a:buNone/>
-            </a:pPr>
-            <a:r>
-              <a:rPr lang="en-US" sz="4000" dirty="0">
-                <a:solidFill>
-                  <a:srgbClr val="111111"/>
-                </a:solidFill>
-                <a:latin typeface="Times New Roman" pitchFamily="34" charset="0"/>
-                <a:ea typeface="Times New Roman" pitchFamily="34" charset="-122"/>
-                <a:cs typeface="Times New Roman" pitchFamily="34" charset="-120"/>
-              </a:rPr>
-              <a:t>Deep wells, irrigation, tree planting and solar energy help people.</a:t>
+              <a:t>They have oases, underground water, oil, gas, minerals and sunshine.</a:t>
             </a:r>
             <a:endParaRPr lang="en-US" sz="4000" dirty="0"/>
           </a:p>
@@ -14971,15 +15867,135 @@
                 <a:ea typeface="Calibri" pitchFamily="34" charset="-122"/>
                 <a:cs typeface="Calibri" pitchFamily="34" charset="-120"/>
               </a:rPr>
-              <a:t>FORMATIVE EVALUATION</a:t>
+              <a:t>BOARD SUMMARY</a:t>
             </a:r>
             <a:endParaRPr lang="en-US" sz="1400" dirty="0"/>
+          </a:p>
+        </p:txBody>
+      </p:sp>
+      <p:sp>
+        <p:nvSpPr>
+          <p:cNvPr id="3" name="Text 1"/>
+          <p:cNvSpPr/>
+          <p:nvPr/>
+        </p:nvSpPr>
+        <p:spPr>
+          <a:xfrm>
+            <a:off x="365760" y="1005840"/>
+            <a:ext cx="11460175" cy="731520"/>
+          </a:xfrm>
+          <a:prstGeom prst="rect">
+            <a:avLst/>
+          </a:prstGeom>
+          <a:noFill/>
+          <a:ln/>
+        </p:spPr>
+        <p:txBody>
+          <a:bodyPr wrap="square" lIns="0" tIns="0" rIns="0" bIns="0" rtlCol="0" anchor="ctr">
+            <a:normAutofit/>
+          </a:bodyPr>
+          <a:lstStyle/>
+          <a:p>
+            <a:pPr algn="ctr" indent="0" marL="0">
+              <a:buNone/>
+            </a:pPr>
+            <a:r>
+              <a:rPr lang="en-US" sz="3600" b="1" dirty="0">
+                <a:solidFill>
+                  <a:srgbClr val="990011"/>
+                </a:solidFill>
+                <a:latin typeface="Times New Roman" pitchFamily="34" charset="0"/>
+                <a:ea typeface="Times New Roman" pitchFamily="34" charset="-122"/>
+                <a:cs typeface="Times New Roman" pitchFamily="34" charset="-120"/>
+              </a:rPr>
+              <a:t>2. Traditional Methods of Exploitation</a:t>
+            </a:r>
+            <a:endParaRPr lang="en-US" sz="3600" dirty="0"/>
+          </a:p>
+        </p:txBody>
+      </p:sp>
+      <p:sp>
+        <p:nvSpPr>
+          <p:cNvPr id="4" name="Text 2"/>
+          <p:cNvSpPr/>
+          <p:nvPr/>
+        </p:nvSpPr>
+        <p:spPr>
+          <a:xfrm>
+            <a:off x="365760" y="1783080"/>
+            <a:ext cx="4846320" cy="4617720"/>
+          </a:xfrm>
+          <a:prstGeom prst="rect">
+            <a:avLst/>
+          </a:prstGeom>
+          <a:noFill/>
+          <a:ln/>
+        </p:spPr>
+        <p:txBody>
+          <a:bodyPr wrap="square" lIns="0" tIns="0" rIns="0" bIns="0" rtlCol="0" anchor="t"/>
+          <a:lstStyle/>
+          <a:p>
+            <a:pPr algn="l" indent="0" marL="0">
+              <a:spcAft>
+                <a:spcPts val="800"/>
+              </a:spcAft>
+              <a:buNone/>
+            </a:pPr>
+            <a:r>
+              <a:rPr lang="en-US" sz="3600" i="1" dirty="0">
+                <a:solidFill>
+                  <a:srgbClr val="111111"/>
+                </a:solidFill>
+                <a:latin typeface="Times New Roman" pitchFamily="34" charset="0"/>
+                <a:ea typeface="Times New Roman" pitchFamily="34" charset="-122"/>
+                <a:cs typeface="Times New Roman" pitchFamily="34" charset="-120"/>
+              </a:rPr>
+              <a:t>People use the desert in the following traditional ways:</a:t>
+            </a:r>
+            <a:endParaRPr lang="en-US" sz="3600" dirty="0"/>
+          </a:p>
+          <a:p>
+            <a:pPr algn="l" indent="0" marL="0">
+              <a:spcAft>
+                <a:spcPts val="800"/>
+              </a:spcAft>
+              <a:buNone/>
+            </a:pPr>
+            <a:r>
+              <a:rPr lang="en-US" sz="3600" b="1" dirty="0">
+                <a:solidFill>
+                  <a:srgbClr val="111111"/>
+                </a:solidFill>
+                <a:latin typeface="Times New Roman" pitchFamily="34" charset="0"/>
+                <a:ea typeface="Times New Roman" pitchFamily="34" charset="-122"/>
+                <a:cs typeface="Times New Roman" pitchFamily="34" charset="-120"/>
+              </a:rPr>
+              <a:t>Pastoral nomadism: </a:t>
+            </a:r>
+            <a:pPr algn="l" indent="0" marL="0">
+              <a:spcAft>
+                <a:spcPts val="800"/>
+              </a:spcAft>
+              <a:buNone/>
+            </a:pPr>
+            <a:r>
+              <a:rPr lang="en-US" sz="3600" dirty="0">
+                <a:solidFill>
+                  <a:srgbClr val="111111"/>
+                </a:solidFill>
+                <a:latin typeface="Times New Roman" pitchFamily="34" charset="0"/>
+                <a:ea typeface="Times New Roman" pitchFamily="34" charset="-122"/>
+                <a:cs typeface="Times New Roman" pitchFamily="34" charset="-120"/>
+              </a:rPr>
+              <a:t>Nomads such as the Tuareg move with camels, goats and sheep from well to well.</a:t>
+            </a:r>
+            <a:endParaRPr lang="en-US" sz="3600" dirty="0"/>
           </a:p>
         </p:txBody>
       </p:sp>
       <p:pic>
         <p:nvPicPr>
-          <p:cNvPr id="3" name="Image 0" descr="/home/claude/f4/img/minesec_sheet.png">    </p:cNvPr>
+          <p:cNvPr id="5" name="Image 0" descr="/home/claude/f4/img/v2/f2t_camels.jpg">    </p:cNvPr>
           <p:cNvPicPr>
             <a:picLocks noChangeAspect="1"/>
           </p:cNvPicPr>
@@ -14993,8 +16009,8 @@
         </p:blipFill>
         <p:spPr>
           <a:xfrm>
-            <a:off x="0" y="658368"/>
-            <a:ext cx="5120640" cy="5833872"/>
+            <a:off x="5349240" y="2071212"/>
+            <a:ext cx="6659575" cy="3693983"/>
           </a:xfrm>
           <a:prstGeom prst="rect">
             <a:avLst/>
@@ -15003,14 +16019,14 @@
       </p:pic>
       <p:sp>
         <p:nvSpPr>
-          <p:cNvPr id="4" name="Text 1"/>
+          <p:cNvPr id="6" name="Text 3"/>
           <p:cNvSpPr/>
           <p:nvPr/>
         </p:nvSpPr>
         <p:spPr>
           <a:xfrm>
-            <a:off x="5349240" y="1005840"/>
-            <a:ext cx="6522415" cy="731520"/>
+            <a:off x="5349240" y="6089904"/>
+            <a:ext cx="6659575" cy="347472"/>
           </a:xfrm>
           <a:prstGeom prst="rect">
             <a:avLst/>
@@ -15019,68 +16035,24 @@
           <a:ln/>
         </p:spPr>
         <p:txBody>
-          <a:bodyPr wrap="square" lIns="0" tIns="0" rIns="0" bIns="0" rtlCol="0" anchor="ctr">
-            <a:normAutofit/>
-          </a:bodyPr>
+          <a:bodyPr wrap="square" lIns="0" tIns="0" rIns="0" bIns="0" rtlCol="0" anchor="ctr"/>
           <a:lstStyle/>
           <a:p>
             <a:pPr algn="ctr" indent="0" marL="0">
               <a:buNone/>
             </a:pPr>
             <a:r>
-              <a:rPr lang="en-US" sz="3600" b="1" dirty="0">
-                <a:solidFill>
-                  <a:srgbClr val="990011"/>
+              <a:rPr lang="en-US" sz="1600" i="1" dirty="0">
+                <a:solidFill>
+                  <a:srgbClr val="555555"/>
                 </a:solidFill>
                 <a:latin typeface="Times New Roman" pitchFamily="34" charset="0"/>
                 <a:ea typeface="Times New Roman" pitchFamily="34" charset="-122"/>
                 <a:cs typeface="Times New Roman" pitchFamily="34" charset="-120"/>
               </a:rPr>
-              <a:t>Evaluation 1</a:t>
-            </a:r>
-            <a:endParaRPr lang="en-US" sz="3600" dirty="0"/>
-          </a:p>
-        </p:txBody>
-      </p:sp>
-      <p:sp>
-        <p:nvSpPr>
-          <p:cNvPr id="5" name="Text 2"/>
-          <p:cNvSpPr/>
-          <p:nvPr/>
-        </p:nvSpPr>
-        <p:spPr>
-          <a:xfrm>
-            <a:off x="5349240" y="1783080"/>
-            <a:ext cx="6522415" cy="4663440"/>
-          </a:xfrm>
-          <a:prstGeom prst="rect">
-            <a:avLst/>
-          </a:prstGeom>
-          <a:noFill/>
-          <a:ln/>
-        </p:spPr>
-        <p:txBody>
-          <a:bodyPr wrap="square" lIns="0" tIns="0" rIns="0" bIns="0" rtlCol="0" anchor="t"/>
-          <a:lstStyle/>
-          <a:p>
-            <a:pPr algn="l" indent="0" marL="0">
-              <a:spcAft>
-                <a:spcPts val="800"/>
-              </a:spcAft>
-              <a:buNone/>
-            </a:pPr>
-            <a:r>
-              <a:rPr lang="en-US" sz="4000" dirty="0">
-                <a:solidFill>
-                  <a:srgbClr val="111111"/>
-                </a:solidFill>
-                <a:latin typeface="Times New Roman" pitchFamily="34" charset="0"/>
-                <a:ea typeface="Times New Roman" pitchFamily="34" charset="-122"/>
-                <a:cs typeface="Times New Roman" pitchFamily="34" charset="-120"/>
-              </a:rPr>
-              <a:t>Give two resources of hot deserts.</a:t>
-            </a:r>
-            <a:endParaRPr lang="en-US" sz="4000" dirty="0"/>
+              <a:t>Illustration: camels</a:t>
+            </a:r>
+            <a:endParaRPr lang="en-US" sz="1600" dirty="0"/>
           </a:p>
         </p:txBody>
       </p:sp>
@@ -15190,15 +16162,115 @@
                 <a:ea typeface="Calibri" pitchFamily="34" charset="-122"/>
                 <a:cs typeface="Calibri" pitchFamily="34" charset="-120"/>
               </a:rPr>
-              <a:t>FORMATIVE EVALUATION</a:t>
+              <a:t>BOARD SUMMARY</a:t>
             </a:r>
             <a:endParaRPr lang="en-US" sz="1400" dirty="0"/>
+          </a:p>
+        </p:txBody>
+      </p:sp>
+      <p:sp>
+        <p:nvSpPr>
+          <p:cNvPr id="3" name="Text 1"/>
+          <p:cNvSpPr/>
+          <p:nvPr/>
+        </p:nvSpPr>
+        <p:spPr>
+          <a:xfrm>
+            <a:off x="365760" y="1005840"/>
+            <a:ext cx="11460175" cy="731520"/>
+          </a:xfrm>
+          <a:prstGeom prst="rect">
+            <a:avLst/>
+          </a:prstGeom>
+          <a:noFill/>
+          <a:ln/>
+        </p:spPr>
+        <p:txBody>
+          <a:bodyPr wrap="square" lIns="0" tIns="0" rIns="0" bIns="0" rtlCol="0" anchor="ctr">
+            <a:normAutofit/>
+          </a:bodyPr>
+          <a:lstStyle/>
+          <a:p>
+            <a:pPr algn="ctr" indent="0" marL="0">
+              <a:buNone/>
+            </a:pPr>
+            <a:r>
+              <a:rPr lang="en-US" sz="3600" b="1" dirty="0">
+                <a:solidFill>
+                  <a:srgbClr val="990011"/>
+                </a:solidFill>
+                <a:latin typeface="Times New Roman" pitchFamily="34" charset="0"/>
+                <a:ea typeface="Times New Roman" pitchFamily="34" charset="-122"/>
+                <a:cs typeface="Times New Roman" pitchFamily="34" charset="-120"/>
+              </a:rPr>
+              <a:t>2. Traditional Methods of Exploitation</a:t>
+            </a:r>
+            <a:endParaRPr lang="en-US" sz="3600" dirty="0"/>
+          </a:p>
+        </p:txBody>
+      </p:sp>
+      <p:sp>
+        <p:nvSpPr>
+          <p:cNvPr id="4" name="Text 2"/>
+          <p:cNvSpPr/>
+          <p:nvPr/>
+        </p:nvSpPr>
+        <p:spPr>
+          <a:xfrm>
+            <a:off x="365760" y="1783080"/>
+            <a:ext cx="4846320" cy="4617720"/>
+          </a:xfrm>
+          <a:prstGeom prst="rect">
+            <a:avLst/>
+          </a:prstGeom>
+          <a:noFill/>
+          <a:ln/>
+        </p:spPr>
+        <p:txBody>
+          <a:bodyPr wrap="square" lIns="0" tIns="0" rIns="0" bIns="0" rtlCol="0" anchor="t"/>
+          <a:lstStyle/>
+          <a:p>
+            <a:pPr algn="l" indent="0" marL="0">
+              <a:spcAft>
+                <a:spcPts val="800"/>
+              </a:spcAft>
+              <a:buNone/>
+            </a:pPr>
+            <a:r>
+              <a:rPr lang="en-US" sz="3600" b="1" dirty="0">
+                <a:solidFill>
+                  <a:srgbClr val="111111"/>
+                </a:solidFill>
+                <a:latin typeface="Times New Roman" pitchFamily="34" charset="0"/>
+                <a:ea typeface="Times New Roman" pitchFamily="34" charset="-122"/>
+                <a:cs typeface="Times New Roman" pitchFamily="34" charset="-120"/>
+              </a:rPr>
+              <a:t>Oasis farming: </a:t>
+            </a:r>
+            <a:pPr algn="l" indent="0" marL="0">
+              <a:spcAft>
+                <a:spcPts val="800"/>
+              </a:spcAft>
+              <a:buNone/>
+            </a:pPr>
+            <a:r>
+              <a:rPr lang="en-US" sz="3600" dirty="0">
+                <a:solidFill>
+                  <a:srgbClr val="111111"/>
+                </a:solidFill>
+                <a:latin typeface="Times New Roman" pitchFamily="34" charset="0"/>
+                <a:ea typeface="Times New Roman" pitchFamily="34" charset="-122"/>
+                <a:cs typeface="Times New Roman" pitchFamily="34" charset="-120"/>
+              </a:rPr>
+              <a:t>Farmers grow dates, vegetables and cereals under palm trees.</a:t>
+            </a:r>
+            <a:endParaRPr lang="en-US" sz="3600" dirty="0"/>
           </a:p>
         </p:txBody>
       </p:sp>
       <p:pic>
         <p:nvPicPr>
-          <p:cNvPr id="3" name="Image 0" descr="/home/claude/f4/img/minesec_sheet.png">    </p:cNvPr>
+          <p:cNvPr id="5" name="Image 0" descr="/home/claude/f4/img/v2/f2t_oasis.jpg">    </p:cNvPr>
           <p:cNvPicPr>
             <a:picLocks noChangeAspect="1"/>
           </p:cNvPicPr>
@@ -15212,8 +16284,8 @@
         </p:blipFill>
         <p:spPr>
           <a:xfrm>
-            <a:off x="0" y="658368"/>
-            <a:ext cx="5120640" cy="5833872"/>
+            <a:off x="5349240" y="2071212"/>
+            <a:ext cx="6659575" cy="3693983"/>
           </a:xfrm>
           <a:prstGeom prst="rect">
             <a:avLst/>
@@ -15222,14 +16294,14 @@
       </p:pic>
       <p:sp>
         <p:nvSpPr>
-          <p:cNvPr id="4" name="Text 1"/>
+          <p:cNvPr id="6" name="Text 3"/>
           <p:cNvSpPr/>
           <p:nvPr/>
         </p:nvSpPr>
         <p:spPr>
           <a:xfrm>
-            <a:off x="5349240" y="1005840"/>
-            <a:ext cx="6522415" cy="731520"/>
+            <a:off x="5349240" y="6089904"/>
+            <a:ext cx="6659575" cy="347472"/>
           </a:xfrm>
           <a:prstGeom prst="rect">
             <a:avLst/>
@@ -15238,68 +16310,24 @@
           <a:ln/>
         </p:spPr>
         <p:txBody>
-          <a:bodyPr wrap="square" lIns="0" tIns="0" rIns="0" bIns="0" rtlCol="0" anchor="ctr">
-            <a:normAutofit/>
-          </a:bodyPr>
+          <a:bodyPr wrap="square" lIns="0" tIns="0" rIns="0" bIns="0" rtlCol="0" anchor="ctr"/>
           <a:lstStyle/>
           <a:p>
             <a:pPr algn="ctr" indent="0" marL="0">
               <a:buNone/>
             </a:pPr>
             <a:r>
-              <a:rPr lang="en-US" sz="3600" b="1" dirty="0">
-                <a:solidFill>
-                  <a:srgbClr val="990011"/>
+              <a:rPr lang="en-US" sz="1600" i="1" dirty="0">
+                <a:solidFill>
+                  <a:srgbClr val="555555"/>
                 </a:solidFill>
                 <a:latin typeface="Times New Roman" pitchFamily="34" charset="0"/>
                 <a:ea typeface="Times New Roman" pitchFamily="34" charset="-122"/>
                 <a:cs typeface="Times New Roman" pitchFamily="34" charset="-120"/>
               </a:rPr>
-              <a:t>Expected Answer</a:t>
-            </a:r>
-            <a:endParaRPr lang="en-US" sz="3600" dirty="0"/>
-          </a:p>
-        </p:txBody>
-      </p:sp>
-      <p:sp>
-        <p:nvSpPr>
-          <p:cNvPr id="5" name="Text 2"/>
-          <p:cNvSpPr/>
-          <p:nvPr/>
-        </p:nvSpPr>
-        <p:spPr>
-          <a:xfrm>
-            <a:off x="5349240" y="1783080"/>
-            <a:ext cx="6522415" cy="4663440"/>
-          </a:xfrm>
-          <a:prstGeom prst="rect">
-            <a:avLst/>
-          </a:prstGeom>
-          <a:noFill/>
-          <a:ln/>
-        </p:spPr>
-        <p:txBody>
-          <a:bodyPr wrap="square" lIns="0" tIns="0" rIns="0" bIns="0" rtlCol="0" anchor="t"/>
-          <a:lstStyle/>
-          <a:p>
-            <a:pPr algn="l" indent="0" marL="0">
-              <a:spcAft>
-                <a:spcPts val="800"/>
-              </a:spcAft>
-              <a:buNone/>
-            </a:pPr>
-            <a:r>
-              <a:rPr lang="en-US" sz="4000" dirty="0">
-                <a:solidFill>
-                  <a:srgbClr val="111111"/>
-                </a:solidFill>
-                <a:latin typeface="Times New Roman" pitchFamily="34" charset="0"/>
-                <a:ea typeface="Times New Roman" pitchFamily="34" charset="-122"/>
-                <a:cs typeface="Times New Roman" pitchFamily="34" charset="-120"/>
-              </a:rPr>
-              <a:t>Water at oases and oil.</a:t>
-            </a:r>
-            <a:endParaRPr lang="en-US" sz="4000" dirty="0"/>
+              <a:t>Illustration: an oasis</a:t>
+            </a:r>
+            <a:endParaRPr lang="en-US" sz="1600" dirty="0"/>
           </a:p>
         </p:txBody>
       </p:sp>
@@ -15409,15 +16437,115 @@
                 <a:ea typeface="Calibri" pitchFamily="34" charset="-122"/>
                 <a:cs typeface="Calibri" pitchFamily="34" charset="-120"/>
               </a:rPr>
-              <a:t>FORMATIVE EVALUATION</a:t>
+              <a:t>BOARD SUMMARY</a:t>
             </a:r>
             <a:endParaRPr lang="en-US" sz="1400" dirty="0"/>
+          </a:p>
+        </p:txBody>
+      </p:sp>
+      <p:sp>
+        <p:nvSpPr>
+          <p:cNvPr id="3" name="Text 1"/>
+          <p:cNvSpPr/>
+          <p:nvPr/>
+        </p:nvSpPr>
+        <p:spPr>
+          <a:xfrm>
+            <a:off x="365760" y="1005840"/>
+            <a:ext cx="11460175" cy="731520"/>
+          </a:xfrm>
+          <a:prstGeom prst="rect">
+            <a:avLst/>
+          </a:prstGeom>
+          <a:noFill/>
+          <a:ln/>
+        </p:spPr>
+        <p:txBody>
+          <a:bodyPr wrap="square" lIns="0" tIns="0" rIns="0" bIns="0" rtlCol="0" anchor="ctr">
+            <a:normAutofit/>
+          </a:bodyPr>
+          <a:lstStyle/>
+          <a:p>
+            <a:pPr algn="ctr" indent="0" marL="0">
+              <a:buNone/>
+            </a:pPr>
+            <a:r>
+              <a:rPr lang="en-US" sz="3600" b="1" dirty="0">
+                <a:solidFill>
+                  <a:srgbClr val="990011"/>
+                </a:solidFill>
+                <a:latin typeface="Times New Roman" pitchFamily="34" charset="0"/>
+                <a:ea typeface="Times New Roman" pitchFamily="34" charset="-122"/>
+                <a:cs typeface="Times New Roman" pitchFamily="34" charset="-120"/>
+              </a:rPr>
+              <a:t>2. Traditional Methods of Exploitation</a:t>
+            </a:r>
+            <a:endParaRPr lang="en-US" sz="3600" dirty="0"/>
+          </a:p>
+        </p:txBody>
+      </p:sp>
+      <p:sp>
+        <p:nvSpPr>
+          <p:cNvPr id="4" name="Text 2"/>
+          <p:cNvSpPr/>
+          <p:nvPr/>
+        </p:nvSpPr>
+        <p:spPr>
+          <a:xfrm>
+            <a:off x="365760" y="1783080"/>
+            <a:ext cx="4846320" cy="4617720"/>
+          </a:xfrm>
+          <a:prstGeom prst="rect">
+            <a:avLst/>
+          </a:prstGeom>
+          <a:noFill/>
+          <a:ln/>
+        </p:spPr>
+        <p:txBody>
+          <a:bodyPr wrap="square" lIns="0" tIns="0" rIns="0" bIns="0" rtlCol="0" anchor="t"/>
+          <a:lstStyle/>
+          <a:p>
+            <a:pPr algn="l" indent="0" marL="0">
+              <a:spcAft>
+                <a:spcPts val="800"/>
+              </a:spcAft>
+              <a:buNone/>
+            </a:pPr>
+            <a:r>
+              <a:rPr lang="en-US" sz="3600" b="1" dirty="0">
+                <a:solidFill>
+                  <a:srgbClr val="111111"/>
+                </a:solidFill>
+                <a:latin typeface="Times New Roman" pitchFamily="34" charset="0"/>
+                <a:ea typeface="Times New Roman" pitchFamily="34" charset="-122"/>
+                <a:cs typeface="Times New Roman" pitchFamily="34" charset="-120"/>
+              </a:rPr>
+              <a:t>Traditional irrigation: </a:t>
+            </a:r>
+            <a:pPr algn="l" indent="0" marL="0">
+              <a:spcAft>
+                <a:spcPts val="800"/>
+              </a:spcAft>
+              <a:buNone/>
+            </a:pPr>
+            <a:r>
+              <a:rPr lang="en-US" sz="3600" dirty="0">
+                <a:solidFill>
+                  <a:srgbClr val="111111"/>
+                </a:solidFill>
+                <a:latin typeface="Times New Roman" pitchFamily="34" charset="0"/>
+                <a:ea typeface="Times New Roman" pitchFamily="34" charset="-122"/>
+                <a:cs typeface="Times New Roman" pitchFamily="34" charset="-120"/>
+              </a:rPr>
+              <a:t>Farmers lift water from wells with tools such as the shaduf.</a:t>
+            </a:r>
+            <a:endParaRPr lang="en-US" sz="3600" dirty="0"/>
           </a:p>
         </p:txBody>
       </p:sp>
       <p:pic>
         <p:nvPicPr>
-          <p:cNvPr id="3" name="Image 0" descr="/home/claude/f4/img/minesec_sheet.png">    </p:cNvPr>
+          <p:cNvPr id="5" name="Image 0" descr="/home/claude/f4/img/v2/f2t_shaduf.jpg">    </p:cNvPr>
           <p:cNvPicPr>
             <a:picLocks noChangeAspect="1"/>
           </p:cNvPicPr>
@@ -15431,8 +16559,8 @@
         </p:blipFill>
         <p:spPr>
           <a:xfrm>
-            <a:off x="0" y="658368"/>
-            <a:ext cx="5120640" cy="5833872"/>
+            <a:off x="5349240" y="2071212"/>
+            <a:ext cx="6659575" cy="3693983"/>
           </a:xfrm>
           <a:prstGeom prst="rect">
             <a:avLst/>
@@ -15441,14 +16569,14 @@
       </p:pic>
       <p:sp>
         <p:nvSpPr>
-          <p:cNvPr id="4" name="Text 1"/>
+          <p:cNvPr id="6" name="Text 3"/>
           <p:cNvSpPr/>
           <p:nvPr/>
         </p:nvSpPr>
         <p:spPr>
           <a:xfrm>
-            <a:off x="5349240" y="1005840"/>
-            <a:ext cx="6522415" cy="731520"/>
+            <a:off x="5349240" y="6089904"/>
+            <a:ext cx="6659575" cy="347472"/>
           </a:xfrm>
           <a:prstGeom prst="rect">
             <a:avLst/>
@@ -15457,68 +16585,24 @@
           <a:ln/>
         </p:spPr>
         <p:txBody>
-          <a:bodyPr wrap="square" lIns="0" tIns="0" rIns="0" bIns="0" rtlCol="0" anchor="ctr">
-            <a:normAutofit/>
-          </a:bodyPr>
+          <a:bodyPr wrap="square" lIns="0" tIns="0" rIns="0" bIns="0" rtlCol="0" anchor="ctr"/>
           <a:lstStyle/>
           <a:p>
             <a:pPr algn="ctr" indent="0" marL="0">
               <a:buNone/>
             </a:pPr>
             <a:r>
-              <a:rPr lang="en-US" sz="3600" b="1" dirty="0">
-                <a:solidFill>
-                  <a:srgbClr val="990011"/>
+              <a:rPr lang="en-US" sz="1600" i="1" dirty="0">
+                <a:solidFill>
+                  <a:srgbClr val="555555"/>
                 </a:solidFill>
                 <a:latin typeface="Times New Roman" pitchFamily="34" charset="0"/>
                 <a:ea typeface="Times New Roman" pitchFamily="34" charset="-122"/>
                 <a:cs typeface="Times New Roman" pitchFamily="34" charset="-120"/>
               </a:rPr>
-              <a:t>Evaluation 2</a:t>
-            </a:r>
-            <a:endParaRPr lang="en-US" sz="3600" dirty="0"/>
-          </a:p>
-        </p:txBody>
-      </p:sp>
-      <p:sp>
-        <p:nvSpPr>
-          <p:cNvPr id="5" name="Text 2"/>
-          <p:cNvSpPr/>
-          <p:nvPr/>
-        </p:nvSpPr>
-        <p:spPr>
-          <a:xfrm>
-            <a:off x="5349240" y="1783080"/>
-            <a:ext cx="6522415" cy="4663440"/>
-          </a:xfrm>
-          <a:prstGeom prst="rect">
-            <a:avLst/>
-          </a:prstGeom>
-          <a:noFill/>
-          <a:ln/>
-        </p:spPr>
-        <p:txBody>
-          <a:bodyPr wrap="square" lIns="0" tIns="0" rIns="0" bIns="0" rtlCol="0" anchor="t"/>
-          <a:lstStyle/>
-          <a:p>
-            <a:pPr algn="l" indent="0" marL="0">
-              <a:spcAft>
-                <a:spcPts val="800"/>
-              </a:spcAft>
-              <a:buNone/>
-            </a:pPr>
-            <a:r>
-              <a:rPr lang="en-US" sz="4000" dirty="0">
-                <a:solidFill>
-                  <a:srgbClr val="111111"/>
-                </a:solidFill>
-                <a:latin typeface="Times New Roman" pitchFamily="34" charset="0"/>
-                <a:ea typeface="Times New Roman" pitchFamily="34" charset="-122"/>
-                <a:cs typeface="Times New Roman" pitchFamily="34" charset="-120"/>
-              </a:rPr>
-              <a:t>Give two problems of the desert.</a:t>
-            </a:r>
-            <a:endParaRPr lang="en-US" sz="4000" dirty="0"/>
+              <a:t>Illustration: a shaduf</a:t>
+            </a:r>
+            <a:endParaRPr lang="en-US" sz="1600" dirty="0"/>
           </a:p>
         </p:txBody>
       </p:sp>
@@ -15628,7 +16712,7 @@
                 <a:ea typeface="Calibri" pitchFamily="34" charset="-122"/>
                 <a:cs typeface="Calibri" pitchFamily="34" charset="-120"/>
               </a:rPr>
-              <a:t>FORMATIVE EVALUATION</a:t>
+              <a:t>BOARD SUMMARY</a:t>
             </a:r>
             <a:endParaRPr lang="en-US" sz="1400" dirty="0"/>
           </a:p>
@@ -15693,7 +16777,7 @@
                 <a:ea typeface="Times New Roman" pitchFamily="34" charset="-122"/>
                 <a:cs typeface="Times New Roman" pitchFamily="34" charset="-120"/>
               </a:rPr>
-              <a:t>Expected Answer</a:t>
+              <a:t>2. Traditional Methods of Exploitation</a:t>
             </a:r>
             <a:endParaRPr lang="en-US" sz="3600" dirty="0"/>
           </a:p>
@@ -15727,7 +16811,7 @@
               <a:buNone/>
             </a:pPr>
             <a:r>
-              <a:rPr lang="en-US" sz="4000" dirty="0">
+              <a:rPr lang="en-US" sz="4000" b="1" dirty="0">
                 <a:solidFill>
                   <a:srgbClr val="111111"/>
                 </a:solidFill>
@@ -15735,7 +16819,24 @@
                 <a:ea typeface="Times New Roman" pitchFamily="34" charset="-122"/>
                 <a:cs typeface="Times New Roman" pitchFamily="34" charset="-120"/>
               </a:rPr>
-              <a:t>Lack of water and sandstorms.</a:t>
+              <a:t>Trade: </a:t>
+            </a:r>
+            <a:pPr algn="l" indent="0" marL="0">
+              <a:spcAft>
+                <a:spcPts val="800"/>
+              </a:spcAft>
+              <a:buNone/>
+            </a:pPr>
+            <a:r>
+              <a:rPr lang="en-US" sz="4000" dirty="0">
+                <a:solidFill>
+                  <a:srgbClr val="111111"/>
+                </a:solidFill>
+                <a:latin typeface="Times New Roman" pitchFamily="34" charset="0"/>
+                <a:ea typeface="Times New Roman" pitchFamily="34" charset="-122"/>
+                <a:cs typeface="Times New Roman" pitchFamily="34" charset="-120"/>
+              </a:rPr>
+              <a:t>Camel caravans carry salt and goods across the desert.</a:t>
             </a:r>
             <a:endParaRPr lang="en-US" sz="4000" dirty="0"/>
           </a:p>
@@ -15847,15 +16948,135 @@
                 <a:ea typeface="Calibri" pitchFamily="34" charset="-122"/>
                 <a:cs typeface="Calibri" pitchFamily="34" charset="-120"/>
               </a:rPr>
-              <a:t>REMEDIATION</a:t>
+              <a:t>BOARD SUMMARY</a:t>
             </a:r>
             <a:endParaRPr lang="en-US" sz="1400" dirty="0"/>
+          </a:p>
+        </p:txBody>
+      </p:sp>
+      <p:sp>
+        <p:nvSpPr>
+          <p:cNvPr id="3" name="Text 1"/>
+          <p:cNvSpPr/>
+          <p:nvPr/>
+        </p:nvSpPr>
+        <p:spPr>
+          <a:xfrm>
+            <a:off x="365760" y="1005840"/>
+            <a:ext cx="11460175" cy="731520"/>
+          </a:xfrm>
+          <a:prstGeom prst="rect">
+            <a:avLst/>
+          </a:prstGeom>
+          <a:noFill/>
+          <a:ln/>
+        </p:spPr>
+        <p:txBody>
+          <a:bodyPr wrap="square" lIns="0" tIns="0" rIns="0" bIns="0" rtlCol="0" anchor="ctr">
+            <a:normAutofit/>
+          </a:bodyPr>
+          <a:lstStyle/>
+          <a:p>
+            <a:pPr algn="ctr" indent="0" marL="0">
+              <a:buNone/>
+            </a:pPr>
+            <a:r>
+              <a:rPr lang="en-US" sz="3600" b="1" dirty="0">
+                <a:solidFill>
+                  <a:srgbClr val="990011"/>
+                </a:solidFill>
+                <a:latin typeface="Times New Roman" pitchFamily="34" charset="0"/>
+                <a:ea typeface="Times New Roman" pitchFamily="34" charset="-122"/>
+                <a:cs typeface="Times New Roman" pitchFamily="34" charset="-120"/>
+              </a:rPr>
+              <a:t>3. Problems Faced</a:t>
+            </a:r>
+            <a:endParaRPr lang="en-US" sz="3600" dirty="0"/>
+          </a:p>
+        </p:txBody>
+      </p:sp>
+      <p:sp>
+        <p:nvSpPr>
+          <p:cNvPr id="4" name="Text 2"/>
+          <p:cNvSpPr/>
+          <p:nvPr/>
+        </p:nvSpPr>
+        <p:spPr>
+          <a:xfrm>
+            <a:off x="365760" y="1783080"/>
+            <a:ext cx="4846320" cy="4617720"/>
+          </a:xfrm>
+          <a:prstGeom prst="rect">
+            <a:avLst/>
+          </a:prstGeom>
+          <a:noFill/>
+          <a:ln/>
+        </p:spPr>
+        <p:txBody>
+          <a:bodyPr wrap="square" lIns="0" tIns="0" rIns="0" bIns="0" rtlCol="0" anchor="t"/>
+          <a:lstStyle/>
+          <a:p>
+            <a:pPr algn="l" indent="0" marL="0">
+              <a:spcAft>
+                <a:spcPts val="800"/>
+              </a:spcAft>
+              <a:buNone/>
+            </a:pPr>
+            <a:r>
+              <a:rPr lang="en-US" sz="3600" i="1" dirty="0">
+                <a:solidFill>
+                  <a:srgbClr val="111111"/>
+                </a:solidFill>
+                <a:latin typeface="Times New Roman" pitchFamily="34" charset="0"/>
+                <a:ea typeface="Times New Roman" pitchFamily="34" charset="-122"/>
+                <a:cs typeface="Times New Roman" pitchFamily="34" charset="-120"/>
+              </a:rPr>
+              <a:t>People face the following problems:</a:t>
+            </a:r>
+            <a:endParaRPr lang="en-US" sz="3600" dirty="0"/>
+          </a:p>
+          <a:p>
+            <a:pPr algn="l" indent="0" marL="0">
+              <a:spcAft>
+                <a:spcPts val="800"/>
+              </a:spcAft>
+              <a:buNone/>
+            </a:pPr>
+            <a:r>
+              <a:rPr lang="en-US" sz="3600" b="1" dirty="0">
+                <a:solidFill>
+                  <a:srgbClr val="111111"/>
+                </a:solidFill>
+                <a:latin typeface="Times New Roman" pitchFamily="34" charset="0"/>
+                <a:ea typeface="Times New Roman" pitchFamily="34" charset="-122"/>
+                <a:cs typeface="Times New Roman" pitchFamily="34" charset="-120"/>
+              </a:rPr>
+              <a:t>Lack of water: </a:t>
+            </a:r>
+            <a:pPr algn="l" indent="0" marL="0">
+              <a:spcAft>
+                <a:spcPts val="800"/>
+              </a:spcAft>
+              <a:buNone/>
+            </a:pPr>
+            <a:r>
+              <a:rPr lang="en-US" sz="3600" dirty="0">
+                <a:solidFill>
+                  <a:srgbClr val="111111"/>
+                </a:solidFill>
+                <a:latin typeface="Times New Roman" pitchFamily="34" charset="0"/>
+                <a:ea typeface="Times New Roman" pitchFamily="34" charset="-122"/>
+                <a:cs typeface="Times New Roman" pitchFamily="34" charset="-120"/>
+              </a:rPr>
+              <a:t>Wells dry up and water is scarce.</a:t>
+            </a:r>
+            <a:endParaRPr lang="en-US" sz="3600" dirty="0"/>
           </a:p>
         </p:txBody>
       </p:sp>
       <p:pic>
         <p:nvPicPr>
-          <p:cNvPr id="3" name="Image 0" descr="/home/claude/f4/img/minesec_sheet.png">    </p:cNvPr>
+          <p:cNvPr id="5" name="Image 0" descr="/home/claude/f4/img/v2/f2t_desert_well.jpg">    </p:cNvPr>
           <p:cNvPicPr>
             <a:picLocks noChangeAspect="1"/>
           </p:cNvPicPr>
@@ -15869,8 +17090,8 @@
         </p:blipFill>
         <p:spPr>
           <a:xfrm>
-            <a:off x="0" y="658368"/>
-            <a:ext cx="2468880" cy="5833872"/>
+            <a:off x="5349240" y="2071212"/>
+            <a:ext cx="6659575" cy="3693983"/>
           </a:xfrm>
           <a:prstGeom prst="rect">
             <a:avLst/>
@@ -15879,14 +17100,14 @@
       </p:pic>
       <p:sp>
         <p:nvSpPr>
-          <p:cNvPr id="4" name="Text 1"/>
+          <p:cNvPr id="6" name="Text 3"/>
           <p:cNvSpPr/>
           <p:nvPr/>
         </p:nvSpPr>
         <p:spPr>
           <a:xfrm>
-            <a:off x="2697480" y="1005840"/>
-            <a:ext cx="9174175" cy="731520"/>
+            <a:off x="5349240" y="6089904"/>
+            <a:ext cx="6659575" cy="347472"/>
           </a:xfrm>
           <a:prstGeom prst="rect">
             <a:avLst/>
@@ -15895,134 +17116,24 @@
           <a:ln/>
         </p:spPr>
         <p:txBody>
-          <a:bodyPr wrap="square" lIns="0" tIns="0" rIns="0" bIns="0" rtlCol="0" anchor="ctr">
-            <a:normAutofit/>
-          </a:bodyPr>
+          <a:bodyPr wrap="square" lIns="0" tIns="0" rIns="0" bIns="0" rtlCol="0" anchor="ctr"/>
           <a:lstStyle/>
           <a:p>
             <a:pPr algn="ctr" indent="0" marL="0">
               <a:buNone/>
             </a:pPr>
             <a:r>
-              <a:rPr lang="en-US" sz="3600" b="1" dirty="0">
-                <a:solidFill>
-                  <a:srgbClr val="990011"/>
+              <a:rPr lang="en-US" sz="1600" i="1" dirty="0">
+                <a:solidFill>
+                  <a:srgbClr val="555555"/>
                 </a:solidFill>
                 <a:latin typeface="Times New Roman" pitchFamily="34" charset="0"/>
                 <a:ea typeface="Times New Roman" pitchFamily="34" charset="-122"/>
                 <a:cs typeface="Times New Roman" pitchFamily="34" charset="-120"/>
               </a:rPr>
-              <a:t>Remediation</a:t>
-            </a:r>
-            <a:endParaRPr lang="en-US" sz="3600" dirty="0"/>
-          </a:p>
-        </p:txBody>
-      </p:sp>
-      <p:sp>
-        <p:nvSpPr>
-          <p:cNvPr id="5" name="Text 2"/>
-          <p:cNvSpPr/>
-          <p:nvPr/>
-        </p:nvSpPr>
-        <p:spPr>
-          <a:xfrm>
-            <a:off x="2697480" y="1783080"/>
-            <a:ext cx="9174175" cy="4663440"/>
-          </a:xfrm>
-          <a:prstGeom prst="rect">
-            <a:avLst/>
-          </a:prstGeom>
-          <a:noFill/>
-          <a:ln/>
-        </p:spPr>
-        <p:txBody>
-          <a:bodyPr wrap="square" lIns="0" tIns="0" rIns="0" bIns="0" rtlCol="0" anchor="t"/>
-          <a:lstStyle/>
-          <a:p>
-            <a:pPr algn="l" indent="0" marL="0">
-              <a:spcAft>
-                <a:spcPts val="800"/>
-              </a:spcAft>
-              <a:buNone/>
-            </a:pPr>
-            <a:r>
-              <a:rPr lang="en-US" sz="4000" b="1" dirty="0">
-                <a:solidFill>
-                  <a:srgbClr val="111111"/>
-                </a:solidFill>
-                <a:latin typeface="Times New Roman" pitchFamily="34" charset="0"/>
-                <a:ea typeface="Times New Roman" pitchFamily="34" charset="-122"/>
-                <a:cs typeface="Times New Roman" pitchFamily="34" charset="-120"/>
-              </a:rPr>
-              <a:t>Fill in the blanks:</a:t>
-            </a:r>
-            <a:endParaRPr lang="en-US" sz="4000" dirty="0"/>
-          </a:p>
-          <a:p>
-            <a:pPr algn="l" marL="342900" indent="-342900">
-              <a:spcAft>
-                <a:spcPts val="800"/>
-              </a:spcAft>
-              <a:buSzPct val="100000"/>
-              <a:buFont typeface="+mj-lt"/>
-              <a:buAutoNum type="arabicPeriod" startAt="1"/>
-            </a:pPr>
-            <a:r>
-              <a:rPr lang="en-US" sz="4000" dirty="0">
-                <a:solidFill>
-                  <a:srgbClr val="111111"/>
-                </a:solidFill>
-                <a:latin typeface="Times New Roman" pitchFamily="34" charset="0"/>
-                <a:ea typeface="Times New Roman" pitchFamily="34" charset="-122"/>
-                <a:cs typeface="Times New Roman" pitchFamily="34" charset="-120"/>
-              </a:rPr>
-              <a:t>A green place in the desert with water is an ______.</a:t>
-            </a:r>
-            <a:endParaRPr lang="en-US" sz="4000" dirty="0"/>
-          </a:p>
-          <a:p>
-            <a:pPr algn="l" marL="342900" indent="-342900">
-              <a:spcAft>
-                <a:spcPts val="800"/>
-              </a:spcAft>
-              <a:buSzPct val="100000"/>
-              <a:buFont typeface="+mj-lt"/>
-              <a:buAutoNum type="arabicPeriod" startAt="1"/>
-            </a:pPr>
-            <a:r>
-              <a:rPr lang="en-US" sz="4000" dirty="0">
-                <a:solidFill>
-                  <a:srgbClr val="111111"/>
-                </a:solidFill>
-                <a:latin typeface="Times New Roman" pitchFamily="34" charset="0"/>
-                <a:ea typeface="Times New Roman" pitchFamily="34" charset="-122"/>
-                <a:cs typeface="Times New Roman" pitchFamily="34" charset="-120"/>
-              </a:rPr>
-              <a:t>The animal of the desert is the ______.</a:t>
-            </a:r>
-            <a:endParaRPr lang="en-US" sz="4000" dirty="0"/>
-          </a:p>
-          <a:p>
-            <a:pPr algn="l" marL="342900" indent="-342900">
-              <a:spcAft>
-                <a:spcPts val="800"/>
-              </a:spcAft>
-              <a:buSzPct val="100000"/>
-              <a:buFont typeface="+mj-lt"/>
-              <a:buAutoNum type="arabicPeriod" startAt="1"/>
-            </a:pPr>
-            <a:r>
-              <a:rPr lang="en-US" sz="4000" dirty="0">
-                <a:solidFill>
-                  <a:srgbClr val="111111"/>
-                </a:solidFill>
-                <a:latin typeface="Times New Roman" pitchFamily="34" charset="0"/>
-                <a:ea typeface="Times New Roman" pitchFamily="34" charset="-122"/>
-                <a:cs typeface="Times New Roman" pitchFamily="34" charset="-120"/>
-              </a:rPr>
-              <a:t>Bringing water to fields is ______.</a:t>
-            </a:r>
-            <a:endParaRPr lang="en-US" sz="4000" dirty="0"/>
+              <a:t>Illustration: a desert well</a:t>
+            </a:r>
+            <a:endParaRPr lang="en-US" sz="1600" dirty="0"/>
           </a:p>
         </p:txBody>
       </p:sp>
@@ -16132,7 +17243,7 @@
                 <a:ea typeface="Calibri" pitchFamily="34" charset="-122"/>
                 <a:cs typeface="Calibri" pitchFamily="34" charset="-120"/>
               </a:rPr>
-              <a:t>HOMEWORK</a:t>
+              <a:t>BOARD SUMMARY</a:t>
             </a:r>
             <a:endParaRPr lang="en-US" sz="1400" dirty="0"/>
           </a:p>
@@ -16197,7 +17308,7 @@
                 <a:ea typeface="Times New Roman" pitchFamily="34" charset="-122"/>
                 <a:cs typeface="Times New Roman" pitchFamily="34" charset="-120"/>
               </a:rPr>
-              <a:t>Homework</a:t>
+              <a:t>3. Problems Faced</a:t>
             </a:r>
             <a:endParaRPr lang="en-US" sz="3600" dirty="0"/>
           </a:p>
@@ -16231,7 +17342,7 @@
               <a:buNone/>
             </a:pPr>
             <a:r>
-              <a:rPr lang="en-US" sz="4000" dirty="0">
+              <a:rPr lang="en-US" sz="4000" b="1" dirty="0">
                 <a:solidFill>
                   <a:srgbClr val="111111"/>
                 </a:solidFill>
@@ -16239,7 +17350,98 @@
                 <a:ea typeface="Times New Roman" pitchFamily="34" charset="-122"/>
                 <a:cs typeface="Times New Roman" pitchFamily="34" charset="-120"/>
               </a:rPr>
-              <a:t>Write three ways people in the Far North of Cameroon save water.</a:t>
+              <a:t>Heat and cold: </a:t>
+            </a:r>
+            <a:pPr algn="l" indent="0" marL="0">
+              <a:spcAft>
+                <a:spcPts val="800"/>
+              </a:spcAft>
+              <a:buNone/>
+            </a:pPr>
+            <a:r>
+              <a:rPr lang="en-US" sz="4000" dirty="0">
+                <a:solidFill>
+                  <a:srgbClr val="111111"/>
+                </a:solidFill>
+                <a:latin typeface="Times New Roman" pitchFamily="34" charset="0"/>
+                <a:ea typeface="Times New Roman" pitchFamily="34" charset="-122"/>
+                <a:cs typeface="Times New Roman" pitchFamily="34" charset="-120"/>
+              </a:rPr>
+              <a:t>Days are very hot and nights are cold.</a:t>
+            </a:r>
+            <a:endParaRPr lang="en-US" sz="4000" dirty="0"/>
+          </a:p>
+          <a:p>
+            <a:pPr algn="l" indent="0" marL="0">
+              <a:spcAft>
+                <a:spcPts val="800"/>
+              </a:spcAft>
+              <a:buNone/>
+            </a:pPr>
+            <a:r>
+              <a:rPr lang="en-US" sz="4000" b="1" dirty="0">
+                <a:solidFill>
+                  <a:srgbClr val="111111"/>
+                </a:solidFill>
+                <a:latin typeface="Times New Roman" pitchFamily="34" charset="0"/>
+                <a:ea typeface="Times New Roman" pitchFamily="34" charset="-122"/>
+                <a:cs typeface="Times New Roman" pitchFamily="34" charset="-120"/>
+              </a:rPr>
+              <a:t>Sandstorms: </a:t>
+            </a:r>
+            <a:pPr algn="l" indent="0" marL="0">
+              <a:spcAft>
+                <a:spcPts val="800"/>
+              </a:spcAft>
+              <a:buNone/>
+            </a:pPr>
+            <a:r>
+              <a:rPr lang="en-US" sz="4000" dirty="0">
+                <a:solidFill>
+                  <a:srgbClr val="111111"/>
+                </a:solidFill>
+                <a:latin typeface="Times New Roman" pitchFamily="34" charset="0"/>
+                <a:ea typeface="Times New Roman" pitchFamily="34" charset="-122"/>
+                <a:cs typeface="Times New Roman" pitchFamily="34" charset="-120"/>
+              </a:rPr>
+              <a:t>Wind buries wells, fields and roads.</a:t>
+            </a:r>
+            <a:endParaRPr lang="en-US" sz="4000" dirty="0"/>
+          </a:p>
+          <a:p>
+            <a:pPr algn="l" indent="0" marL="0">
+              <a:spcAft>
+                <a:spcPts val="800"/>
+              </a:spcAft>
+              <a:buNone/>
+            </a:pPr>
+            <a:r>
+              <a:rPr lang="en-US" sz="4000" b="1" dirty="0">
+                <a:solidFill>
+                  <a:srgbClr val="111111"/>
+                </a:solidFill>
+                <a:latin typeface="Times New Roman" pitchFamily="34" charset="0"/>
+                <a:ea typeface="Times New Roman" pitchFamily="34" charset="-122"/>
+                <a:cs typeface="Times New Roman" pitchFamily="34" charset="-120"/>
+              </a:rPr>
+              <a:t>Poor soils: </a:t>
+            </a:r>
+            <a:pPr algn="l" indent="0" marL="0">
+              <a:spcAft>
+                <a:spcPts val="800"/>
+              </a:spcAft>
+              <a:buNone/>
+            </a:pPr>
+            <a:r>
+              <a:rPr lang="en-US" sz="4000" dirty="0">
+                <a:solidFill>
+                  <a:srgbClr val="111111"/>
+                </a:solidFill>
+                <a:latin typeface="Times New Roman" pitchFamily="34" charset="0"/>
+                <a:ea typeface="Times New Roman" pitchFamily="34" charset="-122"/>
+                <a:cs typeface="Times New Roman" pitchFamily="34" charset="-120"/>
+              </a:rPr>
+              <a:t>Sand and salt make farming difficult.</a:t>
             </a:r>
             <a:endParaRPr lang="en-US" sz="4000" dirty="0"/>
           </a:p>
@@ -16351,7 +17553,7 @@
                 <a:ea typeface="Calibri" pitchFamily="34" charset="-122"/>
                 <a:cs typeface="Calibri" pitchFamily="34" charset="-120"/>
               </a:rPr>
-              <a:t>NEXT LESSON</a:t>
+              <a:t>BOARD SUMMARY</a:t>
             </a:r>
             <a:endParaRPr lang="en-US" sz="1400" dirty="0"/>
           </a:p>
@@ -16416,7 +17618,7 @@
                 <a:ea typeface="Times New Roman" pitchFamily="34" charset="-122"/>
                 <a:cs typeface="Times New Roman" pitchFamily="34" charset="-120"/>
               </a:rPr>
-              <a:t>Next Lesson</a:t>
+              <a:t>4. Proposed Solutions</a:t>
             </a:r>
             <a:endParaRPr lang="en-US" sz="3600" dirty="0"/>
           </a:p>
@@ -16440,17 +17642,17 @@
           <a:ln/>
         </p:spPr>
         <p:txBody>
-          <a:bodyPr wrap="square" lIns="0" tIns="0" rIns="0" bIns="0" rtlCol="0" anchor="ctr"/>
-          <a:lstStyle/>
-          <a:p>
-            <a:pPr algn="ctr" indent="0" marL="0">
+          <a:bodyPr wrap="square" lIns="0" tIns="0" rIns="0" bIns="0" rtlCol="0" anchor="t"/>
+          <a:lstStyle/>
+          <a:p>
+            <a:pPr algn="l" indent="0" marL="0">
               <a:spcAft>
                 <a:spcPts val="800"/>
               </a:spcAft>
               <a:buNone/>
             </a:pPr>
             <a:r>
-              <a:rPr lang="en-US" sz="4000" b="1" dirty="0">
+              <a:rPr lang="en-US" sz="4000" i="1" dirty="0">
                 <a:solidFill>
                   <a:srgbClr val="111111"/>
                 </a:solidFill>
@@ -16458,12 +17660,12 @@
                 <a:ea typeface="Times New Roman" pitchFamily="34" charset="-122"/>
                 <a:cs typeface="Times New Roman" pitchFamily="34" charset="-120"/>
               </a:rPr>
-              <a:t>Our next lesson will be on:</a:t>
+              <a:t>The following solutions help people:</a:t>
             </a:r>
             <a:endParaRPr lang="en-US" sz="4000" dirty="0"/>
           </a:p>
           <a:p>
-            <a:pPr algn="ctr" indent="0" marL="0">
+            <a:pPr algn="l" indent="0" marL="0">
               <a:spcAft>
                 <a:spcPts val="800"/>
               </a:spcAft>
@@ -16472,13 +17674,30 @@
             <a:r>
               <a:rPr lang="en-US" sz="4000" b="1" dirty="0">
                 <a:solidFill>
-                  <a:srgbClr val="990011"/>
+                  <a:srgbClr val="111111"/>
                 </a:solidFill>
                 <a:latin typeface="Times New Roman" pitchFamily="34" charset="0"/>
                 <a:ea typeface="Times New Roman" pitchFamily="34" charset="-122"/>
                 <a:cs typeface="Times New Roman" pitchFamily="34" charset="-120"/>
               </a:rPr>
-              <a:t>Further Study 4: Water Scarcity</a:t>
+              <a:t>Deep wells and boreholes: </a:t>
+            </a:r>
+            <a:pPr algn="l" indent="0" marL="0">
+              <a:spcAft>
+                <a:spcPts val="800"/>
+              </a:spcAft>
+              <a:buNone/>
+            </a:pPr>
+            <a:r>
+              <a:rPr lang="en-US" sz="4000" dirty="0">
+                <a:solidFill>
+                  <a:srgbClr val="111111"/>
+                </a:solidFill>
+                <a:latin typeface="Times New Roman" pitchFamily="34" charset="0"/>
+                <a:ea typeface="Times New Roman" pitchFamily="34" charset="-122"/>
+                <a:cs typeface="Times New Roman" pitchFamily="34" charset="-120"/>
+              </a:rPr>
+              <a:t>They bring underground water to the surface.</a:t>
             </a:r>
             <a:endParaRPr lang="en-US" sz="4000" dirty="0"/>
           </a:p>
@@ -16590,7 +17809,7 @@
                 <a:ea typeface="Calibri" pitchFamily="34" charset="-122"/>
                 <a:cs typeface="Calibri" pitchFamily="34" charset="-120"/>
               </a:rPr>
-              <a:t>BILINGUAL GAME</a:t>
+              <a:t>BOARD SUMMARY</a:t>
             </a:r>
             <a:endParaRPr lang="en-US" sz="1400" dirty="0"/>
           </a:p>
@@ -16604,8 +17823,8 @@
         </p:nvSpPr>
         <p:spPr>
           <a:xfrm>
-            <a:off x="457200" y="1005840"/>
-            <a:ext cx="11277295" cy="731520"/>
+            <a:off x="365760" y="1005840"/>
+            <a:ext cx="11460175" cy="731520"/>
           </a:xfrm>
           <a:prstGeom prst="rect">
             <a:avLst/>
@@ -16614,7 +17833,9 @@
           <a:ln/>
         </p:spPr>
         <p:txBody>
-          <a:bodyPr wrap="square" lIns="0" tIns="0" rIns="0" bIns="0" rtlCol="0" anchor="ctr"/>
+          <a:bodyPr wrap="square" lIns="0" tIns="0" rIns="0" bIns="0" rtlCol="0" anchor="ctr">
+            <a:normAutofit/>
+          </a:bodyPr>
           <a:lstStyle/>
           <a:p>
             <a:pPr algn="ctr" indent="0" marL="0">
@@ -16629,6 +17850,2390 @@
                 <a:ea typeface="Times New Roman" pitchFamily="34" charset="-122"/>
                 <a:cs typeface="Times New Roman" pitchFamily="34" charset="-120"/>
               </a:rPr>
+              <a:t>4. Proposed Solutions</a:t>
+            </a:r>
+            <a:endParaRPr lang="en-US" sz="3600" dirty="0"/>
+          </a:p>
+        </p:txBody>
+      </p:sp>
+      <p:sp>
+        <p:nvSpPr>
+          <p:cNvPr id="4" name="Text 2"/>
+          <p:cNvSpPr/>
+          <p:nvPr/>
+        </p:nvSpPr>
+        <p:spPr>
+          <a:xfrm>
+            <a:off x="365760" y="1783080"/>
+            <a:ext cx="4846320" cy="4617720"/>
+          </a:xfrm>
+          <a:prstGeom prst="rect">
+            <a:avLst/>
+          </a:prstGeom>
+          <a:noFill/>
+          <a:ln/>
+        </p:spPr>
+        <p:txBody>
+          <a:bodyPr wrap="square" lIns="0" tIns="0" rIns="0" bIns="0" rtlCol="0" anchor="t"/>
+          <a:lstStyle/>
+          <a:p>
+            <a:pPr algn="l" indent="0" marL="0">
+              <a:spcAft>
+                <a:spcPts val="800"/>
+              </a:spcAft>
+              <a:buNone/>
+            </a:pPr>
+            <a:r>
+              <a:rPr lang="en-US" sz="3600" b="1" dirty="0">
+                <a:solidFill>
+                  <a:srgbClr val="111111"/>
+                </a:solidFill>
+                <a:latin typeface="Times New Roman" pitchFamily="34" charset="0"/>
+                <a:ea typeface="Times New Roman" pitchFamily="34" charset="-122"/>
+                <a:cs typeface="Times New Roman" pitchFamily="34" charset="-120"/>
+              </a:rPr>
+              <a:t>Modern irrigation: </a:t>
+            </a:r>
+            <a:pPr algn="l" indent="0" marL="0">
+              <a:spcAft>
+                <a:spcPts val="800"/>
+              </a:spcAft>
+              <a:buNone/>
+            </a:pPr>
+            <a:r>
+              <a:rPr lang="en-US" sz="3600" dirty="0">
+                <a:solidFill>
+                  <a:srgbClr val="111111"/>
+                </a:solidFill>
+                <a:latin typeface="Times New Roman" pitchFamily="34" charset="0"/>
+                <a:ea typeface="Times New Roman" pitchFamily="34" charset="-122"/>
+                <a:cs typeface="Times New Roman" pitchFamily="34" charset="-120"/>
+              </a:rPr>
+              <a:t>Pumps and sprinklers water large fields.</a:t>
+            </a:r>
+            <a:endParaRPr lang="en-US" sz="3600" dirty="0"/>
+          </a:p>
+        </p:txBody>
+      </p:sp>
+      <p:pic>
+        <p:nvPicPr>
+          <p:cNvPr id="5" name="Image 0" descr="/home/claude/f4/img/v2/f2t_pivot.jpg">    </p:cNvPr>
+          <p:cNvPicPr>
+            <a:picLocks noChangeAspect="1"/>
+          </p:cNvPicPr>
+          <p:nvPr/>
+        </p:nvPicPr>
+        <p:blipFill>
+          <a:blip r:embed="rId1"/>
+          <a:stretch>
+            <a:fillRect/>
+          </a:stretch>
+        </p:blipFill>
+        <p:spPr>
+          <a:xfrm>
+            <a:off x="5349240" y="2071212"/>
+            <a:ext cx="6659575" cy="3693983"/>
+          </a:xfrm>
+          <a:prstGeom prst="rect">
+            <a:avLst/>
+          </a:prstGeom>
+        </p:spPr>
+      </p:pic>
+      <p:sp>
+        <p:nvSpPr>
+          <p:cNvPr id="6" name="Text 3"/>
+          <p:cNvSpPr/>
+          <p:nvPr/>
+        </p:nvSpPr>
+        <p:spPr>
+          <a:xfrm>
+            <a:off x="5349240" y="6089904"/>
+            <a:ext cx="6659575" cy="347472"/>
+          </a:xfrm>
+          <a:prstGeom prst="rect">
+            <a:avLst/>
+          </a:prstGeom>
+          <a:noFill/>
+          <a:ln/>
+        </p:spPr>
+        <p:txBody>
+          <a:bodyPr wrap="square" lIns="0" tIns="0" rIns="0" bIns="0" rtlCol="0" anchor="ctr"/>
+          <a:lstStyle/>
+          <a:p>
+            <a:pPr algn="ctr" indent="0" marL="0">
+              <a:buNone/>
+            </a:pPr>
+            <a:r>
+              <a:rPr lang="en-US" sz="1600" i="1" dirty="0">
+                <a:solidFill>
+                  <a:srgbClr val="555555"/>
+                </a:solidFill>
+                <a:latin typeface="Times New Roman" pitchFamily="34" charset="0"/>
+                <a:ea typeface="Times New Roman" pitchFamily="34" charset="-122"/>
+                <a:cs typeface="Times New Roman" pitchFamily="34" charset="-120"/>
+              </a:rPr>
+              <a:t>Illustration: modern irrigation</a:t>
+            </a:r>
+            <a:endParaRPr lang="en-US" sz="1600" dirty="0"/>
+          </a:p>
+        </p:txBody>
+      </p:sp>
+      <p:sp>
+        <p:nvSpPr>
+          <p:cNvPr id="25" name="Slide Number Placeholder 0"/>
+          <p:cNvSpPr>
+            <a:spLocks noGrp="1"/>
+          </p:cNvSpPr>
+          <p:nvPr>
+            <p:ph type="sldNum" sz="quarter" idx="4294967295"/>
+          </p:nvPr>
+        </p:nvSpPr>
+        <p:spPr>
+          <a:xfrm>
+            <a:off x="27432" y="91440"/>
+            <a:ext cx="585216" cy="475488"/>
+          </a:xfrm>
+          <a:prstGeom prst="rect">
+            <a:avLst/>
+          </a:prstGeom>
+          <a:extLst>
+            <a:ext uri="{C572A759-6A51-4108-AA02-DFA0A04FC94B}">
+              <ma14:wrappingTextBoxFlag xmlns:ma14="http://schemas.microsoft.com/office/mac/drawingml/2011/main" val="0"/>
+            </a:ext>
+          </a:extLst>
+        </p:spPr>
+        <p:txBody>
+          <a:bodyPr/>
+          <a:lstStyle>
+            <a:lvl1pPr>
+              <a:defRPr sz="2000">
+                <a:solidFill>
+                  <a:srgbClr val="FFFFFF"/>
+                </a:solidFill>
+                <a:latin typeface="Calibri"/>
+                <a:ea typeface="Calibri"/>
+                <a:cs typeface="Calibri"/>
+              </a:defRPr>
+            </a:lvl1pPr>
+          </a:lstStyle>
+          <a:p>
+            <a:pPr algn="ctr"/>
+            <a:fld id="{F7021451-1387-4CA6-816F-3879F97B5CBC}" type="slidenum">
+              <a:rPr b="1" lang="en-US"/>
+              <a:t>47</a:t>
+            </a:fld>
+            <a:endParaRPr lang="en-US"/>
+          </a:p>
+        </p:txBody>
+      </p:sp>
+    </p:spTree>
+  </p:cSld>
+  <p:clrMapOvr>
+    <a:masterClrMapping/>
+  </p:clrMapOvr>
+</p:sld>
+</file>
+
+<file path=ppt/slides/slide48.xml><?xml version="1.0" encoding="utf-8"?>
+<p:sld xmlns:a="http://schemas.openxmlformats.org/drawingml/2006/main" xmlns:r="http://schemas.openxmlformats.org/officeDocument/2006/relationships" xmlns:p="http://schemas.openxmlformats.org/presentationml/2006/main">
+  <p:cSld name="Slide 48">
+    <p:spTree>
+      <p:nvGrpSpPr>
+        <p:cNvPr id="1" name=""/>
+        <p:cNvGrpSpPr/>
+        <p:nvPr/>
+      </p:nvGrpSpPr>
+      <p:grpSpPr>
+        <a:xfrm>
+          <a:off x="0" y="0"/>
+          <a:ext cx="0" cy="0"/>
+          <a:chOff x="0" y="0"/>
+          <a:chExt cx="0" cy="0"/>
+        </a:xfrm>
+      </p:grpSpPr>
+      <p:sp>
+        <p:nvSpPr>
+          <p:cNvPr id="2" name="Text 0"/>
+          <p:cNvSpPr/>
+          <p:nvPr/>
+        </p:nvSpPr>
+        <p:spPr>
+          <a:xfrm>
+            <a:off x="457200" y="713232"/>
+            <a:ext cx="11368735" cy="274320"/>
+          </a:xfrm>
+          <a:prstGeom prst="rect">
+            <a:avLst/>
+          </a:prstGeom>
+          <a:noFill/>
+          <a:ln/>
+        </p:spPr>
+        <p:txBody>
+          <a:bodyPr wrap="square" lIns="0" tIns="0" rIns="0" bIns="0" rtlCol="0" anchor="ctr"/>
+          <a:lstStyle/>
+          <a:p>
+            <a:pPr algn="r" indent="0" marL="0">
+              <a:buNone/>
+            </a:pPr>
+            <a:r>
+              <a:rPr lang="en-US" sz="1400" b="1" dirty="0">
+                <a:solidFill>
+                  <a:srgbClr val="1C3F6E"/>
+                </a:solidFill>
+                <a:latin typeface="Calibri" pitchFamily="34" charset="0"/>
+                <a:ea typeface="Calibri" pitchFamily="34" charset="-122"/>
+                <a:cs typeface="Calibri" pitchFamily="34" charset="-120"/>
+              </a:rPr>
+              <a:t>BOARD SUMMARY</a:t>
+            </a:r>
+            <a:endParaRPr lang="en-US" sz="1400" dirty="0"/>
+          </a:p>
+        </p:txBody>
+      </p:sp>
+      <p:pic>
+        <p:nvPicPr>
+          <p:cNvPr id="3" name="Image 0" descr="/home/claude/f4/img/minesec_sheet.png">    </p:cNvPr>
+          <p:cNvPicPr>
+            <a:picLocks noChangeAspect="1"/>
+          </p:cNvPicPr>
+          <p:nvPr/>
+        </p:nvPicPr>
+        <p:blipFill>
+          <a:blip r:embed="rId1"/>
+          <a:stretch>
+            <a:fillRect/>
+          </a:stretch>
+        </p:blipFill>
+        <p:spPr>
+          <a:xfrm>
+            <a:off x="0" y="658368"/>
+            <a:ext cx="5120640" cy="5833872"/>
+          </a:xfrm>
+          <a:prstGeom prst="rect">
+            <a:avLst/>
+          </a:prstGeom>
+        </p:spPr>
+      </p:pic>
+      <p:sp>
+        <p:nvSpPr>
+          <p:cNvPr id="4" name="Text 1"/>
+          <p:cNvSpPr/>
+          <p:nvPr/>
+        </p:nvSpPr>
+        <p:spPr>
+          <a:xfrm>
+            <a:off x="5349240" y="1005840"/>
+            <a:ext cx="6522415" cy="731520"/>
+          </a:xfrm>
+          <a:prstGeom prst="rect">
+            <a:avLst/>
+          </a:prstGeom>
+          <a:noFill/>
+          <a:ln/>
+        </p:spPr>
+        <p:txBody>
+          <a:bodyPr wrap="square" lIns="0" tIns="0" rIns="0" bIns="0" rtlCol="0" anchor="ctr">
+            <a:normAutofit/>
+          </a:bodyPr>
+          <a:lstStyle/>
+          <a:p>
+            <a:pPr algn="ctr" indent="0" marL="0">
+              <a:buNone/>
+            </a:pPr>
+            <a:r>
+              <a:rPr lang="en-US" sz="3600" b="1" dirty="0">
+                <a:solidFill>
+                  <a:srgbClr val="990011"/>
+                </a:solidFill>
+                <a:latin typeface="Times New Roman" pitchFamily="34" charset="0"/>
+                <a:ea typeface="Times New Roman" pitchFamily="34" charset="-122"/>
+                <a:cs typeface="Times New Roman" pitchFamily="34" charset="-120"/>
+              </a:rPr>
+              <a:t>4. Proposed Solutions</a:t>
+            </a:r>
+            <a:endParaRPr lang="en-US" sz="3600" dirty="0"/>
+          </a:p>
+        </p:txBody>
+      </p:sp>
+      <p:sp>
+        <p:nvSpPr>
+          <p:cNvPr id="5" name="Text 2"/>
+          <p:cNvSpPr/>
+          <p:nvPr/>
+        </p:nvSpPr>
+        <p:spPr>
+          <a:xfrm>
+            <a:off x="5349240" y="1783080"/>
+            <a:ext cx="6522415" cy="4663440"/>
+          </a:xfrm>
+          <a:prstGeom prst="rect">
+            <a:avLst/>
+          </a:prstGeom>
+          <a:noFill/>
+          <a:ln/>
+        </p:spPr>
+        <p:txBody>
+          <a:bodyPr wrap="square" lIns="0" tIns="0" rIns="0" bIns="0" rtlCol="0" anchor="t"/>
+          <a:lstStyle/>
+          <a:p>
+            <a:pPr algn="l" indent="0" marL="0">
+              <a:spcAft>
+                <a:spcPts val="800"/>
+              </a:spcAft>
+              <a:buNone/>
+            </a:pPr>
+            <a:r>
+              <a:rPr lang="en-US" sz="4000" b="1" dirty="0">
+                <a:solidFill>
+                  <a:srgbClr val="111111"/>
+                </a:solidFill>
+                <a:latin typeface="Times New Roman" pitchFamily="34" charset="0"/>
+                <a:ea typeface="Times New Roman" pitchFamily="34" charset="-122"/>
+                <a:cs typeface="Times New Roman" pitchFamily="34" charset="-120"/>
+              </a:rPr>
+              <a:t>Tree planting: </a:t>
+            </a:r>
+            <a:pPr algn="l" indent="0" marL="0">
+              <a:spcAft>
+                <a:spcPts val="800"/>
+              </a:spcAft>
+              <a:buNone/>
+            </a:pPr>
+            <a:r>
+              <a:rPr lang="en-US" sz="4000" dirty="0">
+                <a:solidFill>
+                  <a:srgbClr val="111111"/>
+                </a:solidFill>
+                <a:latin typeface="Times New Roman" pitchFamily="34" charset="0"/>
+                <a:ea typeface="Times New Roman" pitchFamily="34" charset="-122"/>
+                <a:cs typeface="Times New Roman" pitchFamily="34" charset="-120"/>
+              </a:rPr>
+              <a:t>Trees stop moving sand.</a:t>
+            </a:r>
+            <a:endParaRPr lang="en-US" sz="4000" dirty="0"/>
+          </a:p>
+          <a:p>
+            <a:pPr algn="l" indent="0" marL="0">
+              <a:spcAft>
+                <a:spcPts val="800"/>
+              </a:spcAft>
+              <a:buNone/>
+            </a:pPr>
+            <a:r>
+              <a:rPr lang="en-US" sz="4000" b="1" dirty="0">
+                <a:solidFill>
+                  <a:srgbClr val="111111"/>
+                </a:solidFill>
+                <a:latin typeface="Times New Roman" pitchFamily="34" charset="0"/>
+                <a:ea typeface="Times New Roman" pitchFamily="34" charset="-122"/>
+                <a:cs typeface="Times New Roman" pitchFamily="34" charset="-120"/>
+              </a:rPr>
+              <a:t>Solar energy: </a:t>
+            </a:r>
+            <a:pPr algn="l" indent="0" marL="0">
+              <a:spcAft>
+                <a:spcPts val="800"/>
+              </a:spcAft>
+              <a:buNone/>
+            </a:pPr>
+            <a:r>
+              <a:rPr lang="en-US" sz="4000" dirty="0">
+                <a:solidFill>
+                  <a:srgbClr val="111111"/>
+                </a:solidFill>
+                <a:latin typeface="Times New Roman" pitchFamily="34" charset="0"/>
+                <a:ea typeface="Times New Roman" pitchFamily="34" charset="-122"/>
+                <a:cs typeface="Times New Roman" pitchFamily="34" charset="-120"/>
+              </a:rPr>
+              <a:t>Sunshine gives electricity for pumps and homes.</a:t>
+            </a:r>
+            <a:endParaRPr lang="en-US" sz="4000" dirty="0"/>
+          </a:p>
+        </p:txBody>
+      </p:sp>
+      <p:sp>
+        <p:nvSpPr>
+          <p:cNvPr id="25" name="Slide Number Placeholder 0"/>
+          <p:cNvSpPr>
+            <a:spLocks noGrp="1"/>
+          </p:cNvSpPr>
+          <p:nvPr>
+            <p:ph type="sldNum" sz="quarter" idx="4294967295"/>
+          </p:nvPr>
+        </p:nvSpPr>
+        <p:spPr>
+          <a:xfrm>
+            <a:off x="27432" y="91440"/>
+            <a:ext cx="585216" cy="475488"/>
+          </a:xfrm>
+          <a:prstGeom prst="rect">
+            <a:avLst/>
+          </a:prstGeom>
+          <a:extLst>
+            <a:ext uri="{C572A759-6A51-4108-AA02-DFA0A04FC94B}">
+              <ma14:wrappingTextBoxFlag xmlns:ma14="http://schemas.microsoft.com/office/mac/drawingml/2011/main" val="0"/>
+            </a:ext>
+          </a:extLst>
+        </p:spPr>
+        <p:txBody>
+          <a:bodyPr/>
+          <a:lstStyle>
+            <a:lvl1pPr>
+              <a:defRPr sz="2000">
+                <a:solidFill>
+                  <a:srgbClr val="FFFFFF"/>
+                </a:solidFill>
+                <a:latin typeface="Calibri"/>
+                <a:ea typeface="Calibri"/>
+                <a:cs typeface="Calibri"/>
+              </a:defRPr>
+            </a:lvl1pPr>
+          </a:lstStyle>
+          <a:p>
+            <a:pPr algn="ctr"/>
+            <a:fld id="{F7021451-1387-4CA6-816F-3879F97B5CBC}" type="slidenum">
+              <a:rPr b="1" lang="en-US"/>
+              <a:t>48</a:t>
+            </a:fld>
+            <a:endParaRPr lang="en-US"/>
+          </a:p>
+        </p:txBody>
+      </p:sp>
+    </p:spTree>
+  </p:cSld>
+  <p:clrMapOvr>
+    <a:masterClrMapping/>
+  </p:clrMapOvr>
+</p:sld>
+</file>
+
+<file path=ppt/slides/slide49.xml><?xml version="1.0" encoding="utf-8"?>
+<p:sld xmlns:a="http://schemas.openxmlformats.org/drawingml/2006/main" xmlns:r="http://schemas.openxmlformats.org/officeDocument/2006/relationships" xmlns:p="http://schemas.openxmlformats.org/presentationml/2006/main">
+  <p:cSld name="Slide 49">
+    <p:spTree>
+      <p:nvGrpSpPr>
+        <p:cNvPr id="1" name=""/>
+        <p:cNvGrpSpPr/>
+        <p:nvPr/>
+      </p:nvGrpSpPr>
+      <p:grpSpPr>
+        <a:xfrm>
+          <a:off x="0" y="0"/>
+          <a:ext cx="0" cy="0"/>
+          <a:chOff x="0" y="0"/>
+          <a:chExt cx="0" cy="0"/>
+        </a:xfrm>
+      </p:grpSpPr>
+      <p:sp>
+        <p:nvSpPr>
+          <p:cNvPr id="2" name="Text 0"/>
+          <p:cNvSpPr/>
+          <p:nvPr/>
+        </p:nvSpPr>
+        <p:spPr>
+          <a:xfrm>
+            <a:off x="457200" y="713232"/>
+            <a:ext cx="11368735" cy="274320"/>
+          </a:xfrm>
+          <a:prstGeom prst="rect">
+            <a:avLst/>
+          </a:prstGeom>
+          <a:noFill/>
+          <a:ln/>
+        </p:spPr>
+        <p:txBody>
+          <a:bodyPr wrap="square" lIns="0" tIns="0" rIns="0" bIns="0" rtlCol="0" anchor="ctr"/>
+          <a:lstStyle/>
+          <a:p>
+            <a:pPr algn="r" indent="0" marL="0">
+              <a:buNone/>
+            </a:pPr>
+            <a:r>
+              <a:rPr lang="en-US" sz="1400" b="1" dirty="0">
+                <a:solidFill>
+                  <a:srgbClr val="1C3F6E"/>
+                </a:solidFill>
+                <a:latin typeface="Calibri" pitchFamily="34" charset="0"/>
+                <a:ea typeface="Calibri" pitchFamily="34" charset="-122"/>
+                <a:cs typeface="Calibri" pitchFamily="34" charset="-120"/>
+              </a:rPr>
+              <a:t>FORMATIVE EVALUATION</a:t>
+            </a:r>
+            <a:endParaRPr lang="en-US" sz="1400" dirty="0"/>
+          </a:p>
+        </p:txBody>
+      </p:sp>
+      <p:pic>
+        <p:nvPicPr>
+          <p:cNvPr id="3" name="Image 0" descr="/home/claude/f4/img/minesec_sheet.png">    </p:cNvPr>
+          <p:cNvPicPr>
+            <a:picLocks noChangeAspect="1"/>
+          </p:cNvPicPr>
+          <p:nvPr/>
+        </p:nvPicPr>
+        <p:blipFill>
+          <a:blip r:embed="rId1"/>
+          <a:stretch>
+            <a:fillRect/>
+          </a:stretch>
+        </p:blipFill>
+        <p:spPr>
+          <a:xfrm>
+            <a:off x="0" y="658368"/>
+            <a:ext cx="5120640" cy="5833872"/>
+          </a:xfrm>
+          <a:prstGeom prst="rect">
+            <a:avLst/>
+          </a:prstGeom>
+        </p:spPr>
+      </p:pic>
+      <p:sp>
+        <p:nvSpPr>
+          <p:cNvPr id="4" name="Text 1"/>
+          <p:cNvSpPr/>
+          <p:nvPr/>
+        </p:nvSpPr>
+        <p:spPr>
+          <a:xfrm>
+            <a:off x="5349240" y="1005840"/>
+            <a:ext cx="6522415" cy="731520"/>
+          </a:xfrm>
+          <a:prstGeom prst="rect">
+            <a:avLst/>
+          </a:prstGeom>
+          <a:noFill/>
+          <a:ln/>
+        </p:spPr>
+        <p:txBody>
+          <a:bodyPr wrap="square" lIns="0" tIns="0" rIns="0" bIns="0" rtlCol="0" anchor="ctr">
+            <a:normAutofit/>
+          </a:bodyPr>
+          <a:lstStyle/>
+          <a:p>
+            <a:pPr algn="ctr" indent="0" marL="0">
+              <a:buNone/>
+            </a:pPr>
+            <a:r>
+              <a:rPr lang="en-US" sz="3600" b="1" dirty="0">
+                <a:solidFill>
+                  <a:srgbClr val="990011"/>
+                </a:solidFill>
+                <a:latin typeface="Times New Roman" pitchFamily="34" charset="0"/>
+                <a:ea typeface="Times New Roman" pitchFamily="34" charset="-122"/>
+                <a:cs typeface="Times New Roman" pitchFamily="34" charset="-120"/>
+              </a:rPr>
+              <a:t>Evaluation 1</a:t>
+            </a:r>
+            <a:endParaRPr lang="en-US" sz="3600" dirty="0"/>
+          </a:p>
+        </p:txBody>
+      </p:sp>
+      <p:sp>
+        <p:nvSpPr>
+          <p:cNvPr id="5" name="Text 2"/>
+          <p:cNvSpPr/>
+          <p:nvPr/>
+        </p:nvSpPr>
+        <p:spPr>
+          <a:xfrm>
+            <a:off x="5349240" y="1783080"/>
+            <a:ext cx="6522415" cy="4663440"/>
+          </a:xfrm>
+          <a:prstGeom prst="rect">
+            <a:avLst/>
+          </a:prstGeom>
+          <a:noFill/>
+          <a:ln/>
+        </p:spPr>
+        <p:txBody>
+          <a:bodyPr wrap="square" lIns="0" tIns="0" rIns="0" bIns="0" rtlCol="0" anchor="t"/>
+          <a:lstStyle/>
+          <a:p>
+            <a:pPr algn="l" indent="0" marL="0">
+              <a:spcAft>
+                <a:spcPts val="800"/>
+              </a:spcAft>
+              <a:buNone/>
+            </a:pPr>
+            <a:r>
+              <a:rPr lang="en-US" sz="4000" dirty="0">
+                <a:solidFill>
+                  <a:srgbClr val="111111"/>
+                </a:solidFill>
+                <a:latin typeface="Times New Roman" pitchFamily="34" charset="0"/>
+                <a:ea typeface="Times New Roman" pitchFamily="34" charset="-122"/>
+                <a:cs typeface="Times New Roman" pitchFamily="34" charset="-120"/>
+              </a:rPr>
+              <a:t>Give two resources of hot deserts.</a:t>
+            </a:r>
+            <a:endParaRPr lang="en-US" sz="4000" dirty="0"/>
+          </a:p>
+        </p:txBody>
+      </p:sp>
+      <p:sp>
+        <p:nvSpPr>
+          <p:cNvPr id="25" name="Slide Number Placeholder 0"/>
+          <p:cNvSpPr>
+            <a:spLocks noGrp="1"/>
+          </p:cNvSpPr>
+          <p:nvPr>
+            <p:ph type="sldNum" sz="quarter" idx="4294967295"/>
+          </p:nvPr>
+        </p:nvSpPr>
+        <p:spPr>
+          <a:xfrm>
+            <a:off x="27432" y="91440"/>
+            <a:ext cx="585216" cy="475488"/>
+          </a:xfrm>
+          <a:prstGeom prst="rect">
+            <a:avLst/>
+          </a:prstGeom>
+          <a:extLst>
+            <a:ext uri="{C572A759-6A51-4108-AA02-DFA0A04FC94B}">
+              <ma14:wrappingTextBoxFlag xmlns:ma14="http://schemas.microsoft.com/office/mac/drawingml/2011/main" val="0"/>
+            </a:ext>
+          </a:extLst>
+        </p:spPr>
+        <p:txBody>
+          <a:bodyPr/>
+          <a:lstStyle>
+            <a:lvl1pPr>
+              <a:defRPr sz="2000">
+                <a:solidFill>
+                  <a:srgbClr val="FFFFFF"/>
+                </a:solidFill>
+                <a:latin typeface="Calibri"/>
+                <a:ea typeface="Calibri"/>
+                <a:cs typeface="Calibri"/>
+              </a:defRPr>
+            </a:lvl1pPr>
+          </a:lstStyle>
+          <a:p>
+            <a:pPr algn="ctr"/>
+            <a:fld id="{F7021451-1387-4CA6-816F-3879F97B5CBC}" type="slidenum">
+              <a:rPr b="1" lang="en-US"/>
+              <a:t>49</a:t>
+            </a:fld>
+            <a:endParaRPr lang="en-US"/>
+          </a:p>
+        </p:txBody>
+      </p:sp>
+    </p:spTree>
+  </p:cSld>
+  <p:clrMapOvr>
+    <a:masterClrMapping/>
+  </p:clrMapOvr>
+</p:sld>
+</file>
+
+<file path=ppt/slides/slide5.xml><?xml version="1.0" encoding="utf-8"?>
+<p:sld xmlns:a="http://schemas.openxmlformats.org/drawingml/2006/main" xmlns:r="http://schemas.openxmlformats.org/officeDocument/2006/relationships" xmlns:p="http://schemas.openxmlformats.org/presentationml/2006/main">
+  <p:cSld name="Slide 5">
+    <p:spTree>
+      <p:nvGrpSpPr>
+        <p:cNvPr id="1" name=""/>
+        <p:cNvGrpSpPr/>
+        <p:nvPr/>
+      </p:nvGrpSpPr>
+      <p:grpSpPr>
+        <a:xfrm>
+          <a:off x="0" y="0"/>
+          <a:ext cx="0" cy="0"/>
+          <a:chOff x="0" y="0"/>
+          <a:chExt cx="0" cy="0"/>
+        </a:xfrm>
+      </p:grpSpPr>
+      <p:sp>
+        <p:nvSpPr>
+          <p:cNvPr id="2" name="Text 0"/>
+          <p:cNvSpPr/>
+          <p:nvPr/>
+        </p:nvSpPr>
+        <p:spPr>
+          <a:xfrm>
+            <a:off x="457200" y="713232"/>
+            <a:ext cx="11368735" cy="274320"/>
+          </a:xfrm>
+          <a:prstGeom prst="rect">
+            <a:avLst/>
+          </a:prstGeom>
+          <a:noFill/>
+          <a:ln/>
+        </p:spPr>
+        <p:txBody>
+          <a:bodyPr wrap="square" lIns="0" tIns="0" rIns="0" bIns="0" rtlCol="0" anchor="ctr"/>
+          <a:lstStyle/>
+          <a:p>
+            <a:pPr algn="r" indent="0" marL="0">
+              <a:buNone/>
+            </a:pPr>
+            <a:r>
+              <a:rPr lang="en-US" sz="1400" b="1" dirty="0">
+                <a:solidFill>
+                  <a:srgbClr val="1C3F6E"/>
+                </a:solidFill>
+                <a:latin typeface="Calibri" pitchFamily="34" charset="0"/>
+                <a:ea typeface="Calibri" pitchFamily="34" charset="-122"/>
+                <a:cs typeface="Calibri" pitchFamily="34" charset="-120"/>
+              </a:rPr>
+              <a:t>HOMEWORK CORRECTION</a:t>
+            </a:r>
+            <a:endParaRPr lang="en-US" sz="1400" dirty="0"/>
+          </a:p>
+        </p:txBody>
+      </p:sp>
+      <p:pic>
+        <p:nvPicPr>
+          <p:cNvPr id="3" name="Image 0" descr="/home/claude/f4/img/minesec_sheet.png">    </p:cNvPr>
+          <p:cNvPicPr>
+            <a:picLocks noChangeAspect="1"/>
+          </p:cNvPicPr>
+          <p:nvPr/>
+        </p:nvPicPr>
+        <p:blipFill>
+          <a:blip r:embed="rId1"/>
+          <a:stretch>
+            <a:fillRect/>
+          </a:stretch>
+        </p:blipFill>
+        <p:spPr>
+          <a:xfrm>
+            <a:off x="0" y="658368"/>
+            <a:ext cx="5120640" cy="5833872"/>
+          </a:xfrm>
+          <a:prstGeom prst="rect">
+            <a:avLst/>
+          </a:prstGeom>
+        </p:spPr>
+      </p:pic>
+      <p:sp>
+        <p:nvSpPr>
+          <p:cNvPr id="4" name="Text 1"/>
+          <p:cNvSpPr/>
+          <p:nvPr/>
+        </p:nvSpPr>
+        <p:spPr>
+          <a:xfrm>
+            <a:off x="5349240" y="1005840"/>
+            <a:ext cx="6522415" cy="731520"/>
+          </a:xfrm>
+          <a:prstGeom prst="rect">
+            <a:avLst/>
+          </a:prstGeom>
+          <a:noFill/>
+          <a:ln/>
+        </p:spPr>
+        <p:txBody>
+          <a:bodyPr wrap="square" lIns="0" tIns="0" rIns="0" bIns="0" rtlCol="0" anchor="ctr">
+            <a:normAutofit/>
+          </a:bodyPr>
+          <a:lstStyle/>
+          <a:p>
+            <a:pPr algn="ctr" indent="0" marL="0">
+              <a:buNone/>
+            </a:pPr>
+            <a:r>
+              <a:rPr lang="en-US" sz="3600" b="1" dirty="0">
+                <a:solidFill>
+                  <a:srgbClr val="990011"/>
+                </a:solidFill>
+                <a:latin typeface="Times New Roman" pitchFamily="34" charset="0"/>
+                <a:ea typeface="Times New Roman" pitchFamily="34" charset="-122"/>
+                <a:cs typeface="Times New Roman" pitchFamily="34" charset="-120"/>
+              </a:rPr>
+              <a:t>Correction: Possible Answer</a:t>
+            </a:r>
+            <a:endParaRPr lang="en-US" sz="3600" dirty="0"/>
+          </a:p>
+        </p:txBody>
+      </p:sp>
+      <p:sp>
+        <p:nvSpPr>
+          <p:cNvPr id="5" name="Text 2"/>
+          <p:cNvSpPr/>
+          <p:nvPr/>
+        </p:nvSpPr>
+        <p:spPr>
+          <a:xfrm>
+            <a:off x="5349240" y="1783080"/>
+            <a:ext cx="6522415" cy="4663440"/>
+          </a:xfrm>
+          <a:prstGeom prst="rect">
+            <a:avLst/>
+          </a:prstGeom>
+          <a:noFill/>
+          <a:ln/>
+        </p:spPr>
+        <p:txBody>
+          <a:bodyPr wrap="square" lIns="0" tIns="0" rIns="0" bIns="0" rtlCol="0" anchor="t"/>
+          <a:lstStyle/>
+          <a:p>
+            <a:pPr algn="l" indent="0" marL="0">
+              <a:spcAft>
+                <a:spcPts val="800"/>
+              </a:spcAft>
+              <a:buNone/>
+            </a:pPr>
+            <a:r>
+              <a:rPr lang="en-US" sz="4000" dirty="0">
+                <a:solidFill>
+                  <a:srgbClr val="111111"/>
+                </a:solidFill>
+                <a:latin typeface="Times New Roman" pitchFamily="34" charset="0"/>
+                <a:ea typeface="Times New Roman" pitchFamily="34" charset="-122"/>
+                <a:cs typeface="Times New Roman" pitchFamily="34" charset="-120"/>
+              </a:rPr>
+              <a:t>Plants: shea tree (butter), baobab (leaves), acacia (gum). Animals: cattle (meat, milk), goats (meat), bees (honey).</a:t>
+            </a:r>
+            <a:endParaRPr lang="en-US" sz="4000" dirty="0"/>
+          </a:p>
+        </p:txBody>
+      </p:sp>
+      <p:sp>
+        <p:nvSpPr>
+          <p:cNvPr id="25" name="Slide Number Placeholder 0"/>
+          <p:cNvSpPr>
+            <a:spLocks noGrp="1"/>
+          </p:cNvSpPr>
+          <p:nvPr>
+            <p:ph type="sldNum" sz="quarter" idx="4294967295"/>
+          </p:nvPr>
+        </p:nvSpPr>
+        <p:spPr>
+          <a:xfrm>
+            <a:off x="27432" y="91440"/>
+            <a:ext cx="585216" cy="475488"/>
+          </a:xfrm>
+          <a:prstGeom prst="rect">
+            <a:avLst/>
+          </a:prstGeom>
+          <a:extLst>
+            <a:ext uri="{C572A759-6A51-4108-AA02-DFA0A04FC94B}">
+              <ma14:wrappingTextBoxFlag xmlns:ma14="http://schemas.microsoft.com/office/mac/drawingml/2011/main" val="0"/>
+            </a:ext>
+          </a:extLst>
+        </p:spPr>
+        <p:txBody>
+          <a:bodyPr/>
+          <a:lstStyle>
+            <a:lvl1pPr>
+              <a:defRPr sz="2000">
+                <a:solidFill>
+                  <a:srgbClr val="FFFFFF"/>
+                </a:solidFill>
+                <a:latin typeface="Calibri"/>
+                <a:ea typeface="Calibri"/>
+                <a:cs typeface="Calibri"/>
+              </a:defRPr>
+            </a:lvl1pPr>
+          </a:lstStyle>
+          <a:p>
+            <a:pPr algn="ctr"/>
+            <a:fld id="{F7021451-1387-4CA6-816F-3879F97B5CBC}" type="slidenum">
+              <a:rPr b="1" lang="en-US"/>
+              <a:t>5</a:t>
+            </a:fld>
+            <a:endParaRPr lang="en-US"/>
+          </a:p>
+        </p:txBody>
+      </p:sp>
+    </p:spTree>
+  </p:cSld>
+  <p:clrMapOvr>
+    <a:masterClrMapping/>
+  </p:clrMapOvr>
+</p:sld>
+</file>
+
+<file path=ppt/slides/slide50.xml><?xml version="1.0" encoding="utf-8"?>
+<p:sld xmlns:a="http://schemas.openxmlformats.org/drawingml/2006/main" xmlns:r="http://schemas.openxmlformats.org/officeDocument/2006/relationships" xmlns:p="http://schemas.openxmlformats.org/presentationml/2006/main">
+  <p:cSld name="Slide 50">
+    <p:spTree>
+      <p:nvGrpSpPr>
+        <p:cNvPr id="1" name=""/>
+        <p:cNvGrpSpPr/>
+        <p:nvPr/>
+      </p:nvGrpSpPr>
+      <p:grpSpPr>
+        <a:xfrm>
+          <a:off x="0" y="0"/>
+          <a:ext cx="0" cy="0"/>
+          <a:chOff x="0" y="0"/>
+          <a:chExt cx="0" cy="0"/>
+        </a:xfrm>
+      </p:grpSpPr>
+      <p:sp>
+        <p:nvSpPr>
+          <p:cNvPr id="2" name="Text 0"/>
+          <p:cNvSpPr/>
+          <p:nvPr/>
+        </p:nvSpPr>
+        <p:spPr>
+          <a:xfrm>
+            <a:off x="457200" y="713232"/>
+            <a:ext cx="11368735" cy="274320"/>
+          </a:xfrm>
+          <a:prstGeom prst="rect">
+            <a:avLst/>
+          </a:prstGeom>
+          <a:noFill/>
+          <a:ln/>
+        </p:spPr>
+        <p:txBody>
+          <a:bodyPr wrap="square" lIns="0" tIns="0" rIns="0" bIns="0" rtlCol="0" anchor="ctr"/>
+          <a:lstStyle/>
+          <a:p>
+            <a:pPr algn="r" indent="0" marL="0">
+              <a:buNone/>
+            </a:pPr>
+            <a:r>
+              <a:rPr lang="en-US" sz="1400" b="1" dirty="0">
+                <a:solidFill>
+                  <a:srgbClr val="1C3F6E"/>
+                </a:solidFill>
+                <a:latin typeface="Calibri" pitchFamily="34" charset="0"/>
+                <a:ea typeface="Calibri" pitchFamily="34" charset="-122"/>
+                <a:cs typeface="Calibri" pitchFamily="34" charset="-120"/>
+              </a:rPr>
+              <a:t>FORMATIVE EVALUATION</a:t>
+            </a:r>
+            <a:endParaRPr lang="en-US" sz="1400" dirty="0"/>
+          </a:p>
+        </p:txBody>
+      </p:sp>
+      <p:pic>
+        <p:nvPicPr>
+          <p:cNvPr id="3" name="Image 0" descr="/home/claude/f4/img/minesec_sheet.png">    </p:cNvPr>
+          <p:cNvPicPr>
+            <a:picLocks noChangeAspect="1"/>
+          </p:cNvPicPr>
+          <p:nvPr/>
+        </p:nvPicPr>
+        <p:blipFill>
+          <a:blip r:embed="rId1"/>
+          <a:stretch>
+            <a:fillRect/>
+          </a:stretch>
+        </p:blipFill>
+        <p:spPr>
+          <a:xfrm>
+            <a:off x="0" y="658368"/>
+            <a:ext cx="5120640" cy="5833872"/>
+          </a:xfrm>
+          <a:prstGeom prst="rect">
+            <a:avLst/>
+          </a:prstGeom>
+        </p:spPr>
+      </p:pic>
+      <p:sp>
+        <p:nvSpPr>
+          <p:cNvPr id="4" name="Text 1"/>
+          <p:cNvSpPr/>
+          <p:nvPr/>
+        </p:nvSpPr>
+        <p:spPr>
+          <a:xfrm>
+            <a:off x="5349240" y="1005840"/>
+            <a:ext cx="6522415" cy="731520"/>
+          </a:xfrm>
+          <a:prstGeom prst="rect">
+            <a:avLst/>
+          </a:prstGeom>
+          <a:noFill/>
+          <a:ln/>
+        </p:spPr>
+        <p:txBody>
+          <a:bodyPr wrap="square" lIns="0" tIns="0" rIns="0" bIns="0" rtlCol="0" anchor="ctr">
+            <a:normAutofit/>
+          </a:bodyPr>
+          <a:lstStyle/>
+          <a:p>
+            <a:pPr algn="ctr" indent="0" marL="0">
+              <a:buNone/>
+            </a:pPr>
+            <a:r>
+              <a:rPr lang="en-US" sz="3600" b="1" dirty="0">
+                <a:solidFill>
+                  <a:srgbClr val="990011"/>
+                </a:solidFill>
+                <a:latin typeface="Times New Roman" pitchFamily="34" charset="0"/>
+                <a:ea typeface="Times New Roman" pitchFamily="34" charset="-122"/>
+                <a:cs typeface="Times New Roman" pitchFamily="34" charset="-120"/>
+              </a:rPr>
+              <a:t>Expected Answer</a:t>
+            </a:r>
+            <a:endParaRPr lang="en-US" sz="3600" dirty="0"/>
+          </a:p>
+        </p:txBody>
+      </p:sp>
+      <p:sp>
+        <p:nvSpPr>
+          <p:cNvPr id="5" name="Text 2"/>
+          <p:cNvSpPr/>
+          <p:nvPr/>
+        </p:nvSpPr>
+        <p:spPr>
+          <a:xfrm>
+            <a:off x="5349240" y="1783080"/>
+            <a:ext cx="6522415" cy="4663440"/>
+          </a:xfrm>
+          <a:prstGeom prst="rect">
+            <a:avLst/>
+          </a:prstGeom>
+          <a:noFill/>
+          <a:ln/>
+        </p:spPr>
+        <p:txBody>
+          <a:bodyPr wrap="square" lIns="0" tIns="0" rIns="0" bIns="0" rtlCol="0" anchor="t"/>
+          <a:lstStyle/>
+          <a:p>
+            <a:pPr algn="l" indent="0" marL="0">
+              <a:spcAft>
+                <a:spcPts val="800"/>
+              </a:spcAft>
+              <a:buNone/>
+            </a:pPr>
+            <a:r>
+              <a:rPr lang="en-US" sz="4000" dirty="0">
+                <a:solidFill>
+                  <a:srgbClr val="111111"/>
+                </a:solidFill>
+                <a:latin typeface="Times New Roman" pitchFamily="34" charset="0"/>
+                <a:ea typeface="Times New Roman" pitchFamily="34" charset="-122"/>
+                <a:cs typeface="Times New Roman" pitchFamily="34" charset="-120"/>
+              </a:rPr>
+              <a:t>Water at oases and oil.</a:t>
+            </a:r>
+            <a:endParaRPr lang="en-US" sz="4000" dirty="0"/>
+          </a:p>
+        </p:txBody>
+      </p:sp>
+      <p:sp>
+        <p:nvSpPr>
+          <p:cNvPr id="25" name="Slide Number Placeholder 0"/>
+          <p:cNvSpPr>
+            <a:spLocks noGrp="1"/>
+          </p:cNvSpPr>
+          <p:nvPr>
+            <p:ph type="sldNum" sz="quarter" idx="4294967295"/>
+          </p:nvPr>
+        </p:nvSpPr>
+        <p:spPr>
+          <a:xfrm>
+            <a:off x="27432" y="91440"/>
+            <a:ext cx="585216" cy="475488"/>
+          </a:xfrm>
+          <a:prstGeom prst="rect">
+            <a:avLst/>
+          </a:prstGeom>
+          <a:extLst>
+            <a:ext uri="{C572A759-6A51-4108-AA02-DFA0A04FC94B}">
+              <ma14:wrappingTextBoxFlag xmlns:ma14="http://schemas.microsoft.com/office/mac/drawingml/2011/main" val="0"/>
+            </a:ext>
+          </a:extLst>
+        </p:spPr>
+        <p:txBody>
+          <a:bodyPr/>
+          <a:lstStyle>
+            <a:lvl1pPr>
+              <a:defRPr sz="2000">
+                <a:solidFill>
+                  <a:srgbClr val="FFFFFF"/>
+                </a:solidFill>
+                <a:latin typeface="Calibri"/>
+                <a:ea typeface="Calibri"/>
+                <a:cs typeface="Calibri"/>
+              </a:defRPr>
+            </a:lvl1pPr>
+          </a:lstStyle>
+          <a:p>
+            <a:pPr algn="ctr"/>
+            <a:fld id="{F7021451-1387-4CA6-816F-3879F97B5CBC}" type="slidenum">
+              <a:rPr b="1" lang="en-US"/>
+              <a:t>50</a:t>
+            </a:fld>
+            <a:endParaRPr lang="en-US"/>
+          </a:p>
+        </p:txBody>
+      </p:sp>
+    </p:spTree>
+  </p:cSld>
+  <p:clrMapOvr>
+    <a:masterClrMapping/>
+  </p:clrMapOvr>
+</p:sld>
+</file>
+
+<file path=ppt/slides/slide51.xml><?xml version="1.0" encoding="utf-8"?>
+<p:sld xmlns:a="http://schemas.openxmlformats.org/drawingml/2006/main" xmlns:r="http://schemas.openxmlformats.org/officeDocument/2006/relationships" xmlns:p="http://schemas.openxmlformats.org/presentationml/2006/main">
+  <p:cSld name="Slide 51">
+    <p:spTree>
+      <p:nvGrpSpPr>
+        <p:cNvPr id="1" name=""/>
+        <p:cNvGrpSpPr/>
+        <p:nvPr/>
+      </p:nvGrpSpPr>
+      <p:grpSpPr>
+        <a:xfrm>
+          <a:off x="0" y="0"/>
+          <a:ext cx="0" cy="0"/>
+          <a:chOff x="0" y="0"/>
+          <a:chExt cx="0" cy="0"/>
+        </a:xfrm>
+      </p:grpSpPr>
+      <p:sp>
+        <p:nvSpPr>
+          <p:cNvPr id="2" name="Text 0"/>
+          <p:cNvSpPr/>
+          <p:nvPr/>
+        </p:nvSpPr>
+        <p:spPr>
+          <a:xfrm>
+            <a:off x="457200" y="713232"/>
+            <a:ext cx="11368735" cy="274320"/>
+          </a:xfrm>
+          <a:prstGeom prst="rect">
+            <a:avLst/>
+          </a:prstGeom>
+          <a:noFill/>
+          <a:ln/>
+        </p:spPr>
+        <p:txBody>
+          <a:bodyPr wrap="square" lIns="0" tIns="0" rIns="0" bIns="0" rtlCol="0" anchor="ctr"/>
+          <a:lstStyle/>
+          <a:p>
+            <a:pPr algn="r" indent="0" marL="0">
+              <a:buNone/>
+            </a:pPr>
+            <a:r>
+              <a:rPr lang="en-US" sz="1400" b="1" dirty="0">
+                <a:solidFill>
+                  <a:srgbClr val="1C3F6E"/>
+                </a:solidFill>
+                <a:latin typeface="Calibri" pitchFamily="34" charset="0"/>
+                <a:ea typeface="Calibri" pitchFamily="34" charset="-122"/>
+                <a:cs typeface="Calibri" pitchFamily="34" charset="-120"/>
+              </a:rPr>
+              <a:t>FORMATIVE EVALUATION</a:t>
+            </a:r>
+            <a:endParaRPr lang="en-US" sz="1400" dirty="0"/>
+          </a:p>
+        </p:txBody>
+      </p:sp>
+      <p:pic>
+        <p:nvPicPr>
+          <p:cNvPr id="3" name="Image 0" descr="/home/claude/f4/img/minesec_sheet.png">    </p:cNvPr>
+          <p:cNvPicPr>
+            <a:picLocks noChangeAspect="1"/>
+          </p:cNvPicPr>
+          <p:nvPr/>
+        </p:nvPicPr>
+        <p:blipFill>
+          <a:blip r:embed="rId1"/>
+          <a:stretch>
+            <a:fillRect/>
+          </a:stretch>
+        </p:blipFill>
+        <p:spPr>
+          <a:xfrm>
+            <a:off x="0" y="658368"/>
+            <a:ext cx="5120640" cy="5833872"/>
+          </a:xfrm>
+          <a:prstGeom prst="rect">
+            <a:avLst/>
+          </a:prstGeom>
+        </p:spPr>
+      </p:pic>
+      <p:sp>
+        <p:nvSpPr>
+          <p:cNvPr id="4" name="Text 1"/>
+          <p:cNvSpPr/>
+          <p:nvPr/>
+        </p:nvSpPr>
+        <p:spPr>
+          <a:xfrm>
+            <a:off x="5349240" y="1005840"/>
+            <a:ext cx="6522415" cy="731520"/>
+          </a:xfrm>
+          <a:prstGeom prst="rect">
+            <a:avLst/>
+          </a:prstGeom>
+          <a:noFill/>
+          <a:ln/>
+        </p:spPr>
+        <p:txBody>
+          <a:bodyPr wrap="square" lIns="0" tIns="0" rIns="0" bIns="0" rtlCol="0" anchor="ctr">
+            <a:normAutofit/>
+          </a:bodyPr>
+          <a:lstStyle/>
+          <a:p>
+            <a:pPr algn="ctr" indent="0" marL="0">
+              <a:buNone/>
+            </a:pPr>
+            <a:r>
+              <a:rPr lang="en-US" sz="3600" b="1" dirty="0">
+                <a:solidFill>
+                  <a:srgbClr val="990011"/>
+                </a:solidFill>
+                <a:latin typeface="Times New Roman" pitchFamily="34" charset="0"/>
+                <a:ea typeface="Times New Roman" pitchFamily="34" charset="-122"/>
+                <a:cs typeface="Times New Roman" pitchFamily="34" charset="-120"/>
+              </a:rPr>
+              <a:t>Evaluation 2</a:t>
+            </a:r>
+            <a:endParaRPr lang="en-US" sz="3600" dirty="0"/>
+          </a:p>
+        </p:txBody>
+      </p:sp>
+      <p:sp>
+        <p:nvSpPr>
+          <p:cNvPr id="5" name="Text 2"/>
+          <p:cNvSpPr/>
+          <p:nvPr/>
+        </p:nvSpPr>
+        <p:spPr>
+          <a:xfrm>
+            <a:off x="5349240" y="1783080"/>
+            <a:ext cx="6522415" cy="4663440"/>
+          </a:xfrm>
+          <a:prstGeom prst="rect">
+            <a:avLst/>
+          </a:prstGeom>
+          <a:noFill/>
+          <a:ln/>
+        </p:spPr>
+        <p:txBody>
+          <a:bodyPr wrap="square" lIns="0" tIns="0" rIns="0" bIns="0" rtlCol="0" anchor="t"/>
+          <a:lstStyle/>
+          <a:p>
+            <a:pPr algn="l" indent="0" marL="0">
+              <a:spcAft>
+                <a:spcPts val="800"/>
+              </a:spcAft>
+              <a:buNone/>
+            </a:pPr>
+            <a:r>
+              <a:rPr lang="en-US" sz="4000" dirty="0">
+                <a:solidFill>
+                  <a:srgbClr val="111111"/>
+                </a:solidFill>
+                <a:latin typeface="Times New Roman" pitchFamily="34" charset="0"/>
+                <a:ea typeface="Times New Roman" pitchFamily="34" charset="-122"/>
+                <a:cs typeface="Times New Roman" pitchFamily="34" charset="-120"/>
+              </a:rPr>
+              <a:t>Give two problems of the desert.</a:t>
+            </a:r>
+            <a:endParaRPr lang="en-US" sz="4000" dirty="0"/>
+          </a:p>
+        </p:txBody>
+      </p:sp>
+      <p:sp>
+        <p:nvSpPr>
+          <p:cNvPr id="25" name="Slide Number Placeholder 0"/>
+          <p:cNvSpPr>
+            <a:spLocks noGrp="1"/>
+          </p:cNvSpPr>
+          <p:nvPr>
+            <p:ph type="sldNum" sz="quarter" idx="4294967295"/>
+          </p:nvPr>
+        </p:nvSpPr>
+        <p:spPr>
+          <a:xfrm>
+            <a:off x="27432" y="91440"/>
+            <a:ext cx="585216" cy="475488"/>
+          </a:xfrm>
+          <a:prstGeom prst="rect">
+            <a:avLst/>
+          </a:prstGeom>
+          <a:extLst>
+            <a:ext uri="{C572A759-6A51-4108-AA02-DFA0A04FC94B}">
+              <ma14:wrappingTextBoxFlag xmlns:ma14="http://schemas.microsoft.com/office/mac/drawingml/2011/main" val="0"/>
+            </a:ext>
+          </a:extLst>
+        </p:spPr>
+        <p:txBody>
+          <a:bodyPr/>
+          <a:lstStyle>
+            <a:lvl1pPr>
+              <a:defRPr sz="2000">
+                <a:solidFill>
+                  <a:srgbClr val="FFFFFF"/>
+                </a:solidFill>
+                <a:latin typeface="Calibri"/>
+                <a:ea typeface="Calibri"/>
+                <a:cs typeface="Calibri"/>
+              </a:defRPr>
+            </a:lvl1pPr>
+          </a:lstStyle>
+          <a:p>
+            <a:pPr algn="ctr"/>
+            <a:fld id="{F7021451-1387-4CA6-816F-3879F97B5CBC}" type="slidenum">
+              <a:rPr b="1" lang="en-US"/>
+              <a:t>51</a:t>
+            </a:fld>
+            <a:endParaRPr lang="en-US"/>
+          </a:p>
+        </p:txBody>
+      </p:sp>
+    </p:spTree>
+  </p:cSld>
+  <p:clrMapOvr>
+    <a:masterClrMapping/>
+  </p:clrMapOvr>
+</p:sld>
+</file>
+
+<file path=ppt/slides/slide52.xml><?xml version="1.0" encoding="utf-8"?>
+<p:sld xmlns:a="http://schemas.openxmlformats.org/drawingml/2006/main" xmlns:r="http://schemas.openxmlformats.org/officeDocument/2006/relationships" xmlns:p="http://schemas.openxmlformats.org/presentationml/2006/main">
+  <p:cSld name="Slide 52">
+    <p:spTree>
+      <p:nvGrpSpPr>
+        <p:cNvPr id="1" name=""/>
+        <p:cNvGrpSpPr/>
+        <p:nvPr/>
+      </p:nvGrpSpPr>
+      <p:grpSpPr>
+        <a:xfrm>
+          <a:off x="0" y="0"/>
+          <a:ext cx="0" cy="0"/>
+          <a:chOff x="0" y="0"/>
+          <a:chExt cx="0" cy="0"/>
+        </a:xfrm>
+      </p:grpSpPr>
+      <p:sp>
+        <p:nvSpPr>
+          <p:cNvPr id="2" name="Text 0"/>
+          <p:cNvSpPr/>
+          <p:nvPr/>
+        </p:nvSpPr>
+        <p:spPr>
+          <a:xfrm>
+            <a:off x="457200" y="713232"/>
+            <a:ext cx="11368735" cy="274320"/>
+          </a:xfrm>
+          <a:prstGeom prst="rect">
+            <a:avLst/>
+          </a:prstGeom>
+          <a:noFill/>
+          <a:ln/>
+        </p:spPr>
+        <p:txBody>
+          <a:bodyPr wrap="square" lIns="0" tIns="0" rIns="0" bIns="0" rtlCol="0" anchor="ctr"/>
+          <a:lstStyle/>
+          <a:p>
+            <a:pPr algn="r" indent="0" marL="0">
+              <a:buNone/>
+            </a:pPr>
+            <a:r>
+              <a:rPr lang="en-US" sz="1400" b="1" dirty="0">
+                <a:solidFill>
+                  <a:srgbClr val="1C3F6E"/>
+                </a:solidFill>
+                <a:latin typeface="Calibri" pitchFamily="34" charset="0"/>
+                <a:ea typeface="Calibri" pitchFamily="34" charset="-122"/>
+                <a:cs typeface="Calibri" pitchFamily="34" charset="-120"/>
+              </a:rPr>
+              <a:t>FORMATIVE EVALUATION</a:t>
+            </a:r>
+            <a:endParaRPr lang="en-US" sz="1400" dirty="0"/>
+          </a:p>
+        </p:txBody>
+      </p:sp>
+      <p:pic>
+        <p:nvPicPr>
+          <p:cNvPr id="3" name="Image 0" descr="/home/claude/f4/img/minesec_sheet.png">    </p:cNvPr>
+          <p:cNvPicPr>
+            <a:picLocks noChangeAspect="1"/>
+          </p:cNvPicPr>
+          <p:nvPr/>
+        </p:nvPicPr>
+        <p:blipFill>
+          <a:blip r:embed="rId1"/>
+          <a:stretch>
+            <a:fillRect/>
+          </a:stretch>
+        </p:blipFill>
+        <p:spPr>
+          <a:xfrm>
+            <a:off x="0" y="658368"/>
+            <a:ext cx="5120640" cy="5833872"/>
+          </a:xfrm>
+          <a:prstGeom prst="rect">
+            <a:avLst/>
+          </a:prstGeom>
+        </p:spPr>
+      </p:pic>
+      <p:sp>
+        <p:nvSpPr>
+          <p:cNvPr id="4" name="Text 1"/>
+          <p:cNvSpPr/>
+          <p:nvPr/>
+        </p:nvSpPr>
+        <p:spPr>
+          <a:xfrm>
+            <a:off x="5349240" y="1005840"/>
+            <a:ext cx="6522415" cy="731520"/>
+          </a:xfrm>
+          <a:prstGeom prst="rect">
+            <a:avLst/>
+          </a:prstGeom>
+          <a:noFill/>
+          <a:ln/>
+        </p:spPr>
+        <p:txBody>
+          <a:bodyPr wrap="square" lIns="0" tIns="0" rIns="0" bIns="0" rtlCol="0" anchor="ctr">
+            <a:normAutofit/>
+          </a:bodyPr>
+          <a:lstStyle/>
+          <a:p>
+            <a:pPr algn="ctr" indent="0" marL="0">
+              <a:buNone/>
+            </a:pPr>
+            <a:r>
+              <a:rPr lang="en-US" sz="3600" b="1" dirty="0">
+                <a:solidFill>
+                  <a:srgbClr val="990011"/>
+                </a:solidFill>
+                <a:latin typeface="Times New Roman" pitchFamily="34" charset="0"/>
+                <a:ea typeface="Times New Roman" pitchFamily="34" charset="-122"/>
+                <a:cs typeface="Times New Roman" pitchFamily="34" charset="-120"/>
+              </a:rPr>
+              <a:t>Expected Answer</a:t>
+            </a:r>
+            <a:endParaRPr lang="en-US" sz="3600" dirty="0"/>
+          </a:p>
+        </p:txBody>
+      </p:sp>
+      <p:sp>
+        <p:nvSpPr>
+          <p:cNvPr id="5" name="Text 2"/>
+          <p:cNvSpPr/>
+          <p:nvPr/>
+        </p:nvSpPr>
+        <p:spPr>
+          <a:xfrm>
+            <a:off x="5349240" y="1783080"/>
+            <a:ext cx="6522415" cy="4663440"/>
+          </a:xfrm>
+          <a:prstGeom prst="rect">
+            <a:avLst/>
+          </a:prstGeom>
+          <a:noFill/>
+          <a:ln/>
+        </p:spPr>
+        <p:txBody>
+          <a:bodyPr wrap="square" lIns="0" tIns="0" rIns="0" bIns="0" rtlCol="0" anchor="t"/>
+          <a:lstStyle/>
+          <a:p>
+            <a:pPr algn="l" indent="0" marL="0">
+              <a:spcAft>
+                <a:spcPts val="800"/>
+              </a:spcAft>
+              <a:buNone/>
+            </a:pPr>
+            <a:r>
+              <a:rPr lang="en-US" sz="4000" dirty="0">
+                <a:solidFill>
+                  <a:srgbClr val="111111"/>
+                </a:solidFill>
+                <a:latin typeface="Times New Roman" pitchFamily="34" charset="0"/>
+                <a:ea typeface="Times New Roman" pitchFamily="34" charset="-122"/>
+                <a:cs typeface="Times New Roman" pitchFamily="34" charset="-120"/>
+              </a:rPr>
+              <a:t>Lack of water and sandstorms.</a:t>
+            </a:r>
+            <a:endParaRPr lang="en-US" sz="4000" dirty="0"/>
+          </a:p>
+        </p:txBody>
+      </p:sp>
+      <p:sp>
+        <p:nvSpPr>
+          <p:cNvPr id="25" name="Slide Number Placeholder 0"/>
+          <p:cNvSpPr>
+            <a:spLocks noGrp="1"/>
+          </p:cNvSpPr>
+          <p:nvPr>
+            <p:ph type="sldNum" sz="quarter" idx="4294967295"/>
+          </p:nvPr>
+        </p:nvSpPr>
+        <p:spPr>
+          <a:xfrm>
+            <a:off x="27432" y="91440"/>
+            <a:ext cx="585216" cy="475488"/>
+          </a:xfrm>
+          <a:prstGeom prst="rect">
+            <a:avLst/>
+          </a:prstGeom>
+          <a:extLst>
+            <a:ext uri="{C572A759-6A51-4108-AA02-DFA0A04FC94B}">
+              <ma14:wrappingTextBoxFlag xmlns:ma14="http://schemas.microsoft.com/office/mac/drawingml/2011/main" val="0"/>
+            </a:ext>
+          </a:extLst>
+        </p:spPr>
+        <p:txBody>
+          <a:bodyPr/>
+          <a:lstStyle>
+            <a:lvl1pPr>
+              <a:defRPr sz="2000">
+                <a:solidFill>
+                  <a:srgbClr val="FFFFFF"/>
+                </a:solidFill>
+                <a:latin typeface="Calibri"/>
+                <a:ea typeface="Calibri"/>
+                <a:cs typeface="Calibri"/>
+              </a:defRPr>
+            </a:lvl1pPr>
+          </a:lstStyle>
+          <a:p>
+            <a:pPr algn="ctr"/>
+            <a:fld id="{F7021451-1387-4CA6-816F-3879F97B5CBC}" type="slidenum">
+              <a:rPr b="1" lang="en-US"/>
+              <a:t>52</a:t>
+            </a:fld>
+            <a:endParaRPr lang="en-US"/>
+          </a:p>
+        </p:txBody>
+      </p:sp>
+    </p:spTree>
+  </p:cSld>
+  <p:clrMapOvr>
+    <a:masterClrMapping/>
+  </p:clrMapOvr>
+</p:sld>
+</file>
+
+<file path=ppt/slides/slide53.xml><?xml version="1.0" encoding="utf-8"?>
+<p:sld xmlns:a="http://schemas.openxmlformats.org/drawingml/2006/main" xmlns:r="http://schemas.openxmlformats.org/officeDocument/2006/relationships" xmlns:p="http://schemas.openxmlformats.org/presentationml/2006/main">
+  <p:cSld name="Slide 53">
+    <p:spTree>
+      <p:nvGrpSpPr>
+        <p:cNvPr id="1" name=""/>
+        <p:cNvGrpSpPr/>
+        <p:nvPr/>
+      </p:nvGrpSpPr>
+      <p:grpSpPr>
+        <a:xfrm>
+          <a:off x="0" y="0"/>
+          <a:ext cx="0" cy="0"/>
+          <a:chOff x="0" y="0"/>
+          <a:chExt cx="0" cy="0"/>
+        </a:xfrm>
+      </p:grpSpPr>
+      <p:sp>
+        <p:nvSpPr>
+          <p:cNvPr id="2" name="Text 0"/>
+          <p:cNvSpPr/>
+          <p:nvPr/>
+        </p:nvSpPr>
+        <p:spPr>
+          <a:xfrm>
+            <a:off x="457200" y="713232"/>
+            <a:ext cx="11368735" cy="274320"/>
+          </a:xfrm>
+          <a:prstGeom prst="rect">
+            <a:avLst/>
+          </a:prstGeom>
+          <a:noFill/>
+          <a:ln/>
+        </p:spPr>
+        <p:txBody>
+          <a:bodyPr wrap="square" lIns="0" tIns="0" rIns="0" bIns="0" rtlCol="0" anchor="ctr"/>
+          <a:lstStyle/>
+          <a:p>
+            <a:pPr algn="r" indent="0" marL="0">
+              <a:buNone/>
+            </a:pPr>
+            <a:r>
+              <a:rPr lang="en-US" sz="1400" b="1" dirty="0">
+                <a:solidFill>
+                  <a:srgbClr val="1C3F6E"/>
+                </a:solidFill>
+                <a:latin typeface="Calibri" pitchFamily="34" charset="0"/>
+                <a:ea typeface="Calibri" pitchFamily="34" charset="-122"/>
+                <a:cs typeface="Calibri" pitchFamily="34" charset="-120"/>
+              </a:rPr>
+              <a:t>REMEDIATION</a:t>
+            </a:r>
+            <a:endParaRPr lang="en-US" sz="1400" dirty="0"/>
+          </a:p>
+        </p:txBody>
+      </p:sp>
+      <p:pic>
+        <p:nvPicPr>
+          <p:cNvPr id="3" name="Image 0" descr="/home/claude/f4/img/minesec_sheet.png">    </p:cNvPr>
+          <p:cNvPicPr>
+            <a:picLocks noChangeAspect="1"/>
+          </p:cNvPicPr>
+          <p:nvPr/>
+        </p:nvPicPr>
+        <p:blipFill>
+          <a:blip r:embed="rId1"/>
+          <a:stretch>
+            <a:fillRect/>
+          </a:stretch>
+        </p:blipFill>
+        <p:spPr>
+          <a:xfrm>
+            <a:off x="0" y="658368"/>
+            <a:ext cx="2468880" cy="5833872"/>
+          </a:xfrm>
+          <a:prstGeom prst="rect">
+            <a:avLst/>
+          </a:prstGeom>
+        </p:spPr>
+      </p:pic>
+      <p:sp>
+        <p:nvSpPr>
+          <p:cNvPr id="4" name="Text 1"/>
+          <p:cNvSpPr/>
+          <p:nvPr/>
+        </p:nvSpPr>
+        <p:spPr>
+          <a:xfrm>
+            <a:off x="2697480" y="1005840"/>
+            <a:ext cx="9174175" cy="731520"/>
+          </a:xfrm>
+          <a:prstGeom prst="rect">
+            <a:avLst/>
+          </a:prstGeom>
+          <a:noFill/>
+          <a:ln/>
+        </p:spPr>
+        <p:txBody>
+          <a:bodyPr wrap="square" lIns="0" tIns="0" rIns="0" bIns="0" rtlCol="0" anchor="ctr">
+            <a:normAutofit/>
+          </a:bodyPr>
+          <a:lstStyle/>
+          <a:p>
+            <a:pPr algn="ctr" indent="0" marL="0">
+              <a:buNone/>
+            </a:pPr>
+            <a:r>
+              <a:rPr lang="en-US" sz="3600" b="1" dirty="0">
+                <a:solidFill>
+                  <a:srgbClr val="990011"/>
+                </a:solidFill>
+                <a:latin typeface="Times New Roman" pitchFamily="34" charset="0"/>
+                <a:ea typeface="Times New Roman" pitchFamily="34" charset="-122"/>
+                <a:cs typeface="Times New Roman" pitchFamily="34" charset="-120"/>
+              </a:rPr>
+              <a:t>Remediation</a:t>
+            </a:r>
+            <a:endParaRPr lang="en-US" sz="3600" dirty="0"/>
+          </a:p>
+        </p:txBody>
+      </p:sp>
+      <p:sp>
+        <p:nvSpPr>
+          <p:cNvPr id="5" name="Text 2"/>
+          <p:cNvSpPr/>
+          <p:nvPr/>
+        </p:nvSpPr>
+        <p:spPr>
+          <a:xfrm>
+            <a:off x="2697480" y="1783080"/>
+            <a:ext cx="9174175" cy="4663440"/>
+          </a:xfrm>
+          <a:prstGeom prst="rect">
+            <a:avLst/>
+          </a:prstGeom>
+          <a:noFill/>
+          <a:ln/>
+        </p:spPr>
+        <p:txBody>
+          <a:bodyPr wrap="square" lIns="0" tIns="0" rIns="0" bIns="0" rtlCol="0" anchor="t"/>
+          <a:lstStyle/>
+          <a:p>
+            <a:pPr algn="l" indent="0" marL="0">
+              <a:spcAft>
+                <a:spcPts val="800"/>
+              </a:spcAft>
+              <a:buNone/>
+            </a:pPr>
+            <a:r>
+              <a:rPr lang="en-US" sz="4000" b="1" dirty="0">
+                <a:solidFill>
+                  <a:srgbClr val="111111"/>
+                </a:solidFill>
+                <a:latin typeface="Times New Roman" pitchFamily="34" charset="0"/>
+                <a:ea typeface="Times New Roman" pitchFamily="34" charset="-122"/>
+                <a:cs typeface="Times New Roman" pitchFamily="34" charset="-120"/>
+              </a:rPr>
+              <a:t>Fill in the blanks:</a:t>
+            </a:r>
+            <a:endParaRPr lang="en-US" sz="4000" dirty="0"/>
+          </a:p>
+          <a:p>
+            <a:pPr algn="l" marL="342900" indent="-342900">
+              <a:spcAft>
+                <a:spcPts val="800"/>
+              </a:spcAft>
+              <a:buSzPct val="100000"/>
+              <a:buFont typeface="+mj-lt"/>
+              <a:buAutoNum type="arabicPeriod" startAt="1"/>
+            </a:pPr>
+            <a:r>
+              <a:rPr lang="en-US" sz="4000" dirty="0">
+                <a:solidFill>
+                  <a:srgbClr val="111111"/>
+                </a:solidFill>
+                <a:latin typeface="Times New Roman" pitchFamily="34" charset="0"/>
+                <a:ea typeface="Times New Roman" pitchFamily="34" charset="-122"/>
+                <a:cs typeface="Times New Roman" pitchFamily="34" charset="-120"/>
+              </a:rPr>
+              <a:t>A green place in the desert with water is an ______.</a:t>
+            </a:r>
+            <a:endParaRPr lang="en-US" sz="4000" dirty="0"/>
+          </a:p>
+          <a:p>
+            <a:pPr algn="l" marL="342900" indent="-342900">
+              <a:spcAft>
+                <a:spcPts val="800"/>
+              </a:spcAft>
+              <a:buSzPct val="100000"/>
+              <a:buFont typeface="+mj-lt"/>
+              <a:buAutoNum type="arabicPeriod" startAt="1"/>
+            </a:pPr>
+            <a:r>
+              <a:rPr lang="en-US" sz="4000" dirty="0">
+                <a:solidFill>
+                  <a:srgbClr val="111111"/>
+                </a:solidFill>
+                <a:latin typeface="Times New Roman" pitchFamily="34" charset="0"/>
+                <a:ea typeface="Times New Roman" pitchFamily="34" charset="-122"/>
+                <a:cs typeface="Times New Roman" pitchFamily="34" charset="-120"/>
+              </a:rPr>
+              <a:t>The animal of the desert is the ______.</a:t>
+            </a:r>
+            <a:endParaRPr lang="en-US" sz="4000" dirty="0"/>
+          </a:p>
+          <a:p>
+            <a:pPr algn="l" marL="342900" indent="-342900">
+              <a:spcAft>
+                <a:spcPts val="800"/>
+              </a:spcAft>
+              <a:buSzPct val="100000"/>
+              <a:buFont typeface="+mj-lt"/>
+              <a:buAutoNum type="arabicPeriod" startAt="1"/>
+            </a:pPr>
+            <a:r>
+              <a:rPr lang="en-US" sz="4000" dirty="0">
+                <a:solidFill>
+                  <a:srgbClr val="111111"/>
+                </a:solidFill>
+                <a:latin typeface="Times New Roman" pitchFamily="34" charset="0"/>
+                <a:ea typeface="Times New Roman" pitchFamily="34" charset="-122"/>
+                <a:cs typeface="Times New Roman" pitchFamily="34" charset="-120"/>
+              </a:rPr>
+              <a:t>Bringing water to fields is ______.</a:t>
+            </a:r>
+            <a:endParaRPr lang="en-US" sz="4000" dirty="0"/>
+          </a:p>
+        </p:txBody>
+      </p:sp>
+      <p:sp>
+        <p:nvSpPr>
+          <p:cNvPr id="25" name="Slide Number Placeholder 0"/>
+          <p:cNvSpPr>
+            <a:spLocks noGrp="1"/>
+          </p:cNvSpPr>
+          <p:nvPr>
+            <p:ph type="sldNum" sz="quarter" idx="4294967295"/>
+          </p:nvPr>
+        </p:nvSpPr>
+        <p:spPr>
+          <a:xfrm>
+            <a:off x="27432" y="91440"/>
+            <a:ext cx="585216" cy="475488"/>
+          </a:xfrm>
+          <a:prstGeom prst="rect">
+            <a:avLst/>
+          </a:prstGeom>
+          <a:extLst>
+            <a:ext uri="{C572A759-6A51-4108-AA02-DFA0A04FC94B}">
+              <ma14:wrappingTextBoxFlag xmlns:ma14="http://schemas.microsoft.com/office/mac/drawingml/2011/main" val="0"/>
+            </a:ext>
+          </a:extLst>
+        </p:spPr>
+        <p:txBody>
+          <a:bodyPr/>
+          <a:lstStyle>
+            <a:lvl1pPr>
+              <a:defRPr sz="2000">
+                <a:solidFill>
+                  <a:srgbClr val="FFFFFF"/>
+                </a:solidFill>
+                <a:latin typeface="Calibri"/>
+                <a:ea typeface="Calibri"/>
+                <a:cs typeface="Calibri"/>
+              </a:defRPr>
+            </a:lvl1pPr>
+          </a:lstStyle>
+          <a:p>
+            <a:pPr algn="ctr"/>
+            <a:fld id="{F7021451-1387-4CA6-816F-3879F97B5CBC}" type="slidenum">
+              <a:rPr b="1" lang="en-US"/>
+              <a:t>53</a:t>
+            </a:fld>
+            <a:endParaRPr lang="en-US"/>
+          </a:p>
+        </p:txBody>
+      </p:sp>
+    </p:spTree>
+  </p:cSld>
+  <p:clrMapOvr>
+    <a:masterClrMapping/>
+  </p:clrMapOvr>
+</p:sld>
+</file>
+
+<file path=ppt/slides/slide54.xml><?xml version="1.0" encoding="utf-8"?>
+<p:sld xmlns:a="http://schemas.openxmlformats.org/drawingml/2006/main" xmlns:r="http://schemas.openxmlformats.org/officeDocument/2006/relationships" xmlns:p="http://schemas.openxmlformats.org/presentationml/2006/main">
+  <p:cSld name="Slide 54">
+    <p:spTree>
+      <p:nvGrpSpPr>
+        <p:cNvPr id="1" name=""/>
+        <p:cNvGrpSpPr/>
+        <p:nvPr/>
+      </p:nvGrpSpPr>
+      <p:grpSpPr>
+        <a:xfrm>
+          <a:off x="0" y="0"/>
+          <a:ext cx="0" cy="0"/>
+          <a:chOff x="0" y="0"/>
+          <a:chExt cx="0" cy="0"/>
+        </a:xfrm>
+      </p:grpSpPr>
+      <p:sp>
+        <p:nvSpPr>
+          <p:cNvPr id="2" name="Text 0"/>
+          <p:cNvSpPr/>
+          <p:nvPr/>
+        </p:nvSpPr>
+        <p:spPr>
+          <a:xfrm>
+            <a:off x="457200" y="713232"/>
+            <a:ext cx="11368735" cy="274320"/>
+          </a:xfrm>
+          <a:prstGeom prst="rect">
+            <a:avLst/>
+          </a:prstGeom>
+          <a:noFill/>
+          <a:ln/>
+        </p:spPr>
+        <p:txBody>
+          <a:bodyPr wrap="square" lIns="0" tIns="0" rIns="0" bIns="0" rtlCol="0" anchor="ctr"/>
+          <a:lstStyle/>
+          <a:p>
+            <a:pPr algn="r" indent="0" marL="0">
+              <a:buNone/>
+            </a:pPr>
+            <a:r>
+              <a:rPr lang="en-US" sz="1400" b="1" dirty="0">
+                <a:solidFill>
+                  <a:srgbClr val="1C3F6E"/>
+                </a:solidFill>
+                <a:latin typeface="Calibri" pitchFamily="34" charset="0"/>
+                <a:ea typeface="Calibri" pitchFamily="34" charset="-122"/>
+                <a:cs typeface="Calibri" pitchFamily="34" charset="-120"/>
+              </a:rPr>
+              <a:t>HOMEWORK</a:t>
+            </a:r>
+            <a:endParaRPr lang="en-US" sz="1400" dirty="0"/>
+          </a:p>
+        </p:txBody>
+      </p:sp>
+      <p:pic>
+        <p:nvPicPr>
+          <p:cNvPr id="3" name="Image 0" descr="/home/claude/f4/img/minesec_sheet.png">    </p:cNvPr>
+          <p:cNvPicPr>
+            <a:picLocks noChangeAspect="1"/>
+          </p:cNvPicPr>
+          <p:nvPr/>
+        </p:nvPicPr>
+        <p:blipFill>
+          <a:blip r:embed="rId1"/>
+          <a:stretch>
+            <a:fillRect/>
+          </a:stretch>
+        </p:blipFill>
+        <p:spPr>
+          <a:xfrm>
+            <a:off x="0" y="658368"/>
+            <a:ext cx="5120640" cy="5833872"/>
+          </a:xfrm>
+          <a:prstGeom prst="rect">
+            <a:avLst/>
+          </a:prstGeom>
+        </p:spPr>
+      </p:pic>
+      <p:sp>
+        <p:nvSpPr>
+          <p:cNvPr id="4" name="Text 1"/>
+          <p:cNvSpPr/>
+          <p:nvPr/>
+        </p:nvSpPr>
+        <p:spPr>
+          <a:xfrm>
+            <a:off x="5349240" y="1005840"/>
+            <a:ext cx="6522415" cy="731520"/>
+          </a:xfrm>
+          <a:prstGeom prst="rect">
+            <a:avLst/>
+          </a:prstGeom>
+          <a:noFill/>
+          <a:ln/>
+        </p:spPr>
+        <p:txBody>
+          <a:bodyPr wrap="square" lIns="0" tIns="0" rIns="0" bIns="0" rtlCol="0" anchor="ctr">
+            <a:normAutofit/>
+          </a:bodyPr>
+          <a:lstStyle/>
+          <a:p>
+            <a:pPr algn="ctr" indent="0" marL="0">
+              <a:buNone/>
+            </a:pPr>
+            <a:r>
+              <a:rPr lang="en-US" sz="3600" b="1" dirty="0">
+                <a:solidFill>
+                  <a:srgbClr val="990011"/>
+                </a:solidFill>
+                <a:latin typeface="Times New Roman" pitchFamily="34" charset="0"/>
+                <a:ea typeface="Times New Roman" pitchFamily="34" charset="-122"/>
+                <a:cs typeface="Times New Roman" pitchFamily="34" charset="-120"/>
+              </a:rPr>
+              <a:t>Homework</a:t>
+            </a:r>
+            <a:endParaRPr lang="en-US" sz="3600" dirty="0"/>
+          </a:p>
+        </p:txBody>
+      </p:sp>
+      <p:sp>
+        <p:nvSpPr>
+          <p:cNvPr id="5" name="Text 2"/>
+          <p:cNvSpPr/>
+          <p:nvPr/>
+        </p:nvSpPr>
+        <p:spPr>
+          <a:xfrm>
+            <a:off x="5349240" y="1783080"/>
+            <a:ext cx="6522415" cy="4663440"/>
+          </a:xfrm>
+          <a:prstGeom prst="rect">
+            <a:avLst/>
+          </a:prstGeom>
+          <a:noFill/>
+          <a:ln/>
+        </p:spPr>
+        <p:txBody>
+          <a:bodyPr wrap="square" lIns="0" tIns="0" rIns="0" bIns="0" rtlCol="0" anchor="t"/>
+          <a:lstStyle/>
+          <a:p>
+            <a:pPr algn="l" indent="0" marL="0">
+              <a:spcAft>
+                <a:spcPts val="800"/>
+              </a:spcAft>
+              <a:buNone/>
+            </a:pPr>
+            <a:r>
+              <a:rPr lang="en-US" sz="4000" dirty="0">
+                <a:solidFill>
+                  <a:srgbClr val="111111"/>
+                </a:solidFill>
+                <a:latin typeface="Times New Roman" pitchFamily="34" charset="0"/>
+                <a:ea typeface="Times New Roman" pitchFamily="34" charset="-122"/>
+                <a:cs typeface="Times New Roman" pitchFamily="34" charset="-120"/>
+              </a:rPr>
+              <a:t>Write three ways people in the Far North of Cameroon save water.</a:t>
+            </a:r>
+            <a:endParaRPr lang="en-US" sz="4000" dirty="0"/>
+          </a:p>
+        </p:txBody>
+      </p:sp>
+      <p:sp>
+        <p:nvSpPr>
+          <p:cNvPr id="25" name="Slide Number Placeholder 0"/>
+          <p:cNvSpPr>
+            <a:spLocks noGrp="1"/>
+          </p:cNvSpPr>
+          <p:nvPr>
+            <p:ph type="sldNum" sz="quarter" idx="4294967295"/>
+          </p:nvPr>
+        </p:nvSpPr>
+        <p:spPr>
+          <a:xfrm>
+            <a:off x="27432" y="91440"/>
+            <a:ext cx="585216" cy="475488"/>
+          </a:xfrm>
+          <a:prstGeom prst="rect">
+            <a:avLst/>
+          </a:prstGeom>
+          <a:extLst>
+            <a:ext uri="{C572A759-6A51-4108-AA02-DFA0A04FC94B}">
+              <ma14:wrappingTextBoxFlag xmlns:ma14="http://schemas.microsoft.com/office/mac/drawingml/2011/main" val="0"/>
+            </a:ext>
+          </a:extLst>
+        </p:spPr>
+        <p:txBody>
+          <a:bodyPr/>
+          <a:lstStyle>
+            <a:lvl1pPr>
+              <a:defRPr sz="2000">
+                <a:solidFill>
+                  <a:srgbClr val="FFFFFF"/>
+                </a:solidFill>
+                <a:latin typeface="Calibri"/>
+                <a:ea typeface="Calibri"/>
+                <a:cs typeface="Calibri"/>
+              </a:defRPr>
+            </a:lvl1pPr>
+          </a:lstStyle>
+          <a:p>
+            <a:pPr algn="ctr"/>
+            <a:fld id="{F7021451-1387-4CA6-816F-3879F97B5CBC}" type="slidenum">
+              <a:rPr b="1" lang="en-US"/>
+              <a:t>54</a:t>
+            </a:fld>
+            <a:endParaRPr lang="en-US"/>
+          </a:p>
+        </p:txBody>
+      </p:sp>
+    </p:spTree>
+  </p:cSld>
+  <p:clrMapOvr>
+    <a:masterClrMapping/>
+  </p:clrMapOvr>
+</p:sld>
+</file>
+
+<file path=ppt/slides/slide55.xml><?xml version="1.0" encoding="utf-8"?>
+<p:sld xmlns:a="http://schemas.openxmlformats.org/drawingml/2006/main" xmlns:r="http://schemas.openxmlformats.org/officeDocument/2006/relationships" xmlns:p="http://schemas.openxmlformats.org/presentationml/2006/main">
+  <p:cSld name="Slide 55">
+    <p:spTree>
+      <p:nvGrpSpPr>
+        <p:cNvPr id="1" name=""/>
+        <p:cNvGrpSpPr/>
+        <p:nvPr/>
+      </p:nvGrpSpPr>
+      <p:grpSpPr>
+        <a:xfrm>
+          <a:off x="0" y="0"/>
+          <a:ext cx="0" cy="0"/>
+          <a:chOff x="0" y="0"/>
+          <a:chExt cx="0" cy="0"/>
+        </a:xfrm>
+      </p:grpSpPr>
+      <p:sp>
+        <p:nvSpPr>
+          <p:cNvPr id="2" name="Text 0"/>
+          <p:cNvSpPr/>
+          <p:nvPr/>
+        </p:nvSpPr>
+        <p:spPr>
+          <a:xfrm>
+            <a:off x="457200" y="713232"/>
+            <a:ext cx="11368735" cy="274320"/>
+          </a:xfrm>
+          <a:prstGeom prst="rect">
+            <a:avLst/>
+          </a:prstGeom>
+          <a:noFill/>
+          <a:ln/>
+        </p:spPr>
+        <p:txBody>
+          <a:bodyPr wrap="square" lIns="0" tIns="0" rIns="0" bIns="0" rtlCol="0" anchor="ctr"/>
+          <a:lstStyle/>
+          <a:p>
+            <a:pPr algn="r" indent="0" marL="0">
+              <a:buNone/>
+            </a:pPr>
+            <a:r>
+              <a:rPr lang="en-US" sz="1400" b="1" dirty="0">
+                <a:solidFill>
+                  <a:srgbClr val="1C3F6E"/>
+                </a:solidFill>
+                <a:latin typeface="Calibri" pitchFamily="34" charset="0"/>
+                <a:ea typeface="Calibri" pitchFamily="34" charset="-122"/>
+                <a:cs typeface="Calibri" pitchFamily="34" charset="-120"/>
+              </a:rPr>
+              <a:t>NEXT LESSON</a:t>
+            </a:r>
+            <a:endParaRPr lang="en-US" sz="1400" dirty="0"/>
+          </a:p>
+        </p:txBody>
+      </p:sp>
+      <p:pic>
+        <p:nvPicPr>
+          <p:cNvPr id="3" name="Image 0" descr="/home/claude/f4/img/minesec_sheet.png">    </p:cNvPr>
+          <p:cNvPicPr>
+            <a:picLocks noChangeAspect="1"/>
+          </p:cNvPicPr>
+          <p:nvPr/>
+        </p:nvPicPr>
+        <p:blipFill>
+          <a:blip r:embed="rId1"/>
+          <a:stretch>
+            <a:fillRect/>
+          </a:stretch>
+        </p:blipFill>
+        <p:spPr>
+          <a:xfrm>
+            <a:off x="0" y="658368"/>
+            <a:ext cx="5120640" cy="5833872"/>
+          </a:xfrm>
+          <a:prstGeom prst="rect">
+            <a:avLst/>
+          </a:prstGeom>
+        </p:spPr>
+      </p:pic>
+      <p:sp>
+        <p:nvSpPr>
+          <p:cNvPr id="4" name="Text 1"/>
+          <p:cNvSpPr/>
+          <p:nvPr/>
+        </p:nvSpPr>
+        <p:spPr>
+          <a:xfrm>
+            <a:off x="5349240" y="1005840"/>
+            <a:ext cx="6522415" cy="731520"/>
+          </a:xfrm>
+          <a:prstGeom prst="rect">
+            <a:avLst/>
+          </a:prstGeom>
+          <a:noFill/>
+          <a:ln/>
+        </p:spPr>
+        <p:txBody>
+          <a:bodyPr wrap="square" lIns="0" tIns="0" rIns="0" bIns="0" rtlCol="0" anchor="ctr">
+            <a:normAutofit/>
+          </a:bodyPr>
+          <a:lstStyle/>
+          <a:p>
+            <a:pPr algn="ctr" indent="0" marL="0">
+              <a:buNone/>
+            </a:pPr>
+            <a:r>
+              <a:rPr lang="en-US" sz="3600" b="1" dirty="0">
+                <a:solidFill>
+                  <a:srgbClr val="990011"/>
+                </a:solidFill>
+                <a:latin typeface="Times New Roman" pitchFamily="34" charset="0"/>
+                <a:ea typeface="Times New Roman" pitchFamily="34" charset="-122"/>
+                <a:cs typeface="Times New Roman" pitchFamily="34" charset="-120"/>
+              </a:rPr>
+              <a:t>Next Lesson</a:t>
+            </a:r>
+            <a:endParaRPr lang="en-US" sz="3600" dirty="0"/>
+          </a:p>
+        </p:txBody>
+      </p:sp>
+      <p:sp>
+        <p:nvSpPr>
+          <p:cNvPr id="5" name="Text 2"/>
+          <p:cNvSpPr/>
+          <p:nvPr/>
+        </p:nvSpPr>
+        <p:spPr>
+          <a:xfrm>
+            <a:off x="5349240" y="1783080"/>
+            <a:ext cx="6522415" cy="4663440"/>
+          </a:xfrm>
+          <a:prstGeom prst="rect">
+            <a:avLst/>
+          </a:prstGeom>
+          <a:noFill/>
+          <a:ln/>
+        </p:spPr>
+        <p:txBody>
+          <a:bodyPr wrap="square" lIns="0" tIns="0" rIns="0" bIns="0" rtlCol="0" anchor="ctr"/>
+          <a:lstStyle/>
+          <a:p>
+            <a:pPr algn="ctr" indent="0" marL="0">
+              <a:spcAft>
+                <a:spcPts val="800"/>
+              </a:spcAft>
+              <a:buNone/>
+            </a:pPr>
+            <a:r>
+              <a:rPr lang="en-US" sz="4000" b="1" dirty="0">
+                <a:solidFill>
+                  <a:srgbClr val="111111"/>
+                </a:solidFill>
+                <a:latin typeface="Times New Roman" pitchFamily="34" charset="0"/>
+                <a:ea typeface="Times New Roman" pitchFamily="34" charset="-122"/>
+                <a:cs typeface="Times New Roman" pitchFamily="34" charset="-120"/>
+              </a:rPr>
+              <a:t>Our next lesson will be on:</a:t>
+            </a:r>
+            <a:endParaRPr lang="en-US" sz="4000" dirty="0"/>
+          </a:p>
+          <a:p>
+            <a:pPr algn="ctr" indent="0" marL="0">
+              <a:spcAft>
+                <a:spcPts val="800"/>
+              </a:spcAft>
+              <a:buNone/>
+            </a:pPr>
+            <a:r>
+              <a:rPr lang="en-US" sz="4000" b="1" dirty="0">
+                <a:solidFill>
+                  <a:srgbClr val="990011"/>
+                </a:solidFill>
+                <a:latin typeface="Times New Roman" pitchFamily="34" charset="0"/>
+                <a:ea typeface="Times New Roman" pitchFamily="34" charset="-122"/>
+                <a:cs typeface="Times New Roman" pitchFamily="34" charset="-120"/>
+              </a:rPr>
+              <a:t>Further Study 4: Water Scarcity</a:t>
+            </a:r>
+            <a:endParaRPr lang="en-US" sz="4000" dirty="0"/>
+          </a:p>
+        </p:txBody>
+      </p:sp>
+      <p:sp>
+        <p:nvSpPr>
+          <p:cNvPr id="25" name="Slide Number Placeholder 0"/>
+          <p:cNvSpPr>
+            <a:spLocks noGrp="1"/>
+          </p:cNvSpPr>
+          <p:nvPr>
+            <p:ph type="sldNum" sz="quarter" idx="4294967295"/>
+          </p:nvPr>
+        </p:nvSpPr>
+        <p:spPr>
+          <a:xfrm>
+            <a:off x="27432" y="91440"/>
+            <a:ext cx="585216" cy="475488"/>
+          </a:xfrm>
+          <a:prstGeom prst="rect">
+            <a:avLst/>
+          </a:prstGeom>
+          <a:extLst>
+            <a:ext uri="{C572A759-6A51-4108-AA02-DFA0A04FC94B}">
+              <ma14:wrappingTextBoxFlag xmlns:ma14="http://schemas.microsoft.com/office/mac/drawingml/2011/main" val="0"/>
+            </a:ext>
+          </a:extLst>
+        </p:spPr>
+        <p:txBody>
+          <a:bodyPr/>
+          <a:lstStyle>
+            <a:lvl1pPr>
+              <a:defRPr sz="2000">
+                <a:solidFill>
+                  <a:srgbClr val="FFFFFF"/>
+                </a:solidFill>
+                <a:latin typeface="Calibri"/>
+                <a:ea typeface="Calibri"/>
+                <a:cs typeface="Calibri"/>
+              </a:defRPr>
+            </a:lvl1pPr>
+          </a:lstStyle>
+          <a:p>
+            <a:pPr algn="ctr"/>
+            <a:fld id="{F7021451-1387-4CA6-816F-3879F97B5CBC}" type="slidenum">
+              <a:rPr b="1" lang="en-US"/>
+              <a:t>55</a:t>
+            </a:fld>
+            <a:endParaRPr lang="en-US"/>
+          </a:p>
+        </p:txBody>
+      </p:sp>
+    </p:spTree>
+  </p:cSld>
+  <p:clrMapOvr>
+    <a:masterClrMapping/>
+  </p:clrMapOvr>
+</p:sld>
+</file>
+
+<file path=ppt/slides/slide56.xml><?xml version="1.0" encoding="utf-8"?>
+<p:sld xmlns:a="http://schemas.openxmlformats.org/drawingml/2006/main" xmlns:r="http://schemas.openxmlformats.org/officeDocument/2006/relationships" xmlns:p="http://schemas.openxmlformats.org/presentationml/2006/main">
+  <p:cSld name="Slide 56">
+    <p:spTree>
+      <p:nvGrpSpPr>
+        <p:cNvPr id="1" name=""/>
+        <p:cNvGrpSpPr/>
+        <p:nvPr/>
+      </p:nvGrpSpPr>
+      <p:grpSpPr>
+        <a:xfrm>
+          <a:off x="0" y="0"/>
+          <a:ext cx="0" cy="0"/>
+          <a:chOff x="0" y="0"/>
+          <a:chExt cx="0" cy="0"/>
+        </a:xfrm>
+      </p:grpSpPr>
+      <p:sp>
+        <p:nvSpPr>
+          <p:cNvPr id="2" name="Text 0"/>
+          <p:cNvSpPr/>
+          <p:nvPr/>
+        </p:nvSpPr>
+        <p:spPr>
+          <a:xfrm>
+            <a:off x="457200" y="713232"/>
+            <a:ext cx="11368735" cy="274320"/>
+          </a:xfrm>
+          <a:prstGeom prst="rect">
+            <a:avLst/>
+          </a:prstGeom>
+          <a:noFill/>
+          <a:ln/>
+        </p:spPr>
+        <p:txBody>
+          <a:bodyPr wrap="square" lIns="0" tIns="0" rIns="0" bIns="0" rtlCol="0" anchor="ctr"/>
+          <a:lstStyle/>
+          <a:p>
+            <a:pPr algn="r" indent="0" marL="0">
+              <a:buNone/>
+            </a:pPr>
+            <a:r>
+              <a:rPr lang="en-US" sz="1400" b="1" dirty="0">
+                <a:solidFill>
+                  <a:srgbClr val="1C3F6E"/>
+                </a:solidFill>
+                <a:latin typeface="Calibri" pitchFamily="34" charset="0"/>
+                <a:ea typeface="Calibri" pitchFamily="34" charset="-122"/>
+                <a:cs typeface="Calibri" pitchFamily="34" charset="-120"/>
+              </a:rPr>
+              <a:t>BILINGUAL GAME</a:t>
+            </a:r>
+            <a:endParaRPr lang="en-US" sz="1400" dirty="0"/>
+          </a:p>
+        </p:txBody>
+      </p:sp>
+      <p:sp>
+        <p:nvSpPr>
+          <p:cNvPr id="3" name="Text 1"/>
+          <p:cNvSpPr/>
+          <p:nvPr/>
+        </p:nvSpPr>
+        <p:spPr>
+          <a:xfrm>
+            <a:off x="457200" y="1005840"/>
+            <a:ext cx="11277295" cy="731520"/>
+          </a:xfrm>
+          <a:prstGeom prst="rect">
+            <a:avLst/>
+          </a:prstGeom>
+          <a:noFill/>
+          <a:ln/>
+        </p:spPr>
+        <p:txBody>
+          <a:bodyPr wrap="square" lIns="0" tIns="0" rIns="0" bIns="0" rtlCol="0" anchor="ctr"/>
+          <a:lstStyle/>
+          <a:p>
+            <a:pPr algn="ctr" indent="0" marL="0">
+              <a:buNone/>
+            </a:pPr>
+            <a:r>
+              <a:rPr lang="en-US" sz="3600" b="1" dirty="0">
+                <a:solidFill>
+                  <a:srgbClr val="990011"/>
+                </a:solidFill>
+                <a:latin typeface="Times New Roman" pitchFamily="34" charset="0"/>
+                <a:ea typeface="Times New Roman" pitchFamily="34" charset="-122"/>
+                <a:cs typeface="Times New Roman" pitchFamily="34" charset="-120"/>
+              </a:rPr>
               <a:t>Bilingual Game (Jeu Bilingue)</a:t>
             </a:r>
             <a:endParaRPr lang="en-US" sz="3600" dirty="0"/>
@@ -16637,7 +20242,7 @@
       </p:sp>
       <p:graphicFrame>
         <p:nvGraphicFramePr>
-          <p:cNvPr id="48" name="Table 0"/>
+          <p:cNvPr id="57" name="Table 0"/>
           <p:cNvGraphicFramePr>
             <a:graphicFrameLocks noGrp="1"/>
           </p:cNvGraphicFramePr>
@@ -17673,7 +21278,7 @@
             <a:pPr algn="ctr"/>
             <a:fld id="{F7021451-1387-4CA6-816F-3879F97B5CBC}" type="slidenum">
               <a:rPr b="1" lang="en-US"/>
-              <a:t>47</a:t>
+              <a:t>56</a:t>
             </a:fld>
             <a:endParaRPr lang="en-US"/>
           </a:p>
@@ -17687,9 +21292,9 @@
 </p:sld>
 </file>
 
-<file path=ppt/slides/slide48.xml><?xml version="1.0" encoding="utf-8"?>
+<file path=ppt/slides/slide57.xml><?xml version="1.0" encoding="utf-8"?>
 <p:sld xmlns:a="http://schemas.openxmlformats.org/drawingml/2006/main" xmlns:r="http://schemas.openxmlformats.org/officeDocument/2006/relationships" xmlns:p="http://schemas.openxmlformats.org/presentationml/2006/main">
-  <p:cSld name="Slide 48">
+  <p:cSld name="Slide 57">
     <p:spTree>
       <p:nvGrpSpPr>
         <p:cNvPr id="1" name=""/>
@@ -17784,7 +21389,7 @@
       </p:sp>
       <p:graphicFrame>
         <p:nvGraphicFramePr>
-          <p:cNvPr id="49" name="Table 0"/>
+          <p:cNvPr id="58" name="Table 0"/>
           <p:cNvGraphicFramePr>
             <a:graphicFrameLocks noGrp="1"/>
           </p:cNvGraphicFramePr>
@@ -18170,7 +21775,7 @@
                           <a:ea typeface="Calibri" pitchFamily="34" charset="-122"/>
                           <a:cs typeface="Calibri" pitchFamily="34" charset="-120"/>
                         </a:rPr>
-                        <a:t>Locate the hot deserts and describe their climate. Describe their resources and traditional methods of exploitation. Explain the problems faced and propose solutions.</a:t>
+                        <a:t>Locate the hot deserts and describe their climate and resources. Describe the traditional methods of exploitation. Explain the problems faced and propose solutions.</a:t>
                       </a:r>
                       <a:endParaRPr lang="en-US" sz="1600" dirty="0">
                         <a:latin typeface="Calibri" charset="0"/>
@@ -18406,7 +22011,7 @@
             <a:pPr algn="ctr"/>
             <a:fld id="{F7021451-1387-4CA6-816F-3879F97B5CBC}" type="slidenum">
               <a:rPr b="1" lang="en-US"/>
-              <a:t>48</a:t>
+              <a:t>57</a:t>
             </a:fld>
             <a:endParaRPr lang="en-US"/>
           </a:p>
@@ -18420,9 +22025,9 @@
 </p:sld>
 </file>
 
-<file path=ppt/slides/slide49.xml><?xml version="1.0" encoding="utf-8"?>
+<file path=ppt/slides/slide58.xml><?xml version="1.0" encoding="utf-8"?>
 <p:sld xmlns:a="http://schemas.openxmlformats.org/drawingml/2006/main" xmlns:r="http://schemas.openxmlformats.org/officeDocument/2006/relationships" xmlns:p="http://schemas.openxmlformats.org/presentationml/2006/main">
-  <p:cSld name="Slide 49">
+  <p:cSld name="Slide 58">
     <p:spTree>
       <p:nvGrpSpPr>
         <p:cNvPr id="1" name=""/>
@@ -18517,7 +22122,7 @@
       </p:sp>
       <p:graphicFrame>
         <p:nvGraphicFramePr>
-          <p:cNvPr id="50" name="Table 0"/>
+          <p:cNvPr id="59" name="Table 0"/>
           <p:cNvGraphicFramePr>
             <a:graphicFrameLocks noGrp="1"/>
           </p:cNvGraphicFramePr>
@@ -18627,7 +22232,7 @@
                           <a:ea typeface="Calibri" pitchFamily="34" charset="-122"/>
                           <a:cs typeface="Calibri" pitchFamily="34" charset="-120"/>
                         </a:rPr>
-                        <a:t>Location and Climate; Resources and Traditional Exploitation; Problems and Solutions.</a:t>
+                        <a:t>DEFINITIONS; Brief Presentation of Hot Deserts; Traditional Methods of Exploitation; Problems Faced; Proposed Solutions.</a:t>
                       </a:r>
                       <a:endParaRPr lang="en-US" sz="1600" dirty="0">
                         <a:latin typeface="Calibri" charset="0"/>
@@ -19277,7 +22882,7 @@
             <a:pPr algn="ctr"/>
             <a:fld id="{F7021451-1387-4CA6-816F-3879F97B5CBC}" type="slidenum">
               <a:rPr b="1" lang="en-US"/>
-              <a:t>49</a:t>
+              <a:t>58</a:t>
             </a:fld>
             <a:endParaRPr lang="en-US"/>
           </a:p>
@@ -19291,9 +22896,9 @@
 </p:sld>
 </file>
 
-<file path=ppt/slides/slide5.xml><?xml version="1.0" encoding="utf-8"?>
+<file path=ppt/slides/slide59.xml><?xml version="1.0" encoding="utf-8"?>
 <p:sld xmlns:a="http://schemas.openxmlformats.org/drawingml/2006/main" xmlns:r="http://schemas.openxmlformats.org/officeDocument/2006/relationships" xmlns:p="http://schemas.openxmlformats.org/presentationml/2006/main">
-  <p:cSld name="Slide 5">
+  <p:cSld name="Slide 59">
     <p:spTree>
       <p:nvGrpSpPr>
         <p:cNvPr id="1" name=""/>
@@ -19341,7 +22946,7 @@
                 <a:ea typeface="Calibri" pitchFamily="34" charset="-122"/>
                 <a:cs typeface="Calibri" pitchFamily="34" charset="-120"/>
               </a:rPr>
-              <a:t>HOMEWORK CORRECTION</a:t>
+              <a:t>TEACHER'S NOTE</a:t>
             </a:r>
             <a:endParaRPr lang="en-US" sz="1400" dirty="0"/>
           </a:p>
@@ -19364,7 +22969,7 @@
         <p:spPr>
           <a:xfrm>
             <a:off x="0" y="658368"/>
-            <a:ext cx="5120640" cy="5833872"/>
+            <a:ext cx="3840480" cy="5833872"/>
           </a:xfrm>
           <a:prstGeom prst="rect">
             <a:avLst/>
@@ -19379,8 +22984,8 @@
         </p:nvSpPr>
         <p:spPr>
           <a:xfrm>
-            <a:off x="5349240" y="1005840"/>
-            <a:ext cx="6522415" cy="731520"/>
+            <a:off x="4069080" y="1005840"/>
+            <a:ext cx="7802575" cy="731520"/>
           </a:xfrm>
           <a:prstGeom prst="rect">
             <a:avLst/>
@@ -19406,7 +23011,7 @@
                 <a:ea typeface="Times New Roman" pitchFamily="34" charset="-122"/>
                 <a:cs typeface="Times New Roman" pitchFamily="34" charset="-120"/>
               </a:rPr>
-              <a:t>Correction: Possible Answer</a:t>
+              <a:t>Teacher's Note</a:t>
             </a:r>
             <a:endParaRPr lang="en-US" sz="3600" dirty="0"/>
           </a:p>
@@ -19420,8 +23025,8 @@
         </p:nvSpPr>
         <p:spPr>
           <a:xfrm>
-            <a:off x="5349240" y="1783080"/>
-            <a:ext cx="6522415" cy="4663440"/>
+            <a:off x="4069080" y="1783080"/>
+            <a:ext cx="7802575" cy="4663440"/>
           </a:xfrm>
           <a:prstGeom prst="rect">
             <a:avLst/>
@@ -19433,24 +23038,130 @@
           <a:bodyPr wrap="square" lIns="0" tIns="0" rIns="0" bIns="0" rtlCol="0" anchor="t"/>
           <a:lstStyle/>
           <a:p>
-            <a:pPr algn="l" indent="0" marL="0">
+            <a:pPr algn="l" marL="342900" indent="-342900">
               <a:spcAft>
                 <a:spcPts val="800"/>
               </a:spcAft>
-              <a:buNone/>
-            </a:pPr>
-            <a:r>
-              <a:rPr lang="en-US" sz="4000" dirty="0">
+              <a:buSzPct val="100000"/>
+              <a:buChar char="•"/>
+            </a:pPr>
+            <a:r>
+              <a:rPr lang="en-US" sz="2000" dirty="0">
                 <a:solidFill>
                   <a:srgbClr val="111111"/>
                 </a:solidFill>
-                <a:latin typeface="Times New Roman" pitchFamily="34" charset="0"/>
-                <a:ea typeface="Times New Roman" pitchFamily="34" charset="-122"/>
-                <a:cs typeface="Times New Roman" pitchFamily="34" charset="-120"/>
-              </a:rPr>
-              <a:t>Plants: shea tree (butter), baobab (leaves), acacia (gum). Animals: cattle (meat, milk), goats (meat), bees (honey).</a:t>
-            </a:r>
-            <a:endParaRPr lang="en-US" sz="4000" dirty="0"/>
+                <a:latin typeface="Calibri" pitchFamily="34" charset="0"/>
+                <a:ea typeface="Calibri" pitchFamily="34" charset="-122"/>
+                <a:cs typeface="Calibri" pitchFamily="34" charset="-120"/>
+              </a:rPr>
+              <a:t>Timing: Homework correction, plan, objectives 8 min | Recall, situation, action 10 min | 5 activities 30 min | Board summary (copying) 30 min | Evaluation, remediation 10 min | Homework, next lesson 5 min | Logbook 7 min</a:t>
+            </a:r>
+            <a:endParaRPr lang="en-US" sz="2000" dirty="0"/>
+          </a:p>
+          <a:p>
+            <a:pPr algn="l" marL="342900" indent="-342900">
+              <a:spcAft>
+                <a:spcPts val="800"/>
+              </a:spcAft>
+              <a:buSzPct val="100000"/>
+              <a:buChar char="•"/>
+            </a:pPr>
+            <a:r>
+              <a:rPr lang="en-US" sz="2000" dirty="0">
+                <a:solidFill>
+                  <a:srgbClr val="111111"/>
+                </a:solidFill>
+                <a:latin typeface="Calibri" pitchFamily="34" charset="0"/>
+                <a:ea typeface="Calibri" pitchFamily="34" charset="-122"/>
+                <a:cs typeface="Calibri" pitchFamily="34" charset="-120"/>
+              </a:rPr>
+              <a:t>Without the projector (Activity 1): use the atlas.</a:t>
+            </a:r>
+            <a:endParaRPr lang="en-US" sz="2000" dirty="0"/>
+          </a:p>
+          <a:p>
+            <a:pPr algn="l" marL="342900" indent="-342900">
+              <a:spcAft>
+                <a:spcPts val="800"/>
+              </a:spcAft>
+              <a:buSzPct val="100000"/>
+              <a:buChar char="•"/>
+            </a:pPr>
+            <a:r>
+              <a:rPr lang="en-US" sz="2000" dirty="0">
+                <a:solidFill>
+                  <a:srgbClr val="111111"/>
+                </a:solidFill>
+                <a:latin typeface="Calibri" pitchFamily="34" charset="0"/>
+                <a:ea typeface="Calibri" pitchFamily="34" charset="-122"/>
+                <a:cs typeface="Calibri" pitchFamily="34" charset="-120"/>
+              </a:rPr>
+              <a:t>Without the projector (Activity 2): compare with Garoua.</a:t>
+            </a:r>
+            <a:endParaRPr lang="en-US" sz="2000" dirty="0"/>
+          </a:p>
+          <a:p>
+            <a:pPr algn="l" marL="342900" indent="-342900">
+              <a:spcAft>
+                <a:spcPts val="800"/>
+              </a:spcAft>
+              <a:buSzPct val="100000"/>
+              <a:buChar char="•"/>
+            </a:pPr>
+            <a:r>
+              <a:rPr lang="en-US" sz="2000" dirty="0">
+                <a:solidFill>
+                  <a:srgbClr val="111111"/>
+                </a:solidFill>
+                <a:latin typeface="Calibri" pitchFamily="34" charset="0"/>
+                <a:ea typeface="Calibri" pitchFamily="34" charset="-122"/>
+                <a:cs typeface="Calibri" pitchFamily="34" charset="-120"/>
+              </a:rPr>
+              <a:t>Without the projector (Activity 3): list desert resources.</a:t>
+            </a:r>
+            <a:endParaRPr lang="en-US" sz="2000" dirty="0"/>
+          </a:p>
+          <a:p>
+            <a:pPr algn="l" marL="342900" indent="-342900">
+              <a:spcAft>
+                <a:spcPts val="800"/>
+              </a:spcAft>
+              <a:buSzPct val="100000"/>
+              <a:buChar char="•"/>
+            </a:pPr>
+            <a:r>
+              <a:rPr lang="en-US" sz="2000" dirty="0">
+                <a:solidFill>
+                  <a:srgbClr val="111111"/>
+                </a:solidFill>
+                <a:latin typeface="Calibri" pitchFamily="34" charset="0"/>
+                <a:ea typeface="Calibri" pitchFamily="34" charset="-122"/>
+                <a:cs typeface="Calibri" pitchFamily="34" charset="-120"/>
+              </a:rPr>
+              <a:t>Without the projector (Activity 4): describe nomads of the Far North.</a:t>
+            </a:r>
+            <a:endParaRPr lang="en-US" sz="2000" dirty="0"/>
+          </a:p>
+          <a:p>
+            <a:pPr algn="l" marL="342900" indent="-342900">
+              <a:spcAft>
+                <a:spcPts val="800"/>
+              </a:spcAft>
+              <a:buSzPct val="100000"/>
+              <a:buChar char="•"/>
+            </a:pPr>
+            <a:r>
+              <a:rPr lang="en-US" sz="2000" dirty="0">
+                <a:solidFill>
+                  <a:srgbClr val="111111"/>
+                </a:solidFill>
+                <a:latin typeface="Calibri" pitchFamily="34" charset="0"/>
+                <a:ea typeface="Calibri" pitchFamily="34" charset="-122"/>
+                <a:cs typeface="Calibri" pitchFamily="34" charset="-120"/>
+              </a:rPr>
+              <a:t>Without the projector (Activity 5): discuss water problems.</a:t>
+            </a:r>
+            <a:endParaRPr lang="en-US" sz="2000" dirty="0"/>
           </a:p>
         </p:txBody>
       </p:sp>
@@ -19496,657 +23207,7 @@
             <a:pPr algn="ctr"/>
             <a:fld id="{F7021451-1387-4CA6-816F-3879F97B5CBC}" type="slidenum">
               <a:rPr b="1" lang="en-US"/>
-              <a:t>5</a:t>
-            </a:fld>
-            <a:endParaRPr lang="en-US"/>
-          </a:p>
-        </p:txBody>
-      </p:sp>
-    </p:spTree>
-  </p:cSld>
-  <p:clrMapOvr>
-    <a:masterClrMapping/>
-  </p:clrMapOvr>
-</p:sld>
-</file>
-
-<file path=ppt/slides/slide50.xml><?xml version="1.0" encoding="utf-8"?>
-<p:sld xmlns:a="http://schemas.openxmlformats.org/drawingml/2006/main" xmlns:r="http://schemas.openxmlformats.org/officeDocument/2006/relationships" xmlns:p="http://schemas.openxmlformats.org/presentationml/2006/main">
-  <p:cSld name="Slide 50">
-    <p:spTree>
-      <p:nvGrpSpPr>
-        <p:cNvPr id="1" name=""/>
-        <p:cNvGrpSpPr/>
-        <p:nvPr/>
-      </p:nvGrpSpPr>
-      <p:grpSpPr>
-        <a:xfrm>
-          <a:off x="0" y="0"/>
-          <a:ext cx="0" cy="0"/>
-          <a:chOff x="0" y="0"/>
-          <a:chExt cx="0" cy="0"/>
-        </a:xfrm>
-      </p:grpSpPr>
-      <p:sp>
-        <p:nvSpPr>
-          <p:cNvPr id="2" name="Text 0"/>
-          <p:cNvSpPr/>
-          <p:nvPr/>
-        </p:nvSpPr>
-        <p:spPr>
-          <a:xfrm>
-            <a:off x="457200" y="713232"/>
-            <a:ext cx="11368735" cy="274320"/>
-          </a:xfrm>
-          <a:prstGeom prst="rect">
-            <a:avLst/>
-          </a:prstGeom>
-          <a:noFill/>
-          <a:ln/>
-        </p:spPr>
-        <p:txBody>
-          <a:bodyPr wrap="square" lIns="0" tIns="0" rIns="0" bIns="0" rtlCol="0" anchor="ctr"/>
-          <a:lstStyle/>
-          <a:p>
-            <a:pPr algn="r" indent="0" marL="0">
-              <a:buNone/>
-            </a:pPr>
-            <a:r>
-              <a:rPr lang="en-US" sz="1400" b="1" dirty="0">
-                <a:solidFill>
-                  <a:srgbClr val="1C3F6E"/>
-                </a:solidFill>
-                <a:latin typeface="Calibri" pitchFamily="34" charset="0"/>
-                <a:ea typeface="Calibri" pitchFamily="34" charset="-122"/>
-                <a:cs typeface="Calibri" pitchFamily="34" charset="-120"/>
-              </a:rPr>
-              <a:t>TEACHER'S NOTE</a:t>
-            </a:r>
-            <a:endParaRPr lang="en-US" sz="1400" dirty="0"/>
-          </a:p>
-        </p:txBody>
-      </p:sp>
-      <p:pic>
-        <p:nvPicPr>
-          <p:cNvPr id="3" name="Image 0" descr="/home/claude/f4/img/minesec_sheet.png">    </p:cNvPr>
-          <p:cNvPicPr>
-            <a:picLocks noChangeAspect="1"/>
-          </p:cNvPicPr>
-          <p:nvPr/>
-        </p:nvPicPr>
-        <p:blipFill>
-          <a:blip r:embed="rId1"/>
-          <a:stretch>
-            <a:fillRect/>
-          </a:stretch>
-        </p:blipFill>
-        <p:spPr>
-          <a:xfrm>
-            <a:off x="0" y="658368"/>
-            <a:ext cx="3840480" cy="5833872"/>
-          </a:xfrm>
-          <a:prstGeom prst="rect">
-            <a:avLst/>
-          </a:prstGeom>
-        </p:spPr>
-      </p:pic>
-      <p:sp>
-        <p:nvSpPr>
-          <p:cNvPr id="4" name="Text 1"/>
-          <p:cNvSpPr/>
-          <p:nvPr/>
-        </p:nvSpPr>
-        <p:spPr>
-          <a:xfrm>
-            <a:off x="4069080" y="1005840"/>
-            <a:ext cx="7802575" cy="731520"/>
-          </a:xfrm>
-          <a:prstGeom prst="rect">
-            <a:avLst/>
-          </a:prstGeom>
-          <a:noFill/>
-          <a:ln/>
-        </p:spPr>
-        <p:txBody>
-          <a:bodyPr wrap="square" lIns="0" tIns="0" rIns="0" bIns="0" rtlCol="0" anchor="ctr">
-            <a:normAutofit/>
-          </a:bodyPr>
-          <a:lstStyle/>
-          <a:p>
-            <a:pPr algn="ctr" indent="0" marL="0">
-              <a:buNone/>
-            </a:pPr>
-            <a:r>
-              <a:rPr lang="en-US" sz="3600" b="1" dirty="0">
-                <a:solidFill>
-                  <a:srgbClr val="990011"/>
-                </a:solidFill>
-                <a:latin typeface="Times New Roman" pitchFamily="34" charset="0"/>
-                <a:ea typeface="Times New Roman" pitchFamily="34" charset="-122"/>
-                <a:cs typeface="Times New Roman" pitchFamily="34" charset="-120"/>
-              </a:rPr>
-              <a:t>Teacher's Note</a:t>
-            </a:r>
-            <a:endParaRPr lang="en-US" sz="3600" dirty="0"/>
-          </a:p>
-        </p:txBody>
-      </p:sp>
-      <p:sp>
-        <p:nvSpPr>
-          <p:cNvPr id="5" name="Text 2"/>
-          <p:cNvSpPr/>
-          <p:nvPr/>
-        </p:nvSpPr>
-        <p:spPr>
-          <a:xfrm>
-            <a:off x="4069080" y="1783080"/>
-            <a:ext cx="7802575" cy="4663440"/>
-          </a:xfrm>
-          <a:prstGeom prst="rect">
-            <a:avLst/>
-          </a:prstGeom>
-          <a:noFill/>
-          <a:ln/>
-        </p:spPr>
-        <p:txBody>
-          <a:bodyPr wrap="square" lIns="0" tIns="0" rIns="0" bIns="0" rtlCol="0" anchor="t"/>
-          <a:lstStyle/>
-          <a:p>
-            <a:pPr algn="l" marL="342900" indent="-342900">
-              <a:spcAft>
-                <a:spcPts val="800"/>
-              </a:spcAft>
-              <a:buSzPct val="100000"/>
-              <a:buChar char="•"/>
-            </a:pPr>
-            <a:r>
-              <a:rPr lang="en-US" sz="2000" dirty="0">
-                <a:solidFill>
-                  <a:srgbClr val="111111"/>
-                </a:solidFill>
-                <a:latin typeface="Calibri" pitchFamily="34" charset="0"/>
-                <a:ea typeface="Calibri" pitchFamily="34" charset="-122"/>
-                <a:cs typeface="Calibri" pitchFamily="34" charset="-120"/>
-              </a:rPr>
-              <a:t>Timing: Homework correction, plan, objectives 8 min | Recall, situation, action 10 min | 5 activities 30 min | Board summary (copying) 30 min | Evaluation, remediation 10 min | Homework, next lesson 5 min | Logbook 7 min</a:t>
-            </a:r>
-            <a:endParaRPr lang="en-US" sz="2000" dirty="0"/>
-          </a:p>
-          <a:p>
-            <a:pPr algn="l" marL="342900" indent="-342900">
-              <a:spcAft>
-                <a:spcPts val="800"/>
-              </a:spcAft>
-              <a:buSzPct val="100000"/>
-              <a:buChar char="•"/>
-            </a:pPr>
-            <a:r>
-              <a:rPr lang="en-US" sz="2000" dirty="0">
-                <a:solidFill>
-                  <a:srgbClr val="111111"/>
-                </a:solidFill>
-                <a:latin typeface="Calibri" pitchFamily="34" charset="0"/>
-                <a:ea typeface="Calibri" pitchFamily="34" charset="-122"/>
-                <a:cs typeface="Calibri" pitchFamily="34" charset="-120"/>
-              </a:rPr>
-              <a:t>Without the projector (Activity 1): use the atlas.</a:t>
-            </a:r>
-            <a:endParaRPr lang="en-US" sz="2000" dirty="0"/>
-          </a:p>
-          <a:p>
-            <a:pPr algn="l" marL="342900" indent="-342900">
-              <a:spcAft>
-                <a:spcPts val="800"/>
-              </a:spcAft>
-              <a:buSzPct val="100000"/>
-              <a:buChar char="•"/>
-            </a:pPr>
-            <a:r>
-              <a:rPr lang="en-US" sz="2000" dirty="0">
-                <a:solidFill>
-                  <a:srgbClr val="111111"/>
-                </a:solidFill>
-                <a:latin typeface="Calibri" pitchFamily="34" charset="0"/>
-                <a:ea typeface="Calibri" pitchFamily="34" charset="-122"/>
-                <a:cs typeface="Calibri" pitchFamily="34" charset="-120"/>
-              </a:rPr>
-              <a:t>Without the projector (Activity 2): compare with Garoua.</a:t>
-            </a:r>
-            <a:endParaRPr lang="en-US" sz="2000" dirty="0"/>
-          </a:p>
-          <a:p>
-            <a:pPr algn="l" marL="342900" indent="-342900">
-              <a:spcAft>
-                <a:spcPts val="800"/>
-              </a:spcAft>
-              <a:buSzPct val="100000"/>
-              <a:buChar char="•"/>
-            </a:pPr>
-            <a:r>
-              <a:rPr lang="en-US" sz="2000" dirty="0">
-                <a:solidFill>
-                  <a:srgbClr val="111111"/>
-                </a:solidFill>
-                <a:latin typeface="Calibri" pitchFamily="34" charset="0"/>
-                <a:ea typeface="Calibri" pitchFamily="34" charset="-122"/>
-                <a:cs typeface="Calibri" pitchFamily="34" charset="-120"/>
-              </a:rPr>
-              <a:t>Without the projector (Activity 3): list desert resources.</a:t>
-            </a:r>
-            <a:endParaRPr lang="en-US" sz="2000" dirty="0"/>
-          </a:p>
-          <a:p>
-            <a:pPr algn="l" marL="342900" indent="-342900">
-              <a:spcAft>
-                <a:spcPts val="800"/>
-              </a:spcAft>
-              <a:buSzPct val="100000"/>
-              <a:buChar char="•"/>
-            </a:pPr>
-            <a:r>
-              <a:rPr lang="en-US" sz="2000" dirty="0">
-                <a:solidFill>
-                  <a:srgbClr val="111111"/>
-                </a:solidFill>
-                <a:latin typeface="Calibri" pitchFamily="34" charset="0"/>
-                <a:ea typeface="Calibri" pitchFamily="34" charset="-122"/>
-                <a:cs typeface="Calibri" pitchFamily="34" charset="-120"/>
-              </a:rPr>
-              <a:t>Without the projector (Activity 4): describe nomads of the Far North.</a:t>
-            </a:r>
-            <a:endParaRPr lang="en-US" sz="2000" dirty="0"/>
-          </a:p>
-          <a:p>
-            <a:pPr algn="l" marL="342900" indent="-342900">
-              <a:spcAft>
-                <a:spcPts val="800"/>
-              </a:spcAft>
-              <a:buSzPct val="100000"/>
-              <a:buChar char="•"/>
-            </a:pPr>
-            <a:r>
-              <a:rPr lang="en-US" sz="2000" dirty="0">
-                <a:solidFill>
-                  <a:srgbClr val="111111"/>
-                </a:solidFill>
-                <a:latin typeface="Calibri" pitchFamily="34" charset="0"/>
-                <a:ea typeface="Calibri" pitchFamily="34" charset="-122"/>
-                <a:cs typeface="Calibri" pitchFamily="34" charset="-120"/>
-              </a:rPr>
-              <a:t>Without the projector (Activity 5): discuss water problems.</a:t>
-            </a:r>
-            <a:endParaRPr lang="en-US" sz="2000" dirty="0"/>
-          </a:p>
-        </p:txBody>
-      </p:sp>
-      <p:sp>
-        <p:nvSpPr>
-          <p:cNvPr id="25" name="Slide Number Placeholder 0"/>
-          <p:cNvSpPr>
-            <a:spLocks noGrp="1"/>
-          </p:cNvSpPr>
-          <p:nvPr>
-            <p:ph type="sldNum" sz="quarter" idx="4294967295"/>
-          </p:nvPr>
-        </p:nvSpPr>
-        <p:spPr>
-          <a:xfrm>
-            <a:off x="27432" y="91440"/>
-            <a:ext cx="585216" cy="475488"/>
-          </a:xfrm>
-          <a:prstGeom prst="rect">
-            <a:avLst/>
-          </a:prstGeom>
-          <a:extLst>
-            <a:ext uri="{C572A759-6A51-4108-AA02-DFA0A04FC94B}">
-              <ma14:wrappingTextBoxFlag xmlns:ma14="http://schemas.microsoft.com/office/mac/drawingml/2011/main" val="0"/>
-            </a:ext>
-          </a:extLst>
-        </p:spPr>
-        <p:txBody>
-          <a:bodyPr/>
-          <a:lstStyle>
-            <a:lvl1pPr>
-              <a:defRPr sz="2000">
-                <a:solidFill>
-                  <a:srgbClr val="FFFFFF"/>
-                </a:solidFill>
-                <a:latin typeface="Calibri"/>
-                <a:ea typeface="Calibri"/>
-                <a:cs typeface="Calibri"/>
-              </a:defRPr>
-            </a:lvl1pPr>
-          </a:lstStyle>
-          <a:p>
-            <a:pPr algn="ctr"/>
-            <a:fld id="{F7021451-1387-4CA6-816F-3879F97B5CBC}" type="slidenum">
-              <a:rPr b="1" lang="en-US"/>
-              <a:t>50</a:t>
-            </a:fld>
-            <a:endParaRPr lang="en-US"/>
-          </a:p>
-        </p:txBody>
-      </p:sp>
-    </p:spTree>
-  </p:cSld>
-  <p:clrMapOvr>
-    <a:masterClrMapping/>
-  </p:clrMapOvr>
-</p:sld>
-</file>
-
-<file path=ppt/slides/slide51.xml><?xml version="1.0" encoding="utf-8"?>
-<p:sld xmlns:a="http://schemas.openxmlformats.org/drawingml/2006/main" xmlns:r="http://schemas.openxmlformats.org/officeDocument/2006/relationships" xmlns:p="http://schemas.openxmlformats.org/presentationml/2006/main">
-  <p:cSld name="Slide 51">
-    <p:spTree>
-      <p:nvGrpSpPr>
-        <p:cNvPr id="1" name=""/>
-        <p:cNvGrpSpPr/>
-        <p:nvPr/>
-      </p:nvGrpSpPr>
-      <p:grpSpPr>
-        <a:xfrm>
-          <a:off x="0" y="0"/>
-          <a:ext cx="0" cy="0"/>
-          <a:chOff x="0" y="0"/>
-          <a:chExt cx="0" cy="0"/>
-        </a:xfrm>
-      </p:grpSpPr>
-      <p:sp>
-        <p:nvSpPr>
-          <p:cNvPr id="2" name="Text 0"/>
-          <p:cNvSpPr/>
-          <p:nvPr/>
-        </p:nvSpPr>
-        <p:spPr>
-          <a:xfrm>
-            <a:off x="457200" y="713232"/>
-            <a:ext cx="11368735" cy="274320"/>
-          </a:xfrm>
-          <a:prstGeom prst="rect">
-            <a:avLst/>
-          </a:prstGeom>
-          <a:noFill/>
-          <a:ln/>
-        </p:spPr>
-        <p:txBody>
-          <a:bodyPr wrap="square" lIns="0" tIns="0" rIns="0" bIns="0" rtlCol="0" anchor="ctr"/>
-          <a:lstStyle/>
-          <a:p>
-            <a:pPr algn="r" indent="0" marL="0">
-              <a:buNone/>
-            </a:pPr>
-            <a:r>
-              <a:rPr lang="en-US" sz="1400" b="1" dirty="0">
-                <a:solidFill>
-                  <a:srgbClr val="1C3F6E"/>
-                </a:solidFill>
-                <a:latin typeface="Calibri" pitchFamily="34" charset="0"/>
-                <a:ea typeface="Calibri" pitchFamily="34" charset="-122"/>
-                <a:cs typeface="Calibri" pitchFamily="34" charset="-120"/>
-              </a:rPr>
-              <a:t>REFERENCES</a:t>
-            </a:r>
-            <a:endParaRPr lang="en-US" sz="1400" dirty="0"/>
-          </a:p>
-        </p:txBody>
-      </p:sp>
-      <p:pic>
-        <p:nvPicPr>
-          <p:cNvPr id="3" name="Image 0" descr="/home/claude/f4/img/minesec_sheet.png">    </p:cNvPr>
-          <p:cNvPicPr>
-            <a:picLocks noChangeAspect="1"/>
-          </p:cNvPicPr>
-          <p:nvPr/>
-        </p:nvPicPr>
-        <p:blipFill>
-          <a:blip r:embed="rId1"/>
-          <a:stretch>
-            <a:fillRect/>
-          </a:stretch>
-        </p:blipFill>
-        <p:spPr>
-          <a:xfrm>
-            <a:off x="0" y="658368"/>
-            <a:ext cx="3840480" cy="5833872"/>
-          </a:xfrm>
-          <a:prstGeom prst="rect">
-            <a:avLst/>
-          </a:prstGeom>
-        </p:spPr>
-      </p:pic>
-      <p:sp>
-        <p:nvSpPr>
-          <p:cNvPr id="4" name="Text 1"/>
-          <p:cNvSpPr/>
-          <p:nvPr/>
-        </p:nvSpPr>
-        <p:spPr>
-          <a:xfrm>
-            <a:off x="4069080" y="1005840"/>
-            <a:ext cx="7802575" cy="731520"/>
-          </a:xfrm>
-          <a:prstGeom prst="rect">
-            <a:avLst/>
-          </a:prstGeom>
-          <a:noFill/>
-          <a:ln/>
-        </p:spPr>
-        <p:txBody>
-          <a:bodyPr wrap="square" lIns="0" tIns="0" rIns="0" bIns="0" rtlCol="0" anchor="ctr">
-            <a:normAutofit/>
-          </a:bodyPr>
-          <a:lstStyle/>
-          <a:p>
-            <a:pPr algn="ctr" indent="0" marL="0">
-              <a:buNone/>
-            </a:pPr>
-            <a:r>
-              <a:rPr lang="en-US" sz="3600" b="1" dirty="0">
-                <a:solidFill>
-                  <a:srgbClr val="990011"/>
-                </a:solidFill>
-                <a:latin typeface="Times New Roman" pitchFamily="34" charset="0"/>
-                <a:ea typeface="Times New Roman" pitchFamily="34" charset="-122"/>
-                <a:cs typeface="Times New Roman" pitchFamily="34" charset="-120"/>
-              </a:rPr>
-              <a:t>References</a:t>
-            </a:r>
-            <a:endParaRPr lang="en-US" sz="3600" dirty="0"/>
-          </a:p>
-        </p:txBody>
-      </p:sp>
-      <p:sp>
-        <p:nvSpPr>
-          <p:cNvPr id="5" name="Text 2"/>
-          <p:cNvSpPr/>
-          <p:nvPr/>
-        </p:nvSpPr>
-        <p:spPr>
-          <a:xfrm>
-            <a:off x="4069080" y="1783080"/>
-            <a:ext cx="7802575" cy="4663440"/>
-          </a:xfrm>
-          <a:prstGeom prst="rect">
-            <a:avLst/>
-          </a:prstGeom>
-          <a:noFill/>
-          <a:ln/>
-        </p:spPr>
-        <p:txBody>
-          <a:bodyPr wrap="square" lIns="0" tIns="0" rIns="0" bIns="0" rtlCol="0" anchor="t"/>
-          <a:lstStyle/>
-          <a:p>
-            <a:pPr algn="l" marL="342900" indent="-342900">
-              <a:spcAft>
-                <a:spcPts val="800"/>
-              </a:spcAft>
-              <a:buSzPct val="100000"/>
-              <a:buChar char="•"/>
-            </a:pPr>
-            <a:r>
-              <a:rPr lang="en-US" sz="1800" dirty="0">
-                <a:solidFill>
-                  <a:srgbClr val="111111"/>
-                </a:solidFill>
-                <a:latin typeface="Calibri" pitchFamily="34" charset="0"/>
-                <a:ea typeface="Calibri" pitchFamily="34" charset="-122"/>
-                <a:cs typeface="Calibri" pitchFamily="34" charset="-120"/>
-              </a:rPr>
-              <a:t>Geography Syllabus, Forms I–V, MINESEC (2023) — Form 2, Module 1: Man in his Environment.</a:t>
-            </a:r>
-            <a:endParaRPr lang="en-US" sz="1800" dirty="0"/>
-          </a:p>
-          <a:p>
-            <a:pPr algn="l" marL="342900" indent="-342900">
-              <a:spcAft>
-                <a:spcPts val="800"/>
-              </a:spcAft>
-              <a:buSzPct val="100000"/>
-              <a:buChar char="•"/>
-            </a:pPr>
-            <a:r>
-              <a:rPr lang="en-US" sz="1800" dirty="0">
-                <a:solidFill>
-                  <a:srgbClr val="111111"/>
-                </a:solidFill>
-                <a:latin typeface="Calibri" pitchFamily="34" charset="0"/>
-                <a:ea typeface="Calibri" pitchFamily="34" charset="-122"/>
-                <a:cs typeface="Calibri" pitchFamily="34" charset="-120"/>
-              </a:rPr>
-              <a:t>Photo, Activity 2: “Desert trekking in Merzouga” by Antonio Cinotti , CC BY-NC-ND 2.0, via Flickr (https://www.flickr.com/photos/46378751@N02/15331399979)</a:t>
-            </a:r>
-            <a:endParaRPr lang="en-US" sz="1800" dirty="0"/>
-          </a:p>
-          <a:p>
-            <a:pPr algn="l" marL="342900" indent="-342900">
-              <a:spcAft>
-                <a:spcPts val="800"/>
-              </a:spcAft>
-              <a:buSzPct val="100000"/>
-              <a:buChar char="•"/>
-            </a:pPr>
-            <a:r>
-              <a:rPr lang="en-US" sz="1800" dirty="0">
-                <a:solidFill>
-                  <a:srgbClr val="111111"/>
-                </a:solidFill>
-                <a:latin typeface="Calibri" pitchFamily="34" charset="0"/>
-                <a:ea typeface="Calibri" pitchFamily="34" charset="-122"/>
-                <a:cs typeface="Calibri" pitchFamily="34" charset="-120"/>
-              </a:rPr>
-              <a:t>Photo, Activity 3: “49 Palms Oasis; Twentynine Palms, CA” by Joshua Tree National Park, Public domain 1.0, via Flickr (https://www.flickr.com/photos/115357548@N08/12525367563)</a:t>
-            </a:r>
-            <a:endParaRPr lang="en-US" sz="1800" dirty="0"/>
-          </a:p>
-          <a:p>
-            <a:pPr algn="l" marL="342900" indent="-342900">
-              <a:spcAft>
-                <a:spcPts val="800"/>
-              </a:spcAft>
-              <a:buSzPct val="100000"/>
-              <a:buChar char="•"/>
-            </a:pPr>
-            <a:r>
-              <a:rPr lang="en-US" sz="1800" dirty="0">
-                <a:solidFill>
-                  <a:srgbClr val="111111"/>
-                </a:solidFill>
-                <a:latin typeface="Calibri" pitchFamily="34" charset="0"/>
-                <a:ea typeface="Calibri" pitchFamily="34" charset="-122"/>
-                <a:cs typeface="Calibri" pitchFamily="34" charset="-120"/>
-              </a:rPr>
-              <a:t>Photo, Activity 4: “Merzouga desert, Morocco” by Mycroyance, CC BY-ND 2.0, via Flickr (https://www.flickr.com/photos/91155980@N07/13157027505)</a:t>
-            </a:r>
-            <a:endParaRPr lang="en-US" sz="1800" dirty="0"/>
-          </a:p>
-          <a:p>
-            <a:pPr algn="l" marL="342900" indent="-342900">
-              <a:spcAft>
-                <a:spcPts val="800"/>
-              </a:spcAft>
-              <a:buSzPct val="100000"/>
-              <a:buChar char="•"/>
-            </a:pPr>
-            <a:r>
-              <a:rPr lang="en-US" sz="1800" dirty="0">
-                <a:solidFill>
-                  <a:srgbClr val="111111"/>
-                </a:solidFill>
-                <a:latin typeface="Calibri" pitchFamily="34" charset="0"/>
-                <a:ea typeface="Calibri" pitchFamily="34" charset="-122"/>
-                <a:cs typeface="Calibri" pitchFamily="34" charset="-120"/>
-              </a:rPr>
-              <a:t>Photo, Activity 5: “Well in the desert” by Focx Photography, CC BY-SA 2.0, via Flickr (https://www.flickr.com/photos/30780900@N02/4117141154)</a:t>
-            </a:r>
-            <a:endParaRPr lang="en-US" sz="1800" dirty="0"/>
-          </a:p>
-          <a:p>
-            <a:pPr algn="l" marL="342900" indent="-342900">
-              <a:spcAft>
-                <a:spcPts val="800"/>
-              </a:spcAft>
-              <a:buSzPct val="100000"/>
-              <a:buChar char="•"/>
-            </a:pPr>
-            <a:r>
-              <a:rPr lang="en-US" sz="1800" dirty="0">
-                <a:solidFill>
-                  <a:srgbClr val="111111"/>
-                </a:solidFill>
-                <a:latin typeface="Calibri" pitchFamily="34" charset="0"/>
-                <a:ea typeface="Calibri" pitchFamily="34" charset="-122"/>
-                <a:cs typeface="Calibri" pitchFamily="34" charset="-120"/>
-              </a:rPr>
-              <a:t>Diagrams and animations: drawn for this lesson (Geography Department).</a:t>
-            </a:r>
-            <a:endParaRPr lang="en-US" sz="1800" dirty="0"/>
-          </a:p>
-        </p:txBody>
-      </p:sp>
-      <p:sp>
-        <p:nvSpPr>
-          <p:cNvPr id="25" name="Slide Number Placeholder 0"/>
-          <p:cNvSpPr>
-            <a:spLocks noGrp="1"/>
-          </p:cNvSpPr>
-          <p:nvPr>
-            <p:ph type="sldNum" sz="quarter" idx="4294967295"/>
-          </p:nvPr>
-        </p:nvSpPr>
-        <p:spPr>
-          <a:xfrm>
-            <a:off x="27432" y="91440"/>
-            <a:ext cx="585216" cy="475488"/>
-          </a:xfrm>
-          <a:prstGeom prst="rect">
-            <a:avLst/>
-          </a:prstGeom>
-          <a:extLst>
-            <a:ext uri="{C572A759-6A51-4108-AA02-DFA0A04FC94B}">
-              <ma14:wrappingTextBoxFlag xmlns:ma14="http://schemas.microsoft.com/office/mac/drawingml/2011/main" val="0"/>
-            </a:ext>
-          </a:extLst>
-        </p:spPr>
-        <p:txBody>
-          <a:bodyPr/>
-          <a:lstStyle>
-            <a:lvl1pPr>
-              <a:defRPr sz="2000">
-                <a:solidFill>
-                  <a:srgbClr val="FFFFFF"/>
-                </a:solidFill>
-                <a:latin typeface="Calibri"/>
-                <a:ea typeface="Calibri"/>
-                <a:cs typeface="Calibri"/>
-              </a:defRPr>
-            </a:lvl1pPr>
-          </a:lstStyle>
-          <a:p>
-            <a:pPr algn="ctr"/>
-            <a:fld id="{F7021451-1387-4CA6-816F-3879F97B5CBC}" type="slidenum">
-              <a:rPr b="1" lang="en-US"/>
-              <a:t>51</a:t>
+              <a:t>59</a:t>
             </a:fld>
             <a:endParaRPr lang="en-US"/>
           </a:p>
@@ -20491,6 +23552,593 @@
 </p:sld>
 </file>
 
+<file path=ppt/slides/slide60.xml><?xml version="1.0" encoding="utf-8"?>
+<p:sld xmlns:a="http://schemas.openxmlformats.org/drawingml/2006/main" xmlns:r="http://schemas.openxmlformats.org/officeDocument/2006/relationships" xmlns:p="http://schemas.openxmlformats.org/presentationml/2006/main">
+  <p:cSld name="Slide 60">
+    <p:spTree>
+      <p:nvGrpSpPr>
+        <p:cNvPr id="1" name=""/>
+        <p:cNvGrpSpPr/>
+        <p:nvPr/>
+      </p:nvGrpSpPr>
+      <p:grpSpPr>
+        <a:xfrm>
+          <a:off x="0" y="0"/>
+          <a:ext cx="0" cy="0"/>
+          <a:chOff x="0" y="0"/>
+          <a:chExt cx="0" cy="0"/>
+        </a:xfrm>
+      </p:grpSpPr>
+      <p:sp>
+        <p:nvSpPr>
+          <p:cNvPr id="2" name="Text 0"/>
+          <p:cNvSpPr/>
+          <p:nvPr/>
+        </p:nvSpPr>
+        <p:spPr>
+          <a:xfrm>
+            <a:off x="457200" y="713232"/>
+            <a:ext cx="11368735" cy="274320"/>
+          </a:xfrm>
+          <a:prstGeom prst="rect">
+            <a:avLst/>
+          </a:prstGeom>
+          <a:noFill/>
+          <a:ln/>
+        </p:spPr>
+        <p:txBody>
+          <a:bodyPr wrap="square" lIns="0" tIns="0" rIns="0" bIns="0" rtlCol="0" anchor="ctr"/>
+          <a:lstStyle/>
+          <a:p>
+            <a:pPr algn="r" indent="0" marL="0">
+              <a:buNone/>
+            </a:pPr>
+            <a:r>
+              <a:rPr lang="en-US" sz="1400" b="1" dirty="0">
+                <a:solidFill>
+                  <a:srgbClr val="1C3F6E"/>
+                </a:solidFill>
+                <a:latin typeface="Calibri" pitchFamily="34" charset="0"/>
+                <a:ea typeface="Calibri" pitchFamily="34" charset="-122"/>
+                <a:cs typeface="Calibri" pitchFamily="34" charset="-120"/>
+              </a:rPr>
+              <a:t>REFERENCES</a:t>
+            </a:r>
+            <a:endParaRPr lang="en-US" sz="1400" dirty="0"/>
+          </a:p>
+        </p:txBody>
+      </p:sp>
+      <p:pic>
+        <p:nvPicPr>
+          <p:cNvPr id="3" name="Image 0" descr="/home/claude/f4/img/minesec_sheet.png">    </p:cNvPr>
+          <p:cNvPicPr>
+            <a:picLocks noChangeAspect="1"/>
+          </p:cNvPicPr>
+          <p:nvPr/>
+        </p:nvPicPr>
+        <p:blipFill>
+          <a:blip r:embed="rId1"/>
+          <a:stretch>
+            <a:fillRect/>
+          </a:stretch>
+        </p:blipFill>
+        <p:spPr>
+          <a:xfrm>
+            <a:off x="0" y="658368"/>
+            <a:ext cx="1463040" cy="5833872"/>
+          </a:xfrm>
+          <a:prstGeom prst="rect">
+            <a:avLst/>
+          </a:prstGeom>
+        </p:spPr>
+      </p:pic>
+      <p:sp>
+        <p:nvSpPr>
+          <p:cNvPr id="4" name="Text 1"/>
+          <p:cNvSpPr/>
+          <p:nvPr/>
+        </p:nvSpPr>
+        <p:spPr>
+          <a:xfrm>
+            <a:off x="1691640" y="1005840"/>
+            <a:ext cx="10180015" cy="731520"/>
+          </a:xfrm>
+          <a:prstGeom prst="rect">
+            <a:avLst/>
+          </a:prstGeom>
+          <a:noFill/>
+          <a:ln/>
+        </p:spPr>
+        <p:txBody>
+          <a:bodyPr wrap="square" lIns="0" tIns="0" rIns="0" bIns="0" rtlCol="0" anchor="ctr">
+            <a:normAutofit/>
+          </a:bodyPr>
+          <a:lstStyle/>
+          <a:p>
+            <a:pPr algn="ctr" indent="0" marL="0">
+              <a:buNone/>
+            </a:pPr>
+            <a:r>
+              <a:rPr lang="en-US" sz="3600" b="1" dirty="0">
+                <a:solidFill>
+                  <a:srgbClr val="990011"/>
+                </a:solidFill>
+                <a:latin typeface="Times New Roman" pitchFamily="34" charset="0"/>
+                <a:ea typeface="Times New Roman" pitchFamily="34" charset="-122"/>
+                <a:cs typeface="Times New Roman" pitchFamily="34" charset="-120"/>
+              </a:rPr>
+              <a:t>References</a:t>
+            </a:r>
+            <a:endParaRPr lang="en-US" sz="3600" dirty="0"/>
+          </a:p>
+        </p:txBody>
+      </p:sp>
+      <p:sp>
+        <p:nvSpPr>
+          <p:cNvPr id="5" name="Text 2"/>
+          <p:cNvSpPr/>
+          <p:nvPr/>
+        </p:nvSpPr>
+        <p:spPr>
+          <a:xfrm>
+            <a:off x="1691640" y="1783080"/>
+            <a:ext cx="10180015" cy="4663440"/>
+          </a:xfrm>
+          <a:prstGeom prst="rect">
+            <a:avLst/>
+          </a:prstGeom>
+          <a:noFill/>
+          <a:ln/>
+        </p:spPr>
+        <p:txBody>
+          <a:bodyPr wrap="square" lIns="0" tIns="0" rIns="0" bIns="0" rtlCol="0" anchor="t"/>
+          <a:lstStyle/>
+          <a:p>
+            <a:pPr algn="l" marL="342900" indent="-342900">
+              <a:spcAft>
+                <a:spcPts val="800"/>
+              </a:spcAft>
+              <a:buSzPct val="100000"/>
+              <a:buChar char="•"/>
+            </a:pPr>
+            <a:r>
+              <a:rPr lang="en-US" sz="1800" dirty="0">
+                <a:solidFill>
+                  <a:srgbClr val="111111"/>
+                </a:solidFill>
+                <a:latin typeface="Calibri" pitchFamily="34" charset="0"/>
+                <a:ea typeface="Calibri" pitchFamily="34" charset="-122"/>
+                <a:cs typeface="Calibri" pitchFamily="34" charset="-120"/>
+              </a:rPr>
+              <a:t>Geography Syllabus, Forms I–V, MINESEC (2023) — Form 2, Module 1: Man in his Environment.</a:t>
+            </a:r>
+            <a:endParaRPr lang="en-US" sz="1800" dirty="0"/>
+          </a:p>
+          <a:p>
+            <a:pPr algn="l" marL="342900" indent="-342900">
+              <a:spcAft>
+                <a:spcPts val="800"/>
+              </a:spcAft>
+              <a:buSzPct val="100000"/>
+              <a:buChar char="•"/>
+            </a:pPr>
+            <a:r>
+              <a:rPr lang="en-US" sz="1800" dirty="0">
+                <a:solidFill>
+                  <a:srgbClr val="111111"/>
+                </a:solidFill>
+                <a:latin typeface="Calibri" pitchFamily="34" charset="0"/>
+                <a:ea typeface="Calibri" pitchFamily="34" charset="-122"/>
+                <a:cs typeface="Calibri" pitchFamily="34" charset="-120"/>
+              </a:rPr>
+              <a:t>Photo, Activity 2: “Desert trekking in Merzouga” by Antonio Cinotti , CC BY-NC-ND 2.0, via Flickr (https://www.flickr.com/photos/46378751@N02/15331399979)</a:t>
+            </a:r>
+            <a:endParaRPr lang="en-US" sz="1800" dirty="0"/>
+          </a:p>
+          <a:p>
+            <a:pPr algn="l" marL="342900" indent="-342900">
+              <a:spcAft>
+                <a:spcPts val="800"/>
+              </a:spcAft>
+              <a:buSzPct val="100000"/>
+              <a:buChar char="•"/>
+            </a:pPr>
+            <a:r>
+              <a:rPr lang="en-US" sz="1800" dirty="0">
+                <a:solidFill>
+                  <a:srgbClr val="111111"/>
+                </a:solidFill>
+                <a:latin typeface="Calibri" pitchFamily="34" charset="0"/>
+                <a:ea typeface="Calibri" pitchFamily="34" charset="-122"/>
+                <a:cs typeface="Calibri" pitchFamily="34" charset="-120"/>
+              </a:rPr>
+              <a:t>Photo, Activity 3: “49 Palms Oasis; Twentynine Palms, CA” by Joshua Tree National Park, Public domain 1.0, via Flickr (https://www.flickr.com/photos/115357548@N08/12525367563)</a:t>
+            </a:r>
+            <a:endParaRPr lang="en-US" sz="1800" dirty="0"/>
+          </a:p>
+          <a:p>
+            <a:pPr algn="l" marL="342900" indent="-342900">
+              <a:spcAft>
+                <a:spcPts val="800"/>
+              </a:spcAft>
+              <a:buSzPct val="100000"/>
+              <a:buChar char="•"/>
+            </a:pPr>
+            <a:r>
+              <a:rPr lang="en-US" sz="1800" dirty="0">
+                <a:solidFill>
+                  <a:srgbClr val="111111"/>
+                </a:solidFill>
+                <a:latin typeface="Calibri" pitchFamily="34" charset="0"/>
+                <a:ea typeface="Calibri" pitchFamily="34" charset="-122"/>
+                <a:cs typeface="Calibri" pitchFamily="34" charset="-120"/>
+              </a:rPr>
+              <a:t>Photo, Activity 4: “Merzouga desert, Morocco” by Mycroyance, CC BY-ND 2.0, via Flickr (https://www.flickr.com/photos/91155980@N07/13157027505)</a:t>
+            </a:r>
+            <a:endParaRPr lang="en-US" sz="1800" dirty="0"/>
+          </a:p>
+          <a:p>
+            <a:pPr algn="l" marL="342900" indent="-342900">
+              <a:spcAft>
+                <a:spcPts val="800"/>
+              </a:spcAft>
+              <a:buSzPct val="100000"/>
+              <a:buChar char="•"/>
+            </a:pPr>
+            <a:r>
+              <a:rPr lang="en-US" sz="1800" dirty="0">
+                <a:solidFill>
+                  <a:srgbClr val="111111"/>
+                </a:solidFill>
+                <a:latin typeface="Calibri" pitchFamily="34" charset="0"/>
+                <a:ea typeface="Calibri" pitchFamily="34" charset="-122"/>
+                <a:cs typeface="Calibri" pitchFamily="34" charset="-120"/>
+              </a:rPr>
+              <a:t>Photo, Activity 5: “Sandstorm at Camp Bastion, Afghanistan” by Defence Images, CC BY-NC 2.0, via Flickr (https://www.flickr.com/photos/48399297@N04/10343833885)</a:t>
+            </a:r>
+            <a:endParaRPr lang="en-US" sz="1800" dirty="0"/>
+          </a:p>
+          <a:p>
+            <a:pPr algn="l" marL="342900" indent="-342900">
+              <a:spcAft>
+                <a:spcPts val="800"/>
+              </a:spcAft>
+              <a:buSzPct val="100000"/>
+              <a:buChar char="•"/>
+            </a:pPr>
+            <a:r>
+              <a:rPr lang="en-US" sz="1800" dirty="0">
+                <a:solidFill>
+                  <a:srgbClr val="111111"/>
+                </a:solidFill>
+                <a:latin typeface="Calibri" pitchFamily="34" charset="0"/>
+                <a:ea typeface="Calibri" pitchFamily="34" charset="-122"/>
+                <a:cs typeface="Calibri" pitchFamily="34" charset="-120"/>
+              </a:rPr>
+              <a:t>Photo, board summary (Traditional irrigation): “A Shadoof” by 10b travelling / Carsten ten Brink, CC BY-NC-ND 2.0, via Flickr (https://www.flickr.com/photos/77334245@N00/5908489998)</a:t>
+            </a:r>
+            <a:endParaRPr lang="en-US" sz="1800" dirty="0"/>
+          </a:p>
+          <a:p>
+            <a:pPr algn="l" marL="342900" indent="-342900">
+              <a:spcAft>
+                <a:spcPts val="800"/>
+              </a:spcAft>
+              <a:buSzPct val="100000"/>
+              <a:buChar char="•"/>
+            </a:pPr>
+            <a:r>
+              <a:rPr lang="en-US" sz="1800" dirty="0">
+                <a:solidFill>
+                  <a:srgbClr val="111111"/>
+                </a:solidFill>
+                <a:latin typeface="Calibri" pitchFamily="34" charset="0"/>
+                <a:ea typeface="Calibri" pitchFamily="34" charset="-122"/>
+                <a:cs typeface="Calibri" pitchFamily="34" charset="-120"/>
+              </a:rPr>
+              <a:t>Photo, board summary (Lack of water): “Well in the desert” by Focx Photography, CC BY-SA 2.0, via Flickr (https://www.flickr.com/photos/30780900@N02/4117141154)</a:t>
+            </a:r>
+            <a:endParaRPr lang="en-US" sz="1800" dirty="0"/>
+          </a:p>
+        </p:txBody>
+      </p:sp>
+      <p:sp>
+        <p:nvSpPr>
+          <p:cNvPr id="25" name="Slide Number Placeholder 0"/>
+          <p:cNvSpPr>
+            <a:spLocks noGrp="1"/>
+          </p:cNvSpPr>
+          <p:nvPr>
+            <p:ph type="sldNum" sz="quarter" idx="4294967295"/>
+          </p:nvPr>
+        </p:nvSpPr>
+        <p:spPr>
+          <a:xfrm>
+            <a:off x="27432" y="91440"/>
+            <a:ext cx="585216" cy="475488"/>
+          </a:xfrm>
+          <a:prstGeom prst="rect">
+            <a:avLst/>
+          </a:prstGeom>
+          <a:extLst>
+            <a:ext uri="{C572A759-6A51-4108-AA02-DFA0A04FC94B}">
+              <ma14:wrappingTextBoxFlag xmlns:ma14="http://schemas.microsoft.com/office/mac/drawingml/2011/main" val="0"/>
+            </a:ext>
+          </a:extLst>
+        </p:spPr>
+        <p:txBody>
+          <a:bodyPr/>
+          <a:lstStyle>
+            <a:lvl1pPr>
+              <a:defRPr sz="2000">
+                <a:solidFill>
+                  <a:srgbClr val="FFFFFF"/>
+                </a:solidFill>
+                <a:latin typeface="Calibri"/>
+                <a:ea typeface="Calibri"/>
+                <a:cs typeface="Calibri"/>
+              </a:defRPr>
+            </a:lvl1pPr>
+          </a:lstStyle>
+          <a:p>
+            <a:pPr algn="ctr"/>
+            <a:fld id="{F7021451-1387-4CA6-816F-3879F97B5CBC}" type="slidenum">
+              <a:rPr b="1" lang="en-US"/>
+              <a:t>60</a:t>
+            </a:fld>
+            <a:endParaRPr lang="en-US"/>
+          </a:p>
+        </p:txBody>
+      </p:sp>
+    </p:spTree>
+  </p:cSld>
+  <p:clrMapOvr>
+    <a:masterClrMapping/>
+  </p:clrMapOvr>
+</p:sld>
+</file>
+
+<file path=ppt/slides/slide61.xml><?xml version="1.0" encoding="utf-8"?>
+<p:sld xmlns:a="http://schemas.openxmlformats.org/drawingml/2006/main" xmlns:r="http://schemas.openxmlformats.org/officeDocument/2006/relationships" xmlns:p="http://schemas.openxmlformats.org/presentationml/2006/main">
+  <p:cSld name="Slide 61">
+    <p:spTree>
+      <p:nvGrpSpPr>
+        <p:cNvPr id="1" name=""/>
+        <p:cNvGrpSpPr/>
+        <p:nvPr/>
+      </p:nvGrpSpPr>
+      <p:grpSpPr>
+        <a:xfrm>
+          <a:off x="0" y="0"/>
+          <a:ext cx="0" cy="0"/>
+          <a:chOff x="0" y="0"/>
+          <a:chExt cx="0" cy="0"/>
+        </a:xfrm>
+      </p:grpSpPr>
+      <p:sp>
+        <p:nvSpPr>
+          <p:cNvPr id="2" name="Text 0"/>
+          <p:cNvSpPr/>
+          <p:nvPr/>
+        </p:nvSpPr>
+        <p:spPr>
+          <a:xfrm>
+            <a:off x="457200" y="713232"/>
+            <a:ext cx="11368735" cy="274320"/>
+          </a:xfrm>
+          <a:prstGeom prst="rect">
+            <a:avLst/>
+          </a:prstGeom>
+          <a:noFill/>
+          <a:ln/>
+        </p:spPr>
+        <p:txBody>
+          <a:bodyPr wrap="square" lIns="0" tIns="0" rIns="0" bIns="0" rtlCol="0" anchor="ctr"/>
+          <a:lstStyle/>
+          <a:p>
+            <a:pPr algn="r" indent="0" marL="0">
+              <a:buNone/>
+            </a:pPr>
+            <a:r>
+              <a:rPr lang="en-US" sz="1400" b="1" dirty="0">
+                <a:solidFill>
+                  <a:srgbClr val="1C3F6E"/>
+                </a:solidFill>
+                <a:latin typeface="Calibri" pitchFamily="34" charset="0"/>
+                <a:ea typeface="Calibri" pitchFamily="34" charset="-122"/>
+                <a:cs typeface="Calibri" pitchFamily="34" charset="-120"/>
+              </a:rPr>
+              <a:t>REFERENCES</a:t>
+            </a:r>
+            <a:endParaRPr lang="en-US" sz="1400" dirty="0"/>
+          </a:p>
+        </p:txBody>
+      </p:sp>
+      <p:pic>
+        <p:nvPicPr>
+          <p:cNvPr id="3" name="Image 0" descr="/home/claude/f4/img/minesec_sheet.png">    </p:cNvPr>
+          <p:cNvPicPr>
+            <a:picLocks noChangeAspect="1"/>
+          </p:cNvPicPr>
+          <p:nvPr/>
+        </p:nvPicPr>
+        <p:blipFill>
+          <a:blip r:embed="rId1"/>
+          <a:stretch>
+            <a:fillRect/>
+          </a:stretch>
+        </p:blipFill>
+        <p:spPr>
+          <a:xfrm>
+            <a:off x="0" y="658368"/>
+            <a:ext cx="5120640" cy="5833872"/>
+          </a:xfrm>
+          <a:prstGeom prst="rect">
+            <a:avLst/>
+          </a:prstGeom>
+        </p:spPr>
+      </p:pic>
+      <p:sp>
+        <p:nvSpPr>
+          <p:cNvPr id="4" name="Text 1"/>
+          <p:cNvSpPr/>
+          <p:nvPr/>
+        </p:nvSpPr>
+        <p:spPr>
+          <a:xfrm>
+            <a:off x="5349240" y="1005840"/>
+            <a:ext cx="6522415" cy="731520"/>
+          </a:xfrm>
+          <a:prstGeom prst="rect">
+            <a:avLst/>
+          </a:prstGeom>
+          <a:noFill/>
+          <a:ln/>
+        </p:spPr>
+        <p:txBody>
+          <a:bodyPr wrap="square" lIns="0" tIns="0" rIns="0" bIns="0" rtlCol="0" anchor="ctr">
+            <a:normAutofit/>
+          </a:bodyPr>
+          <a:lstStyle/>
+          <a:p>
+            <a:pPr algn="ctr" indent="0" marL="0">
+              <a:buNone/>
+            </a:pPr>
+            <a:r>
+              <a:rPr lang="en-US" sz="3600" b="1" dirty="0">
+                <a:solidFill>
+                  <a:srgbClr val="990011"/>
+                </a:solidFill>
+                <a:latin typeface="Times New Roman" pitchFamily="34" charset="0"/>
+                <a:ea typeface="Times New Roman" pitchFamily="34" charset="-122"/>
+                <a:cs typeface="Times New Roman" pitchFamily="34" charset="-120"/>
+              </a:rPr>
+              <a:t>References (continued)</a:t>
+            </a:r>
+            <a:endParaRPr lang="en-US" sz="3600" dirty="0"/>
+          </a:p>
+        </p:txBody>
+      </p:sp>
+      <p:sp>
+        <p:nvSpPr>
+          <p:cNvPr id="5" name="Text 2"/>
+          <p:cNvSpPr/>
+          <p:nvPr/>
+        </p:nvSpPr>
+        <p:spPr>
+          <a:xfrm>
+            <a:off x="5349240" y="1783080"/>
+            <a:ext cx="6522415" cy="4663440"/>
+          </a:xfrm>
+          <a:prstGeom prst="rect">
+            <a:avLst/>
+          </a:prstGeom>
+          <a:noFill/>
+          <a:ln/>
+        </p:spPr>
+        <p:txBody>
+          <a:bodyPr wrap="square" lIns="0" tIns="0" rIns="0" bIns="0" rtlCol="0" anchor="t"/>
+          <a:lstStyle/>
+          <a:p>
+            <a:pPr algn="l" marL="342900" indent="-342900">
+              <a:spcAft>
+                <a:spcPts val="800"/>
+              </a:spcAft>
+              <a:buSzPct val="100000"/>
+              <a:buChar char="•"/>
+            </a:pPr>
+            <a:r>
+              <a:rPr lang="en-US" sz="1800" dirty="0">
+                <a:solidFill>
+                  <a:srgbClr val="111111"/>
+                </a:solidFill>
+                <a:latin typeface="Calibri" pitchFamily="34" charset="0"/>
+                <a:ea typeface="Calibri" pitchFamily="34" charset="-122"/>
+                <a:cs typeface="Calibri" pitchFamily="34" charset="-120"/>
+              </a:rPr>
+              <a:t>Photo, board summary (Modern irrigation): “Mid-West Agriculture” by Djof, CC BY-NC-SA 2.0, via Flickr (https://www.flickr.com/photos/10787942@N00/147222315)</a:t>
+            </a:r>
+            <a:endParaRPr lang="en-US" sz="1800" dirty="0"/>
+          </a:p>
+          <a:p>
+            <a:pPr algn="l" marL="342900" indent="-342900">
+              <a:spcAft>
+                <a:spcPts val="800"/>
+              </a:spcAft>
+              <a:buSzPct val="100000"/>
+              <a:buChar char="•"/>
+            </a:pPr>
+            <a:r>
+              <a:rPr lang="en-US" sz="1800" dirty="0">
+                <a:solidFill>
+                  <a:srgbClr val="111111"/>
+                </a:solidFill>
+                <a:latin typeface="Calibri" pitchFamily="34" charset="0"/>
+                <a:ea typeface="Calibri" pitchFamily="34" charset="-122"/>
+                <a:cs typeface="Calibri" pitchFamily="34" charset="-120"/>
+              </a:rPr>
+              <a:t>Diagrams and animations: drawn for this lesson (Geography Department).</a:t>
+            </a:r>
+            <a:endParaRPr lang="en-US" sz="1800" dirty="0"/>
+          </a:p>
+        </p:txBody>
+      </p:sp>
+      <p:sp>
+        <p:nvSpPr>
+          <p:cNvPr id="25" name="Slide Number Placeholder 0"/>
+          <p:cNvSpPr>
+            <a:spLocks noGrp="1"/>
+          </p:cNvSpPr>
+          <p:nvPr>
+            <p:ph type="sldNum" sz="quarter" idx="4294967295"/>
+          </p:nvPr>
+        </p:nvSpPr>
+        <p:spPr>
+          <a:xfrm>
+            <a:off x="27432" y="91440"/>
+            <a:ext cx="585216" cy="475488"/>
+          </a:xfrm>
+          <a:prstGeom prst="rect">
+            <a:avLst/>
+          </a:prstGeom>
+          <a:extLst>
+            <a:ext uri="{C572A759-6A51-4108-AA02-DFA0A04FC94B}">
+              <ma14:wrappingTextBoxFlag xmlns:ma14="http://schemas.microsoft.com/office/mac/drawingml/2011/main" val="0"/>
+            </a:ext>
+          </a:extLst>
+        </p:spPr>
+        <p:txBody>
+          <a:bodyPr/>
+          <a:lstStyle>
+            <a:lvl1pPr>
+              <a:defRPr sz="2000">
+                <a:solidFill>
+                  <a:srgbClr val="FFFFFF"/>
+                </a:solidFill>
+                <a:latin typeface="Calibri"/>
+                <a:ea typeface="Calibri"/>
+                <a:cs typeface="Calibri"/>
+              </a:defRPr>
+            </a:lvl1pPr>
+          </a:lstStyle>
+          <a:p>
+            <a:pPr algn="ctr"/>
+            <a:fld id="{F7021451-1387-4CA6-816F-3879F97B5CBC}" type="slidenum">
+              <a:rPr b="1" lang="en-US"/>
+              <a:t>61</a:t>
+            </a:fld>
+            <a:endParaRPr lang="en-US"/>
+          </a:p>
+        </p:txBody>
+      </p:sp>
+    </p:spTree>
+  </p:cSld>
+  <p:clrMapOvr>
+    <a:masterClrMapping/>
+  </p:clrMapOvr>
+</p:sld>
+</file>
+
 <file path=ppt/slides/slide7.xml><?xml version="1.0" encoding="utf-8"?>
 <p:sld xmlns:a="http://schemas.openxmlformats.org/drawingml/2006/main" xmlns:r="http://schemas.openxmlformats.org/officeDocument/2006/relationships" xmlns:p="http://schemas.openxmlformats.org/presentationml/2006/main">
   <p:cSld name="Slide 7">
@@ -20670,7 +24318,7 @@
                 <a:ea typeface="Times New Roman" pitchFamily="34" charset="-122"/>
                 <a:cs typeface="Times New Roman" pitchFamily="34" charset="-120"/>
               </a:rPr>
-              <a:t>Locate the hot deserts and describe their climate.</a:t>
+              <a:t>Locate the hot deserts and describe their climate and resources.</a:t>
             </a:r>
             <a:endParaRPr lang="en-US" sz="4000" dirty="0"/>
           </a:p>
@@ -20692,7 +24340,7 @@
                 <a:ea typeface="Times New Roman" pitchFamily="34" charset="-122"/>
                 <a:cs typeface="Times New Roman" pitchFamily="34" charset="-120"/>
               </a:rPr>
-              <a:t>Describe their resources and traditional methods of exploitation.</a:t>
+              <a:t>Describe the traditional methods of exploitation.</a:t>
             </a:r>
             <a:endParaRPr lang="en-US" sz="4000" dirty="0"/>
           </a:p>

--- a/lecons/F2/11_F2_M1_L05_Man_in_the_Hot_Desert_Milieu.pptx
+++ b/lecons/F2/11_F2_M1_L05_Man_in_the_Hot_Desert_Milieu.pptx
@@ -14133,7 +14133,7 @@
               <a:buNone/>
             </a:pPr>
             <a:r>
-              <a:rPr lang="en-US" sz="4000" b="1" dirty="0">
+              <a:rPr lang="en-US" sz="3200" b="1" dirty="0">
                 <a:solidFill>
                   <a:srgbClr val="111111"/>
                 </a:solidFill>
@@ -14143,7 +14143,7 @@
               </a:rPr>
               <a:t>Topic: Man in his Environment</a:t>
             </a:r>
-            <a:endParaRPr lang="en-US" sz="4000" dirty="0"/>
+            <a:endParaRPr lang="en-US" sz="3200" dirty="0"/>
           </a:p>
           <a:p>
             <a:pPr algn="l" indent="0" marL="0">
@@ -14153,7 +14153,7 @@
               <a:buNone/>
             </a:pPr>
             <a:r>
-              <a:rPr lang="en-US" sz="4000" b="1" dirty="0">
+              <a:rPr lang="en-US" sz="3200" b="1" dirty="0">
                 <a:solidFill>
                   <a:srgbClr val="111111"/>
                 </a:solidFill>
@@ -14163,7 +14163,7 @@
               </a:rPr>
               <a:t>Sub-topic: Exploitation of Resources in the Natural Environment</a:t>
             </a:r>
-            <a:endParaRPr lang="en-US" sz="4000" dirty="0"/>
+            <a:endParaRPr lang="en-US" sz="3200" dirty="0"/>
           </a:p>
           <a:p>
             <a:pPr algn="l" indent="0" marL="0">
@@ -14173,7 +14173,7 @@
               <a:buNone/>
             </a:pPr>
             <a:r>
-              <a:rPr lang="en-US" sz="4000" b="1" dirty="0">
+              <a:rPr lang="en-US" sz="3200" b="1" dirty="0">
                 <a:solidFill>
                   <a:srgbClr val="990011"/>
                 </a:solidFill>
@@ -14183,7 +14183,7 @@
               </a:rPr>
               <a:t>Lesson 5: Man in the Hot Desert Milieu</a:t>
             </a:r>
-            <a:endParaRPr lang="en-US" sz="4000" dirty="0"/>
+            <a:endParaRPr lang="en-US" sz="3200" dirty="0"/>
           </a:p>
         </p:txBody>
       </p:sp>

--- a/lecons/F2/11_F2_M1_L05_Man_in_the_Hot_Desert_Milieu.pptx
+++ b/lecons/F2/11_F2_M1_L05_Man_in_the_Hot_Desert_Milieu.pptx
@@ -3466,7 +3466,7 @@
           <a:p>
             <a:r>
               <a:rPr lang="en-US" dirty="0"/>
-              <a:t>Before we start the new lesson, let us correct the homework I gave you at the end of Practical Work 3: Identification of the Biological Resources of Cameroon. The question was: List three plants and three animals of your region and one use of each. Take out your exercise books.</a:t>
+              <a:t>Before we start the new lesson, let us correct the homework I gave you at the end of Practical Work 3: Identification of the Biological Resources of Cameroon. The question was: Name the largest hot desert of Africa. Take out your exercise books.</a:t>
             </a:r>
             <a:endParaRPr lang="en-US" dirty="0"/>
           </a:p>
@@ -4434,7 +4434,7 @@
           <a:p>
             <a:r>
               <a:rPr lang="en-US" dirty="0"/>
-              <a:t>Here is a good answer. Plants: shea tree (butter), baobab (leaves), acacia (gum). Animals: cattle (meat, milk), goats (meat), bees (honey). Compare it with your own answer and correct your work in red.</a:t>
+              <a:t>Here is a good answer. The Sahara. Compare it with your own answer and correct your work in red.</a:t>
             </a:r>
             <a:endParaRPr lang="en-US" dirty="0"/>
           </a:p>
@@ -4874,7 +4874,7 @@
           <a:p>
             <a:r>
               <a:rPr lang="en-US" dirty="0"/>
-              <a:t>For your homework: Write three ways people in the Far North of Cameroon save water. We shall correct it at the beginning of our next lesson.</a:t>
+              <a:t>For your homework: Give two causes of water scarcity. We shall correct it at the beginning of our next lesson.</a:t>
             </a:r>
             <a:endParaRPr lang="en-US" dirty="0"/>
           </a:p>
@@ -15755,7 +15755,7 @@
                 <a:ea typeface="Times New Roman" pitchFamily="34" charset="-122"/>
                 <a:cs typeface="Times New Roman" pitchFamily="34" charset="-120"/>
               </a:rPr>
-              <a:t>List three plants and three animals of your region and one use of each.</a:t>
+              <a:t>Name the largest hot desert of Africa.</a:t>
             </a:r>
             <a:endParaRPr lang="en-US" sz="4000" dirty="0"/>
           </a:p>
@@ -18683,7 +18683,7 @@
                 <a:ea typeface="Times New Roman" pitchFamily="34" charset="-122"/>
                 <a:cs typeface="Times New Roman" pitchFamily="34" charset="-120"/>
               </a:rPr>
-              <a:t>Plants: shea tree (butter), baobab (leaves), acacia (gum). Animals: cattle (meat, milk), goats (meat), bees (honey).</a:t>
+              <a:t>The Sahara.</a:t>
             </a:r>
             <a:endParaRPr lang="en-US" sz="4000" dirty="0"/>
           </a:p>
@@ -19844,7 +19844,7 @@
                 <a:ea typeface="Times New Roman" pitchFamily="34" charset="-122"/>
                 <a:cs typeface="Times New Roman" pitchFamily="34" charset="-120"/>
               </a:rPr>
-              <a:t>Write three ways people in the Far North of Cameroon save water.</a:t>
+              <a:t>Give two causes of water scarcity.</a:t>
             </a:r>
             <a:endParaRPr lang="en-US" sz="4000" dirty="0"/>
           </a:p>
@@ -22508,7 +22508,7 @@
                           <a:ea typeface="Calibri" pitchFamily="34" charset="-122"/>
                           <a:cs typeface="Calibri" pitchFamily="34" charset="-120"/>
                         </a:rPr>
-                        <a:t>Write three ways people in the Far North of Cameroon save water.</a:t>
+                        <a:t>Give two causes of water scarcity.</a:t>
                       </a:r>
                       <a:endParaRPr lang="en-US" sz="1600" dirty="0">
                         <a:latin typeface="Calibri" charset="0"/>
